--- a/pptx/Module03_Dictionnaire_des_données.pptx
+++ b/pptx/Module03_Dictionnaire_des_données.pptx
@@ -12,9 +12,11 @@
     <p:sldId id="260" r:id="rId6"/>
     <p:sldId id="261" r:id="rId7"/>
     <p:sldId id="262" r:id="rId8"/>
+    <p:sldId id="263" r:id="rId9"/>
+    <p:sldId id="264" r:id="rId10"/>
   </p:sldIdLst>
   <p:notesMasterIdLst>
-    <p:notesMasterId r:id="rId9"/>
+    <p:notesMasterId r:id="rId11"/>
   </p:notesMasterIdLst>
   <p:sldSz cx="9144000" cy="5143500"/>
   <p:notesSz cx="5143500" cy="9144000"/>
@@ -596,7 +598,7 @@
           <a:p>
             <a:r>
               <a:rPr lang="en-US" dirty="0"/>
-              <a:t/>
+              <a:t>Insister : cette étape est souvent négligée par les débutants qui veulent coder directement. C'est une ERREUR.</a:t>
             </a:r>
             <a:endParaRPr lang="en-US" dirty="0"/>
           </a:p>
@@ -684,7 +686,7 @@
           <a:p>
             <a:r>
               <a:rPr lang="en-US" dirty="0"/>
-              <a:t/>
+              <a:t>Question piège : 'Faut-il stocker l'âge ?' → NON car il change chaque jour. On stocke date_naissance et on calcule l'âge à la demande.</a:t>
             </a:r>
             <a:endParaRPr lang="en-US" dirty="0"/>
           </a:p>
@@ -772,7 +774,7 @@
           <a:p>
             <a:r>
               <a:rPr lang="en-US" dirty="0"/>
-              <a:t/>
+              <a:t>Exercice rapide : donner une liste de 10 termes et demander de repérer les synonymes et polysèmes.</a:t>
             </a:r>
             <a:endParaRPr lang="en-US" dirty="0"/>
           </a:p>
@@ -860,7 +862,7 @@
           <a:p>
             <a:r>
               <a:rPr lang="en-US" dirty="0"/>
-              <a:t/>
+              <a:t>Template à compléter par les étudiants pour TOUTES les entités SwissSound.</a:t>
             </a:r>
             <a:endParaRPr lang="en-US" dirty="0"/>
           </a:p>
@@ -948,7 +950,7 @@
           <a:p>
             <a:r>
               <a:rPr lang="en-US" dirty="0"/>
-              <a:t/>
+              <a:t>Les règles de gestion sont le pont entre le métier et la technique. Chaque règle se traduira en contrainte SQL plus tard.</a:t>
             </a:r>
             <a:endParaRPr lang="en-US" dirty="0"/>
           </a:p>
@@ -1036,7 +1038,7 @@
           <a:p>
             <a:r>
               <a:rPr lang="en-US" dirty="0"/>
-              <a:t/>
+              <a:t>Travail individuel puis mise en commun. Le DD final doit avoir ~40 données.</a:t>
             </a:r>
             <a:endParaRPr lang="en-US" dirty="0"/>
           </a:p>
@@ -1060,6 +1062,182 @@
             <a:fld id="{F7021451-1387-4CA6-816F-3879F97B5CBC}" type="slidenum">
               <a:rPr lang="en-US"/>
               <a:t>7</a:t>
+            </a:fld>
+            <a:endParaRPr lang="en-US"/>
+          </a:p>
+        </p:txBody>
+      </p:sp>
+    </p:spTree>
+    <p:extLst>
+      <p:ext uri="{BB962C8B-B14F-4D97-AF65-F5344CB8AC3E}">
+        <p14:creationId xmlns:p14="http://schemas.microsoft.com/office/powerpoint/2010/main" val="1024086991"/>
+      </p:ext>
+    </p:extLst>
+  </p:cSld>
+  <p:clrMapOvr>
+    <a:masterClrMapping/>
+  </p:clrMapOvr>
+</p:notes>
+</file>
+
+<file path=ppt/notesSlides/notesSlide8.xml><?xml version="1.0" encoding="utf-8"?>
+<p:notes xmlns:a="http://schemas.openxmlformats.org/drawingml/2006/main" xmlns:r="http://schemas.openxmlformats.org/officeDocument/2006/relationships" xmlns:p="http://schemas.openxmlformats.org/presentationml/2006/main">
+  <p:cSld>
+    <p:spTree>
+      <p:nvGrpSpPr>
+        <p:cNvPr id="1" name=""/>
+        <p:cNvGrpSpPr/>
+        <p:nvPr/>
+      </p:nvGrpSpPr>
+      <p:grpSpPr>
+        <a:xfrm>
+          <a:off x="0" y="0"/>
+          <a:ext cx="0" cy="0"/>
+          <a:chOff x="0" y="0"/>
+          <a:chExt cx="0" cy="0"/>
+        </a:xfrm>
+      </p:grpSpPr>
+      <p:sp>
+        <p:nvSpPr>
+          <p:cNvPr id="2" name="Slide Image Placeholder 1"/>
+          <p:cNvSpPr>
+            <a:spLocks noGrp="1" noRot="1" noChangeAspect="1"/>
+          </p:cNvSpPr>
+          <p:nvPr>
+            <p:ph type="sldImg"/>
+          </p:nvPr>
+        </p:nvSpPr>
+        <p:spPr/>
+      </p:sp>
+      <p:sp>
+        <p:nvSpPr>
+          <p:cNvPr id="3" name="Notes Placeholder 2"/>
+          <p:cNvSpPr>
+            <a:spLocks noGrp="1"/>
+          </p:cNvSpPr>
+          <p:nvPr>
+            <p:ph type="body" idx="1"/>
+          </p:nvPr>
+        </p:nvSpPr>
+        <p:spPr/>
+        <p:txBody>
+          <a:bodyPr/>
+          <a:lstStyle/>
+          <a:p>
+            <a:r>
+              <a:rPr lang="en-US" dirty="0"/>
+              <a:t/>
+            </a:r>
+            <a:endParaRPr lang="en-US" dirty="0"/>
+          </a:p>
+        </p:txBody>
+      </p:sp>
+      <p:sp>
+        <p:nvSpPr>
+          <p:cNvPr id="4" name="Slide Number Placeholder 3"/>
+          <p:cNvSpPr>
+            <a:spLocks noGrp="1"/>
+          </p:cNvSpPr>
+          <p:nvPr>
+            <p:ph type="sldNum" sz="quarter" idx="10"/>
+          </p:nvPr>
+        </p:nvSpPr>
+        <p:spPr/>
+        <p:txBody>
+          <a:bodyPr/>
+          <a:lstStyle/>
+          <a:p>
+            <a:fld id="{F7021451-1387-4CA6-816F-3879F97B5CBC}" type="slidenum">
+              <a:rPr lang="en-US"/>
+              <a:t>8</a:t>
+            </a:fld>
+            <a:endParaRPr lang="en-US"/>
+          </a:p>
+        </p:txBody>
+      </p:sp>
+    </p:spTree>
+    <p:extLst>
+      <p:ext uri="{BB962C8B-B14F-4D97-AF65-F5344CB8AC3E}">
+        <p14:creationId xmlns:p14="http://schemas.microsoft.com/office/powerpoint/2010/main" val="1024086991"/>
+      </p:ext>
+    </p:extLst>
+  </p:cSld>
+  <p:clrMapOvr>
+    <a:masterClrMapping/>
+  </p:clrMapOvr>
+</p:notes>
+</file>
+
+<file path=ppt/notesSlides/notesSlide9.xml><?xml version="1.0" encoding="utf-8"?>
+<p:notes xmlns:a="http://schemas.openxmlformats.org/drawingml/2006/main" xmlns:r="http://schemas.openxmlformats.org/officeDocument/2006/relationships" xmlns:p="http://schemas.openxmlformats.org/presentationml/2006/main">
+  <p:cSld>
+    <p:spTree>
+      <p:nvGrpSpPr>
+        <p:cNvPr id="1" name=""/>
+        <p:cNvGrpSpPr/>
+        <p:nvPr/>
+      </p:nvGrpSpPr>
+      <p:grpSpPr>
+        <a:xfrm>
+          <a:off x="0" y="0"/>
+          <a:ext cx="0" cy="0"/>
+          <a:chOff x="0" y="0"/>
+          <a:chExt cx="0" cy="0"/>
+        </a:xfrm>
+      </p:grpSpPr>
+      <p:sp>
+        <p:nvSpPr>
+          <p:cNvPr id="2" name="Slide Image Placeholder 1"/>
+          <p:cNvSpPr>
+            <a:spLocks noGrp="1" noRot="1" noChangeAspect="1"/>
+          </p:cNvSpPr>
+          <p:nvPr>
+            <p:ph type="sldImg"/>
+          </p:nvPr>
+        </p:nvSpPr>
+        <p:spPr/>
+      </p:sp>
+      <p:sp>
+        <p:nvSpPr>
+          <p:cNvPr id="3" name="Notes Placeholder 2"/>
+          <p:cNvSpPr>
+            <a:spLocks noGrp="1"/>
+          </p:cNvSpPr>
+          <p:nvPr>
+            <p:ph type="body" idx="1"/>
+          </p:nvPr>
+        </p:nvSpPr>
+        <p:spPr/>
+        <p:txBody>
+          <a:bodyPr/>
+          <a:lstStyle/>
+          <a:p>
+            <a:r>
+              <a:rPr lang="en-US" dirty="0"/>
+              <a:t/>
+            </a:r>
+            <a:endParaRPr lang="en-US" dirty="0"/>
+          </a:p>
+        </p:txBody>
+      </p:sp>
+      <p:sp>
+        <p:nvSpPr>
+          <p:cNvPr id="4" name="Slide Number Placeholder 3"/>
+          <p:cNvSpPr>
+            <a:spLocks noGrp="1"/>
+          </p:cNvSpPr>
+          <p:nvPr>
+            <p:ph type="sldNum" sz="quarter" idx="10"/>
+          </p:nvPr>
+        </p:nvSpPr>
+        <p:spPr/>
+        <p:txBody>
+          <a:bodyPr/>
+          <a:lstStyle/>
+          <a:p>
+            <a:fld id="{F7021451-1387-4CA6-816F-3879F97B5CBC}" type="slidenum">
+              <a:rPr lang="en-US"/>
+              <a:t>9</a:t>
             </a:fld>
             <a:endParaRPr lang="en-US"/>
           </a:p>
@@ -1445,7 +1623,7 @@
         </p:blipFill>
         <p:spPr>
           <a:xfrm>
-            <a:off x="3931920" y="457200"/>
+            <a:off x="3931920" y="365760"/>
             <a:ext cx="1280160" cy="1280160"/>
           </a:xfrm>
           <a:prstGeom prst="rect">
@@ -1461,7 +1639,7 @@
         </p:nvSpPr>
         <p:spPr>
           <a:xfrm>
-            <a:off x="457200" y="1828800"/>
+            <a:off x="457200" y="1737360"/>
             <a:ext cx="8229600" cy="457200"/>
           </a:xfrm>
           <a:prstGeom prst="rect">
@@ -1500,8 +1678,8 @@
         </p:nvSpPr>
         <p:spPr>
           <a:xfrm>
-            <a:off x="457200" y="2286000"/>
-            <a:ext cx="8229600" cy="822960"/>
+            <a:off x="274320" y="2194560"/>
+            <a:ext cx="8595360" cy="822960"/>
           </a:xfrm>
           <a:prstGeom prst="rect">
             <a:avLst/>
@@ -1517,7 +1695,7 @@
               <a:buNone/>
             </a:pPr>
             <a:r>
-              <a:rPr lang="en-US" sz="3400" b="1" dirty="0">
+              <a:rPr lang="en-US" sz="3200" b="1" dirty="0">
                 <a:solidFill>
                   <a:srgbClr val="FFFFFF"/>
                 </a:solidFill>
@@ -1527,7 +1705,7 @@
               </a:rPr>
               <a:t>Dictionnaire des données</a:t>
             </a:r>
-            <a:endParaRPr lang="en-US" sz="3400" dirty="0"/>
+            <a:endParaRPr lang="en-US" sz="3200" dirty="0"/>
           </a:p>
         </p:txBody>
       </p:sp>
@@ -1539,7 +1717,7 @@
         </p:nvSpPr>
         <p:spPr>
           <a:xfrm>
-            <a:off x="457200" y="3108960"/>
+            <a:off x="457200" y="3017520"/>
             <a:ext cx="8229600" cy="457200"/>
           </a:xfrm>
           <a:prstGeom prst="rect">
@@ -1556,7 +1734,7 @@
               <a:buNone/>
             </a:pPr>
             <a:r>
-              <a:rPr lang="en-US" sz="1600" dirty="0">
+              <a:rPr lang="en-US" sz="1500" dirty="0">
                 <a:solidFill>
                   <a:srgbClr val="CCCCCC"/>
                 </a:solidFill>
@@ -1564,9 +1742,9 @@
                 <a:ea typeface="Calibri" pitchFamily="34" charset="-122"/>
                 <a:cs typeface="Calibri" pitchFamily="34" charset="-120"/>
               </a:rPr>
-              <a:t>Recenser toutes les données, formats, synonymes</a:t>
+              <a:t>Recenser toutes les données · Formats · Synonymes</a:t>
             </a:r>
-            <a:endParaRPr lang="en-US" sz="1600" dirty="0"/>
+            <a:endParaRPr lang="en-US" sz="1500" dirty="0"/>
           </a:p>
         </p:txBody>
       </p:sp>
@@ -1597,13 +1775,13 @@
             <a:r>
               <a:rPr lang="en-US" sz="1100" dirty="0">
                 <a:solidFill>
-                  <a:srgbClr val="AAAACC"/>
+                  <a:srgbClr val="AA99CC"/>
                 </a:solidFill>
                 <a:latin typeface="Calibri" pitchFamily="34" charset="0"/>
                 <a:ea typeface="Calibri" pitchFamily="34" charset="-122"/>
                 <a:cs typeface="Calibri" pitchFamily="34" charset="-120"/>
               </a:rPr>
-              <a:t>Unit 4 — Database Design &amp; Development | SwissSound Studios</a:t>
+              <a:t>SwissSound Studios | BTEC: P1 M1 | LO1</a:t>
             </a:r>
             <a:endParaRPr lang="en-US" sz="1100" dirty="0"/>
           </a:p>
@@ -1636,13 +1814,13 @@
             <a:r>
               <a:rPr lang="en-US" sz="1000" dirty="0">
                 <a:solidFill>
-                  <a:srgbClr val="8888AA"/>
+                  <a:srgbClr val="887799"/>
                 </a:solidFill>
                 <a:latin typeface="Calibri" pitchFamily="34" charset="0"/>
                 <a:ea typeface="Calibri" pitchFamily="34" charset="-122"/>
                 <a:cs typeface="Calibri" pitchFamily="34" charset="-120"/>
               </a:rPr>
-              <a:t>BTEC : P1 M1 | LO1</a:t>
+              <a:t>🎵 Unit 4 — Database Design &amp; Development</a:t>
             </a:r>
             <a:endParaRPr lang="en-US" sz="1000" dirty="0"/>
           </a:p>
@@ -1689,7 +1867,7 @@
         <p:spPr>
           <a:xfrm>
             <a:off x="0" y="0"/>
-            <a:ext cx="9144000" cy="73152"/>
+            <a:ext cx="9144000" cy="54864"/>
           </a:xfrm>
           <a:prstGeom prst="rect">
             <a:avLst/>
@@ -1708,8 +1886,8 @@
         </p:nvSpPr>
         <p:spPr>
           <a:xfrm>
-            <a:off x="457200" y="228600"/>
-            <a:ext cx="8229600" cy="640080"/>
+            <a:off x="457200" y="182880"/>
+            <a:ext cx="8229600" cy="594360"/>
           </a:xfrm>
           <a:prstGeom prst="rect">
             <a:avLst/>
@@ -1725,7 +1903,7 @@
               <a:buNone/>
             </a:pPr>
             <a:r>
-              <a:rPr lang="en-US" sz="2600" b="1" dirty="0">
+              <a:rPr lang="en-US" sz="2400" b="1" dirty="0">
                 <a:solidFill>
                   <a:srgbClr val="1B5E20"/>
                 </a:solidFill>
@@ -1733,9 +1911,9 @@
                 <a:ea typeface="Trebuchet MS" pitchFamily="34" charset="-122"/>
                 <a:cs typeface="Trebuchet MS" pitchFamily="34" charset="-120"/>
               </a:rPr>
-              <a:t>Qu'est-ce qu'un dictionnaire des données ?</a:t>
+              <a:t>Le dictionnaire des données (DD)</a:t>
             </a:r>
-            <a:endParaRPr lang="en-US" sz="2600" dirty="0"/>
+            <a:endParaRPr lang="en-US" sz="2400" dirty="0"/>
           </a:p>
         </p:txBody>
       </p:sp>
@@ -1747,8 +1925,8 @@
         </p:nvSpPr>
         <p:spPr>
           <a:xfrm>
-            <a:off x="457200" y="1051560"/>
-            <a:ext cx="8229600" cy="640080"/>
+            <a:off x="457200" y="914400"/>
+            <a:ext cx="8229600" cy="566928"/>
           </a:xfrm>
           <a:prstGeom prst="rect">
             <a:avLst/>
@@ -1774,8 +1952,8 @@
         </p:nvSpPr>
         <p:spPr>
           <a:xfrm>
-            <a:off x="457200" y="1051560"/>
-            <a:ext cx="54864" cy="640080"/>
+            <a:off x="457200" y="914400"/>
+            <a:ext cx="45720" cy="566928"/>
           </a:xfrm>
           <a:prstGeom prst="rect">
             <a:avLst/>
@@ -1794,8 +1972,8 @@
         </p:nvSpPr>
         <p:spPr>
           <a:xfrm>
-            <a:off x="731520" y="1051560"/>
-            <a:ext cx="7772400" cy="640080"/>
+            <a:off x="685800" y="914400"/>
+            <a:ext cx="7818120" cy="566928"/>
           </a:xfrm>
           <a:prstGeom prst="rect">
             <a:avLst/>
@@ -1811,7 +1989,93 @@
               <a:buNone/>
             </a:pPr>
             <a:r>
-              <a:rPr lang="en-US" sz="1300" dirty="0">
+              <a:rPr lang="en-US" sz="1200" dirty="0">
+                <a:solidFill>
+                  <a:srgbClr val="1A1A2E"/>
+                </a:solidFill>
+                <a:latin typeface="Calibri" pitchFamily="34" charset="0"/>
+                <a:ea typeface="Calibri" pitchFamily="34" charset="-122"/>
+                <a:cs typeface="Calibri" pitchFamily="34" charset="-120"/>
+              </a:rPr>
+              <a:t>PREMIÈRE étape de la conception (avant MCD, MLD, tout !)</a:t>
+            </a:r>
+            <a:endParaRPr lang="en-US" sz="1200" dirty="0"/>
+          </a:p>
+        </p:txBody>
+      </p:sp>
+      <p:sp>
+        <p:nvSpPr>
+          <p:cNvPr id="7" name="Shape 5"/>
+          <p:cNvSpPr/>
+          <p:nvPr/>
+        </p:nvSpPr>
+        <p:spPr>
+          <a:xfrm>
+            <a:off x="457200" y="1508760"/>
+            <a:ext cx="8229600" cy="566928"/>
+          </a:xfrm>
+          <a:prstGeom prst="rect">
+            <a:avLst/>
+          </a:prstGeom>
+          <a:solidFill>
+            <a:srgbClr val="E8F5E9"/>
+          </a:solidFill>
+          <a:ln/>
+          <a:effectLst>
+            <a:outerShdw sx="100000" sy="100000" kx="0" ky="0" algn="bl" rotWithShape="0" blurRad="50800" dist="25400" dir="8100000">
+              <a:srgbClr val="000000">
+                <a:alpha val="12000"/>
+              </a:srgbClr>
+            </a:outerShdw>
+          </a:effectLst>
+        </p:spPr>
+      </p:sp>
+      <p:sp>
+        <p:nvSpPr>
+          <p:cNvPr id="8" name="Shape 6"/>
+          <p:cNvSpPr/>
+          <p:nvPr/>
+        </p:nvSpPr>
+        <p:spPr>
+          <a:xfrm>
+            <a:off x="457200" y="1508760"/>
+            <a:ext cx="45720" cy="566928"/>
+          </a:xfrm>
+          <a:prstGeom prst="rect">
+            <a:avLst/>
+          </a:prstGeom>
+          <a:solidFill>
+            <a:srgbClr val="2E7D32"/>
+          </a:solidFill>
+          <a:ln/>
+        </p:spPr>
+      </p:sp>
+      <p:sp>
+        <p:nvSpPr>
+          <p:cNvPr id="9" name="Text 7"/>
+          <p:cNvSpPr/>
+          <p:nvPr/>
+        </p:nvSpPr>
+        <p:spPr>
+          <a:xfrm>
+            <a:off x="685800" y="1508760"/>
+            <a:ext cx="7818120" cy="566928"/>
+          </a:xfrm>
+          <a:prstGeom prst="rect">
+            <a:avLst/>
+          </a:prstGeom>
+          <a:noFill/>
+          <a:ln/>
+        </p:spPr>
+        <p:txBody>
+          <a:bodyPr wrap="square" lIns="0" tIns="0" rIns="0" bIns="0" rtlCol="0" anchor="ctr"/>
+          <a:lstStyle/>
+          <a:p>
+            <a:pPr indent="0" marL="0">
+              <a:buNone/>
+            </a:pPr>
+            <a:r>
+              <a:rPr lang="en-US" sz="1200" dirty="0">
                 <a:solidFill>
                   <a:srgbClr val="1A1A2E"/>
                 </a:solidFill>
@@ -1821,26 +2085,26 @@
               </a:rPr>
               <a:t>Liste EXHAUSTIVE de toutes les données du système</a:t>
             </a:r>
-            <a:endParaRPr lang="en-US" sz="1300" dirty="0"/>
-          </a:p>
-        </p:txBody>
-      </p:sp>
-      <p:sp>
-        <p:nvSpPr>
-          <p:cNvPr id="7" name="Shape 5"/>
-          <p:cNvSpPr/>
-          <p:nvPr/>
-        </p:nvSpPr>
-        <p:spPr>
-          <a:xfrm>
-            <a:off x="457200" y="1965960"/>
-            <a:ext cx="8229600" cy="640080"/>
-          </a:xfrm>
-          <a:prstGeom prst="rect">
-            <a:avLst/>
-          </a:prstGeom>
-          <a:solidFill>
-            <a:srgbClr val="E8F5E9"/>
+            <a:endParaRPr lang="en-US" sz="1200" dirty="0"/>
+          </a:p>
+        </p:txBody>
+      </p:sp>
+      <p:sp>
+        <p:nvSpPr>
+          <p:cNvPr id="10" name="Shape 8"/>
+          <p:cNvSpPr/>
+          <p:nvPr/>
+        </p:nvSpPr>
+        <p:spPr>
+          <a:xfrm>
+            <a:off x="457200" y="2103120"/>
+            <a:ext cx="8229600" cy="566928"/>
+          </a:xfrm>
+          <a:prstGeom prst="rect">
+            <a:avLst/>
+          </a:prstGeom>
+          <a:solidFill>
+            <a:srgbClr val="FFFFFF"/>
           </a:solidFill>
           <a:ln/>
           <a:effectLst>
@@ -1854,14 +2118,14 @@
       </p:sp>
       <p:sp>
         <p:nvSpPr>
-          <p:cNvPr id="8" name="Shape 6"/>
-          <p:cNvSpPr/>
-          <p:nvPr/>
-        </p:nvSpPr>
-        <p:spPr>
-          <a:xfrm>
-            <a:off x="457200" y="1965960"/>
-            <a:ext cx="54864" cy="640080"/>
+          <p:cNvPr id="11" name="Shape 9"/>
+          <p:cNvSpPr/>
+          <p:nvPr/>
+        </p:nvSpPr>
+        <p:spPr>
+          <a:xfrm>
+            <a:off x="457200" y="2103120"/>
+            <a:ext cx="45720" cy="566928"/>
           </a:xfrm>
           <a:prstGeom prst="rect">
             <a:avLst/>
@@ -1874,14 +2138,14 @@
       </p:sp>
       <p:sp>
         <p:nvSpPr>
-          <p:cNvPr id="9" name="Text 7"/>
-          <p:cNvSpPr/>
-          <p:nvPr/>
-        </p:nvSpPr>
-        <p:spPr>
-          <a:xfrm>
-            <a:off x="731520" y="1965960"/>
-            <a:ext cx="7772400" cy="640080"/>
+          <p:cNvPr id="12" name="Text 10"/>
+          <p:cNvSpPr/>
+          <p:nvPr/>
+        </p:nvSpPr>
+        <p:spPr>
+          <a:xfrm>
+            <a:off x="685800" y="2103120"/>
+            <a:ext cx="7818120" cy="566928"/>
           </a:xfrm>
           <a:prstGeom prst="rect">
             <a:avLst/>
@@ -1897,7 +2161,7 @@
               <a:buNone/>
             </a:pPr>
             <a:r>
-              <a:rPr lang="en-US" sz="1300" dirty="0">
+              <a:rPr lang="en-US" sz="1200" dirty="0">
                 <a:solidFill>
                   <a:srgbClr val="1A1A2E"/>
                 </a:solidFill>
@@ -1905,28 +2169,28 @@
                 <a:ea typeface="Calibri" pitchFamily="34" charset="-122"/>
                 <a:cs typeface="Calibri" pitchFamily="34" charset="-120"/>
               </a:rPr>
-              <a:t>Pour chaque donnée : nom, description, type, format, longueur</a:t>
+              <a:t>Source : les documents métier identifiés dans le cahier des charges</a:t>
             </a:r>
-            <a:endParaRPr lang="en-US" sz="1300" dirty="0"/>
-          </a:p>
-        </p:txBody>
-      </p:sp>
-      <p:sp>
-        <p:nvSpPr>
-          <p:cNvPr id="10" name="Shape 8"/>
-          <p:cNvSpPr/>
-          <p:nvPr/>
-        </p:nvSpPr>
-        <p:spPr>
-          <a:xfrm>
-            <a:off x="457200" y="2880360"/>
-            <a:ext cx="8229600" cy="640080"/>
-          </a:xfrm>
-          <a:prstGeom prst="rect">
-            <a:avLst/>
-          </a:prstGeom>
-          <a:solidFill>
-            <a:srgbClr val="FFFFFF"/>
+            <a:endParaRPr lang="en-US" sz="1200" dirty="0"/>
+          </a:p>
+        </p:txBody>
+      </p:sp>
+      <p:sp>
+        <p:nvSpPr>
+          <p:cNvPr id="13" name="Shape 11"/>
+          <p:cNvSpPr/>
+          <p:nvPr/>
+        </p:nvSpPr>
+        <p:spPr>
+          <a:xfrm>
+            <a:off x="457200" y="2697480"/>
+            <a:ext cx="8229600" cy="566928"/>
+          </a:xfrm>
+          <a:prstGeom prst="rect">
+            <a:avLst/>
+          </a:prstGeom>
+          <a:solidFill>
+            <a:srgbClr val="E8F5E9"/>
           </a:solidFill>
           <a:ln/>
           <a:effectLst>
@@ -1940,14 +2204,14 @@
       </p:sp>
       <p:sp>
         <p:nvSpPr>
-          <p:cNvPr id="11" name="Shape 9"/>
-          <p:cNvSpPr/>
-          <p:nvPr/>
-        </p:nvSpPr>
-        <p:spPr>
-          <a:xfrm>
-            <a:off x="457200" y="2880360"/>
-            <a:ext cx="54864" cy="640080"/>
+          <p:cNvPr id="14" name="Shape 12"/>
+          <p:cNvSpPr/>
+          <p:nvPr/>
+        </p:nvSpPr>
+        <p:spPr>
+          <a:xfrm>
+            <a:off x="457200" y="2697480"/>
+            <a:ext cx="45720" cy="566928"/>
           </a:xfrm>
           <a:prstGeom prst="rect">
             <a:avLst/>
@@ -1960,14 +2224,14 @@
       </p:sp>
       <p:sp>
         <p:nvSpPr>
-          <p:cNvPr id="12" name="Text 10"/>
-          <p:cNvSpPr/>
-          <p:nvPr/>
-        </p:nvSpPr>
-        <p:spPr>
-          <a:xfrm>
-            <a:off x="731520" y="2880360"/>
-            <a:ext cx="7772400" cy="640080"/>
+          <p:cNvPr id="15" name="Text 13"/>
+          <p:cNvSpPr/>
+          <p:nvPr/>
+        </p:nvSpPr>
+        <p:spPr>
+          <a:xfrm>
+            <a:off x="685800" y="2697480"/>
+            <a:ext cx="7818120" cy="566928"/>
           </a:xfrm>
           <a:prstGeom prst="rect">
             <a:avLst/>
@@ -1983,7 +2247,7 @@
               <a:buNone/>
             </a:pPr>
             <a:r>
-              <a:rPr lang="en-US" sz="1300" dirty="0">
+              <a:rPr lang="en-US" sz="1200" dirty="0">
                 <a:solidFill>
                   <a:srgbClr val="1A1A2E"/>
                 </a:solidFill>
@@ -1991,28 +2255,28 @@
                 <a:ea typeface="Calibri" pitchFamily="34" charset="-122"/>
                 <a:cs typeface="Calibri" pitchFamily="34" charset="-120"/>
               </a:rPr>
-              <a:t>Première étape de la conception (avant toute modélisation)</a:t>
+              <a:t>Pour chaque donnée : nom, description, type, format, longueur, règle</a:t>
             </a:r>
-            <a:endParaRPr lang="en-US" sz="1300" dirty="0"/>
-          </a:p>
-        </p:txBody>
-      </p:sp>
-      <p:sp>
-        <p:nvSpPr>
-          <p:cNvPr id="13" name="Shape 11"/>
-          <p:cNvSpPr/>
-          <p:nvPr/>
-        </p:nvSpPr>
-        <p:spPr>
-          <a:xfrm>
-            <a:off x="457200" y="3794760"/>
-            <a:ext cx="8229600" cy="640080"/>
-          </a:xfrm>
-          <a:prstGeom prst="rect">
-            <a:avLst/>
-          </a:prstGeom>
-          <a:solidFill>
-            <a:srgbClr val="E8F5E9"/>
+            <a:endParaRPr lang="en-US" sz="1200" dirty="0"/>
+          </a:p>
+        </p:txBody>
+      </p:sp>
+      <p:sp>
+        <p:nvSpPr>
+          <p:cNvPr id="16" name="Shape 14"/>
+          <p:cNvSpPr/>
+          <p:nvPr/>
+        </p:nvSpPr>
+        <p:spPr>
+          <a:xfrm>
+            <a:off x="457200" y="3291840"/>
+            <a:ext cx="8229600" cy="566928"/>
+          </a:xfrm>
+          <a:prstGeom prst="rect">
+            <a:avLst/>
+          </a:prstGeom>
+          <a:solidFill>
+            <a:srgbClr val="FFFFFF"/>
           </a:solidFill>
           <a:ln/>
           <a:effectLst>
@@ -2026,14 +2290,14 @@
       </p:sp>
       <p:sp>
         <p:nvSpPr>
-          <p:cNvPr id="14" name="Shape 12"/>
-          <p:cNvSpPr/>
-          <p:nvPr/>
-        </p:nvSpPr>
-        <p:spPr>
-          <a:xfrm>
-            <a:off x="457200" y="3794760"/>
-            <a:ext cx="54864" cy="640080"/>
+          <p:cNvPr id="17" name="Shape 15"/>
+          <p:cNvSpPr/>
+          <p:nvPr/>
+        </p:nvSpPr>
+        <p:spPr>
+          <a:xfrm>
+            <a:off x="457200" y="3291840"/>
+            <a:ext cx="45720" cy="566928"/>
           </a:xfrm>
           <a:prstGeom prst="rect">
             <a:avLst/>
@@ -2046,14 +2310,14 @@
       </p:sp>
       <p:sp>
         <p:nvSpPr>
-          <p:cNvPr id="15" name="Text 13"/>
-          <p:cNvSpPr/>
-          <p:nvPr/>
-        </p:nvSpPr>
-        <p:spPr>
-          <a:xfrm>
-            <a:off x="731520" y="3794760"/>
-            <a:ext cx="7772400" cy="640080"/>
+          <p:cNvPr id="18" name="Text 16"/>
+          <p:cNvSpPr/>
+          <p:nvPr/>
+        </p:nvSpPr>
+        <p:spPr>
+          <a:xfrm>
+            <a:off x="685800" y="3291840"/>
+            <a:ext cx="7818120" cy="566928"/>
           </a:xfrm>
           <a:prstGeom prst="rect">
             <a:avLst/>
@@ -2069,7 +2333,7 @@
               <a:buNone/>
             </a:pPr>
             <a:r>
-              <a:rPr lang="en-US" sz="1300" dirty="0">
+              <a:rPr lang="en-US" sz="1200" dirty="0">
                 <a:solidFill>
                   <a:srgbClr val="1A1A2E"/>
                 </a:solidFill>
@@ -2077,22 +2341,69 @@
                 <a:ea typeface="Calibri" pitchFamily="34" charset="-122"/>
                 <a:cs typeface="Calibri" pitchFamily="34" charset="-120"/>
               </a:rPr>
-              <a:t>Source : les documents métier (fiches, bons, factures)</a:t>
+              <a:t>Le DD est la FONDATION de toute la conception</a:t>
             </a:r>
-            <a:endParaRPr lang="en-US" sz="1300" dirty="0"/>
-          </a:p>
-        </p:txBody>
-      </p:sp>
-      <p:sp>
-        <p:nvSpPr>
-          <p:cNvPr id="16" name="Text 14"/>
-          <p:cNvSpPr/>
-          <p:nvPr/>
-        </p:nvSpPr>
-        <p:spPr>
-          <a:xfrm>
-            <a:off x="8229600" y="4754880"/>
-            <a:ext cx="731520" cy="274320"/>
+            <a:endParaRPr lang="en-US" sz="1200" dirty="0"/>
+          </a:p>
+        </p:txBody>
+      </p:sp>
+      <p:sp>
+        <p:nvSpPr>
+          <p:cNvPr id="19" name="Shape 17"/>
+          <p:cNvSpPr/>
+          <p:nvPr/>
+        </p:nvSpPr>
+        <p:spPr>
+          <a:xfrm>
+            <a:off x="457200" y="3886200"/>
+            <a:ext cx="8229600" cy="566928"/>
+          </a:xfrm>
+          <a:prstGeom prst="rect">
+            <a:avLst/>
+          </a:prstGeom>
+          <a:solidFill>
+            <a:srgbClr val="E8F5E9"/>
+          </a:solidFill>
+          <a:ln/>
+          <a:effectLst>
+            <a:outerShdw sx="100000" sy="100000" kx="0" ky="0" algn="bl" rotWithShape="0" blurRad="50800" dist="25400" dir="8100000">
+              <a:srgbClr val="000000">
+                <a:alpha val="12000"/>
+              </a:srgbClr>
+            </a:outerShdw>
+          </a:effectLst>
+        </p:spPr>
+      </p:sp>
+      <p:sp>
+        <p:nvSpPr>
+          <p:cNvPr id="20" name="Shape 18"/>
+          <p:cNvSpPr/>
+          <p:nvPr/>
+        </p:nvSpPr>
+        <p:spPr>
+          <a:xfrm>
+            <a:off x="457200" y="3886200"/>
+            <a:ext cx="45720" cy="566928"/>
+          </a:xfrm>
+          <a:prstGeom prst="rect">
+            <a:avLst/>
+          </a:prstGeom>
+          <a:solidFill>
+            <a:srgbClr val="2E7D32"/>
+          </a:solidFill>
+          <a:ln/>
+        </p:spPr>
+      </p:sp>
+      <p:sp>
+        <p:nvSpPr>
+          <p:cNvPr id="21" name="Text 19"/>
+          <p:cNvSpPr/>
+          <p:nvPr/>
+        </p:nvSpPr>
+        <p:spPr>
+          <a:xfrm>
+            <a:off x="685800" y="3886200"/>
+            <a:ext cx="7818120" cy="566928"/>
           </a:xfrm>
           <a:prstGeom prst="rect">
             <a:avLst/>
@@ -2104,21 +2415,21 @@
           <a:bodyPr wrap="square" lIns="0" tIns="0" rIns="0" bIns="0" rtlCol="0" anchor="ctr"/>
           <a:lstStyle/>
           <a:p>
-            <a:pPr algn="r" indent="0" marL="0">
+            <a:pPr indent="0" marL="0">
               <a:buNone/>
             </a:pPr>
             <a:r>
-              <a:rPr lang="en-US" sz="900" dirty="0">
+              <a:rPr lang="en-US" sz="1200" dirty="0">
                 <a:solidFill>
-                  <a:srgbClr val="AAAAAA"/>
+                  <a:srgbClr val="1A1A2E"/>
                 </a:solidFill>
                 <a:latin typeface="Calibri" pitchFamily="34" charset="0"/>
                 <a:ea typeface="Calibri" pitchFamily="34" charset="-122"/>
                 <a:cs typeface="Calibri" pitchFamily="34" charset="-120"/>
               </a:rPr>
-              <a:t>2/6</a:t>
+              <a:t>Si le DD est incomplet → le MCD sera incomplet → la BDD sera incomplète</a:t>
             </a:r>
-            <a:endParaRPr lang="en-US" sz="900" dirty="0"/>
+            <a:endParaRPr lang="en-US" sz="1200" dirty="0"/>
           </a:p>
         </p:txBody>
       </p:sp>
@@ -2163,7 +2474,7 @@
         <p:spPr>
           <a:xfrm>
             <a:off x="0" y="0"/>
-            <a:ext cx="9144000" cy="73152"/>
+            <a:ext cx="9144000" cy="54864"/>
           </a:xfrm>
           <a:prstGeom prst="rect">
             <a:avLst/>
@@ -2182,8 +2493,8 @@
         </p:nvSpPr>
         <p:spPr>
           <a:xfrm>
-            <a:off x="457200" y="228600"/>
-            <a:ext cx="8229600" cy="640080"/>
+            <a:off x="457200" y="182880"/>
+            <a:ext cx="8229600" cy="548640"/>
           </a:xfrm>
           <a:prstGeom prst="rect">
             <a:avLst/>
@@ -2199,7 +2510,7 @@
               <a:buNone/>
             </a:pPr>
             <a:r>
-              <a:rPr lang="en-US" sz="2600" b="1" dirty="0">
+              <a:rPr lang="en-US" sz="2400" b="1" dirty="0">
                 <a:solidFill>
                   <a:srgbClr val="1B5E20"/>
                 </a:solidFill>
@@ -2209,7 +2520,7 @@
               </a:rPr>
               <a:t>Donnée élémentaire vs calculée</a:t>
             </a:r>
-            <a:endParaRPr lang="en-US" sz="2600" dirty="0"/>
+            <a:endParaRPr lang="en-US" sz="2400" dirty="0"/>
           </a:p>
         </p:txBody>
       </p:sp>
@@ -2221,8 +2532,8 @@
         </p:nvSpPr>
         <p:spPr>
           <a:xfrm>
-            <a:off x="457200" y="1051560"/>
-            <a:ext cx="8229600" cy="640080"/>
+            <a:off x="274320" y="914400"/>
+            <a:ext cx="4206240" cy="3840480"/>
           </a:xfrm>
           <a:prstGeom prst="rect">
             <a:avLst/>
@@ -2248,8 +2559,8 @@
         </p:nvSpPr>
         <p:spPr>
           <a:xfrm>
-            <a:off x="457200" y="1051560"/>
-            <a:ext cx="54864" cy="640080"/>
+            <a:off x="274320" y="914400"/>
+            <a:ext cx="4206240" cy="457200"/>
           </a:xfrm>
           <a:prstGeom prst="rect">
             <a:avLst/>
@@ -2268,8 +2579,8 @@
         </p:nvSpPr>
         <p:spPr>
           <a:xfrm>
-            <a:off x="731520" y="1051560"/>
-            <a:ext cx="7772400" cy="640080"/>
+            <a:off x="457200" y="914400"/>
+            <a:ext cx="3840480" cy="457200"/>
           </a:xfrm>
           <a:prstGeom prst="rect">
             <a:avLst/>
@@ -2285,36 +2596,270 @@
               <a:buNone/>
             </a:pPr>
             <a:r>
-              <a:rPr lang="en-US" sz="1300" dirty="0">
+              <a:rPr lang="en-US" sz="1400" b="1" dirty="0">
                 <a:solidFill>
-                  <a:srgbClr val="1A1A2E"/>
+                  <a:srgbClr val="FFFFFF"/>
+                </a:solidFill>
+                <a:latin typeface="Trebuchet MS" pitchFamily="34" charset="0"/>
+                <a:ea typeface="Trebuchet MS" pitchFamily="34" charset="-122"/>
+                <a:cs typeface="Trebuchet MS" pitchFamily="34" charset="-120"/>
+              </a:rPr>
+              <a:t>📦 ÉLÉMENTAIRE (stockée)</a:t>
+            </a:r>
+            <a:endParaRPr lang="en-US" sz="1400" dirty="0"/>
+          </a:p>
+        </p:txBody>
+      </p:sp>
+      <p:sp>
+        <p:nvSpPr>
+          <p:cNvPr id="7" name="Text 5"/>
+          <p:cNvSpPr/>
+          <p:nvPr/>
+        </p:nvSpPr>
+        <p:spPr>
+          <a:xfrm>
+            <a:off x="457200" y="1463040"/>
+            <a:ext cx="3840480" cy="411480"/>
+          </a:xfrm>
+          <a:prstGeom prst="rect">
+            <a:avLst/>
+          </a:prstGeom>
+          <a:noFill/>
+          <a:ln/>
+        </p:spPr>
+        <p:txBody>
+          <a:bodyPr wrap="square" lIns="0" tIns="0" rIns="0" bIns="0" rtlCol="0" anchor="ctr"/>
+          <a:lstStyle/>
+          <a:p>
+            <a:pPr indent="0" marL="0">
+              <a:buNone/>
+            </a:pPr>
+            <a:r>
+              <a:rPr lang="en-US" sz="1100" dirty="0">
+                <a:solidFill>
+                  <a:srgbClr val="333333"/>
                 </a:solidFill>
                 <a:latin typeface="Calibri" pitchFamily="34" charset="0"/>
                 <a:ea typeface="Calibri" pitchFamily="34" charset="-122"/>
                 <a:cs typeface="Calibri" pitchFamily="34" charset="-120"/>
               </a:rPr>
-              <a:t>Élémentaire : stockée directement (nom, date_naissance, tarif)</a:t>
+              <a:t>→ Donnée directement saisie/stockée</a:t>
             </a:r>
-            <a:endParaRPr lang="en-US" sz="1300" dirty="0"/>
-          </a:p>
-        </p:txBody>
-      </p:sp>
-      <p:sp>
-        <p:nvSpPr>
-          <p:cNvPr id="7" name="Shape 5"/>
-          <p:cNvSpPr/>
-          <p:nvPr/>
-        </p:nvSpPr>
-        <p:spPr>
-          <a:xfrm>
-            <a:off x="457200" y="1783080"/>
-            <a:ext cx="8229600" cy="640080"/>
-          </a:xfrm>
-          <a:prstGeom prst="rect">
-            <a:avLst/>
-          </a:prstGeom>
-          <a:solidFill>
-            <a:srgbClr val="E8F5E9"/>
+            <a:endParaRPr lang="en-US" sz="1100" dirty="0"/>
+          </a:p>
+        </p:txBody>
+      </p:sp>
+      <p:sp>
+        <p:nvSpPr>
+          <p:cNvPr id="8" name="Text 6"/>
+          <p:cNvSpPr/>
+          <p:nvPr/>
+        </p:nvSpPr>
+        <p:spPr>
+          <a:xfrm>
+            <a:off x="457200" y="1920240"/>
+            <a:ext cx="3840480" cy="411480"/>
+          </a:xfrm>
+          <a:prstGeom prst="rect">
+            <a:avLst/>
+          </a:prstGeom>
+          <a:noFill/>
+          <a:ln/>
+        </p:spPr>
+        <p:txBody>
+          <a:bodyPr wrap="square" lIns="0" tIns="0" rIns="0" bIns="0" rtlCol="0" anchor="ctr"/>
+          <a:lstStyle/>
+          <a:p>
+            <a:pPr indent="0" marL="0">
+              <a:buNone/>
+            </a:pPr>
+            <a:r>
+              <a:rPr lang="en-US" sz="1100" dirty="0">
+                <a:solidFill>
+                  <a:srgbClr val="333333"/>
+                </a:solidFill>
+                <a:latin typeface="Calibri" pitchFamily="34" charset="0"/>
+                <a:ea typeface="Calibri" pitchFamily="34" charset="-122"/>
+                <a:cs typeface="Calibri" pitchFamily="34" charset="-120"/>
+              </a:rPr>
+              <a:t>→ nom_artiste : 'Léman'</a:t>
+            </a:r>
+            <a:endParaRPr lang="en-US" sz="1100" dirty="0"/>
+          </a:p>
+        </p:txBody>
+      </p:sp>
+      <p:sp>
+        <p:nvSpPr>
+          <p:cNvPr id="9" name="Text 7"/>
+          <p:cNvSpPr/>
+          <p:nvPr/>
+        </p:nvSpPr>
+        <p:spPr>
+          <a:xfrm>
+            <a:off x="457200" y="2377440"/>
+            <a:ext cx="3840480" cy="411480"/>
+          </a:xfrm>
+          <a:prstGeom prst="rect">
+            <a:avLst/>
+          </a:prstGeom>
+          <a:noFill/>
+          <a:ln/>
+        </p:spPr>
+        <p:txBody>
+          <a:bodyPr wrap="square" lIns="0" tIns="0" rIns="0" bIns="0" rtlCol="0" anchor="ctr"/>
+          <a:lstStyle/>
+          <a:p>
+            <a:pPr indent="0" marL="0">
+              <a:buNone/>
+            </a:pPr>
+            <a:r>
+              <a:rPr lang="en-US" sz="1100" dirty="0">
+                <a:solidFill>
+                  <a:srgbClr val="333333"/>
+                </a:solidFill>
+                <a:latin typeface="Calibri" pitchFamily="34" charset="0"/>
+                <a:ea typeface="Calibri" pitchFamily="34" charset="-122"/>
+                <a:cs typeface="Calibri" pitchFamily="34" charset="-120"/>
+              </a:rPr>
+              <a:t>→ date_naissance : '1990-05-12'</a:t>
+            </a:r>
+            <a:endParaRPr lang="en-US" sz="1100" dirty="0"/>
+          </a:p>
+        </p:txBody>
+      </p:sp>
+      <p:sp>
+        <p:nvSpPr>
+          <p:cNvPr id="10" name="Text 8"/>
+          <p:cNvSpPr/>
+          <p:nvPr/>
+        </p:nvSpPr>
+        <p:spPr>
+          <a:xfrm>
+            <a:off x="457200" y="2834640"/>
+            <a:ext cx="3840480" cy="411480"/>
+          </a:xfrm>
+          <a:prstGeom prst="rect">
+            <a:avLst/>
+          </a:prstGeom>
+          <a:noFill/>
+          <a:ln/>
+        </p:spPr>
+        <p:txBody>
+          <a:bodyPr wrap="square" lIns="0" tIns="0" rIns="0" bIns="0" rtlCol="0" anchor="ctr"/>
+          <a:lstStyle/>
+          <a:p>
+            <a:pPr indent="0" marL="0">
+              <a:buNone/>
+            </a:pPr>
+            <a:r>
+              <a:rPr lang="en-US" sz="1100" dirty="0">
+                <a:solidFill>
+                  <a:srgbClr val="333333"/>
+                </a:solidFill>
+                <a:latin typeface="Calibri" pitchFamily="34" charset="0"/>
+                <a:ea typeface="Calibri" pitchFamily="34" charset="-122"/>
+                <a:cs typeface="Calibri" pitchFamily="34" charset="-120"/>
+              </a:rPr>
+              <a:t>→ tarif_horaire : 95.00</a:t>
+            </a:r>
+            <a:endParaRPr lang="en-US" sz="1100" dirty="0"/>
+          </a:p>
+        </p:txBody>
+      </p:sp>
+      <p:sp>
+        <p:nvSpPr>
+          <p:cNvPr id="11" name="Text 9"/>
+          <p:cNvSpPr/>
+          <p:nvPr/>
+        </p:nvSpPr>
+        <p:spPr>
+          <a:xfrm>
+            <a:off x="457200" y="3291840"/>
+            <a:ext cx="3840480" cy="411480"/>
+          </a:xfrm>
+          <a:prstGeom prst="rect">
+            <a:avLst/>
+          </a:prstGeom>
+          <a:noFill/>
+          <a:ln/>
+        </p:spPr>
+        <p:txBody>
+          <a:bodyPr wrap="square" lIns="0" tIns="0" rIns="0" bIns="0" rtlCol="0" anchor="ctr"/>
+          <a:lstStyle/>
+          <a:p>
+            <a:pPr indent="0" marL="0">
+              <a:buNone/>
+            </a:pPr>
+            <a:r>
+              <a:rPr lang="en-US" sz="1100" dirty="0">
+                <a:solidFill>
+                  <a:srgbClr val="333333"/>
+                </a:solidFill>
+                <a:latin typeface="Calibri" pitchFamily="34" charset="0"/>
+                <a:ea typeface="Calibri" pitchFamily="34" charset="-122"/>
+                <a:cs typeface="Calibri" pitchFamily="34" charset="-120"/>
+              </a:rPr>
+              <a:t>→ email : 'marc@mail.ch'</a:t>
+            </a:r>
+            <a:endParaRPr lang="en-US" sz="1100" dirty="0"/>
+          </a:p>
+        </p:txBody>
+      </p:sp>
+      <p:sp>
+        <p:nvSpPr>
+          <p:cNvPr id="12" name="Text 10"/>
+          <p:cNvSpPr/>
+          <p:nvPr/>
+        </p:nvSpPr>
+        <p:spPr>
+          <a:xfrm>
+            <a:off x="457200" y="3749040"/>
+            <a:ext cx="3840480" cy="411480"/>
+          </a:xfrm>
+          <a:prstGeom prst="rect">
+            <a:avLst/>
+          </a:prstGeom>
+          <a:noFill/>
+          <a:ln/>
+        </p:spPr>
+        <p:txBody>
+          <a:bodyPr wrap="square" lIns="0" tIns="0" rIns="0" bIns="0" rtlCol="0" anchor="ctr"/>
+          <a:lstStyle/>
+          <a:p>
+            <a:pPr indent="0" marL="0">
+              <a:buNone/>
+            </a:pPr>
+            <a:r>
+              <a:rPr lang="en-US" sz="1100" dirty="0">
+                <a:solidFill>
+                  <a:srgbClr val="333333"/>
+                </a:solidFill>
+                <a:latin typeface="Calibri" pitchFamily="34" charset="0"/>
+                <a:ea typeface="Calibri" pitchFamily="34" charset="-122"/>
+                <a:cs typeface="Calibri" pitchFamily="34" charset="-120"/>
+              </a:rPr>
+              <a:t>→ Règle : on STOCKE ces données</a:t>
+            </a:r>
+            <a:endParaRPr lang="en-US" sz="1100" dirty="0"/>
+          </a:p>
+        </p:txBody>
+      </p:sp>
+      <p:sp>
+        <p:nvSpPr>
+          <p:cNvPr id="13" name="Shape 11"/>
+          <p:cNvSpPr/>
+          <p:nvPr/>
+        </p:nvSpPr>
+        <p:spPr>
+          <a:xfrm>
+            <a:off x="4663440" y="914400"/>
+            <a:ext cx="4206240" cy="3840480"/>
+          </a:xfrm>
+          <a:prstGeom prst="rect">
+            <a:avLst/>
+          </a:prstGeom>
+          <a:solidFill>
+            <a:srgbClr val="FFFFFF"/>
           </a:solidFill>
           <a:ln/>
           <a:effectLst>
@@ -2328,34 +2873,34 @@
       </p:sp>
       <p:sp>
         <p:nvSpPr>
-          <p:cNvPr id="8" name="Shape 6"/>
-          <p:cNvSpPr/>
-          <p:nvPr/>
-        </p:nvSpPr>
-        <p:spPr>
-          <a:xfrm>
-            <a:off x="457200" y="1783080"/>
-            <a:ext cx="54864" cy="640080"/>
-          </a:xfrm>
-          <a:prstGeom prst="rect">
-            <a:avLst/>
-          </a:prstGeom>
-          <a:solidFill>
-            <a:srgbClr val="2E7D32"/>
-          </a:solidFill>
-          <a:ln/>
-        </p:spPr>
-      </p:sp>
-      <p:sp>
-        <p:nvSpPr>
-          <p:cNvPr id="9" name="Text 7"/>
-          <p:cNvSpPr/>
-          <p:nvPr/>
-        </p:nvSpPr>
-        <p:spPr>
-          <a:xfrm>
-            <a:off x="731520" y="1783080"/>
-            <a:ext cx="7772400" cy="640080"/>
+          <p:cNvPr id="14" name="Shape 12"/>
+          <p:cNvSpPr/>
+          <p:nvPr/>
+        </p:nvSpPr>
+        <p:spPr>
+          <a:xfrm>
+            <a:off x="4663440" y="914400"/>
+            <a:ext cx="4206240" cy="457200"/>
+          </a:xfrm>
+          <a:prstGeom prst="rect">
+            <a:avLst/>
+          </a:prstGeom>
+          <a:solidFill>
+            <a:srgbClr val="FF6F00"/>
+          </a:solidFill>
+          <a:ln/>
+        </p:spPr>
+      </p:sp>
+      <p:sp>
+        <p:nvSpPr>
+          <p:cNvPr id="15" name="Text 13"/>
+          <p:cNvSpPr/>
+          <p:nvPr/>
+        </p:nvSpPr>
+        <p:spPr>
+          <a:xfrm>
+            <a:off x="4846320" y="914400"/>
+            <a:ext cx="3840480" cy="457200"/>
           </a:xfrm>
           <a:prstGeom prst="rect">
             <a:avLst/>
@@ -2371,77 +2916,69 @@
               <a:buNone/>
             </a:pPr>
             <a:r>
-              <a:rPr lang="en-US" sz="1300" dirty="0">
+              <a:rPr lang="en-US" sz="1400" b="1" dirty="0">
                 <a:solidFill>
-                  <a:srgbClr val="1A1A2E"/>
+                  <a:srgbClr val="FFFFFF"/>
+                </a:solidFill>
+                <a:latin typeface="Trebuchet MS" pitchFamily="34" charset="0"/>
+                <a:ea typeface="Trebuchet MS" pitchFamily="34" charset="-122"/>
+                <a:cs typeface="Trebuchet MS" pitchFamily="34" charset="-120"/>
+              </a:rPr>
+              <a:t>🔧 CALCULÉE (dérivée)</a:t>
+            </a:r>
+            <a:endParaRPr lang="en-US" sz="1400" dirty="0"/>
+          </a:p>
+        </p:txBody>
+      </p:sp>
+      <p:sp>
+        <p:nvSpPr>
+          <p:cNvPr id="16" name="Text 14"/>
+          <p:cNvSpPr/>
+          <p:nvPr/>
+        </p:nvSpPr>
+        <p:spPr>
+          <a:xfrm>
+            <a:off x="4846320" y="1463040"/>
+            <a:ext cx="3840480" cy="411480"/>
+          </a:xfrm>
+          <a:prstGeom prst="rect">
+            <a:avLst/>
+          </a:prstGeom>
+          <a:noFill/>
+          <a:ln/>
+        </p:spPr>
+        <p:txBody>
+          <a:bodyPr wrap="square" lIns="0" tIns="0" rIns="0" bIns="0" rtlCol="0" anchor="ctr"/>
+          <a:lstStyle/>
+          <a:p>
+            <a:pPr indent="0" marL="0">
+              <a:buNone/>
+            </a:pPr>
+            <a:r>
+              <a:rPr lang="en-US" sz="1100" dirty="0">
+                <a:solidFill>
+                  <a:srgbClr val="333333"/>
                 </a:solidFill>
                 <a:latin typeface="Calibri" pitchFamily="34" charset="0"/>
                 <a:ea typeface="Calibri" pitchFamily="34" charset="-122"/>
                 <a:cs typeface="Calibri" pitchFamily="34" charset="-120"/>
               </a:rPr>
-              <a:t>Calculée : dérivée d'autres données (âge = aujourd'hui - date_naissance)</a:t>
+              <a:t>→ Obtenue par calcul à partir d'autres</a:t>
             </a:r>
-            <a:endParaRPr lang="en-US" sz="1300" dirty="0"/>
-          </a:p>
-        </p:txBody>
-      </p:sp>
-      <p:sp>
-        <p:nvSpPr>
-          <p:cNvPr id="10" name="Shape 8"/>
-          <p:cNvSpPr/>
-          <p:nvPr/>
-        </p:nvSpPr>
-        <p:spPr>
-          <a:xfrm>
-            <a:off x="457200" y="2514600"/>
-            <a:ext cx="8229600" cy="640080"/>
-          </a:xfrm>
-          <a:prstGeom prst="rect">
-            <a:avLst/>
-          </a:prstGeom>
-          <a:solidFill>
-            <a:srgbClr val="FFFFFF"/>
-          </a:solidFill>
-          <a:ln/>
-          <a:effectLst>
-            <a:outerShdw sx="100000" sy="100000" kx="0" ky="0" algn="bl" rotWithShape="0" blurRad="50800" dist="25400" dir="8100000">
-              <a:srgbClr val="000000">
-                <a:alpha val="12000"/>
-              </a:srgbClr>
-            </a:outerShdw>
-          </a:effectLst>
-        </p:spPr>
-      </p:sp>
-      <p:sp>
-        <p:nvSpPr>
-          <p:cNvPr id="11" name="Shape 9"/>
-          <p:cNvSpPr/>
-          <p:nvPr/>
-        </p:nvSpPr>
-        <p:spPr>
-          <a:xfrm>
-            <a:off x="457200" y="2514600"/>
-            <a:ext cx="54864" cy="640080"/>
-          </a:xfrm>
-          <a:prstGeom prst="rect">
-            <a:avLst/>
-          </a:prstGeom>
-          <a:solidFill>
-            <a:srgbClr val="2E7D32"/>
-          </a:solidFill>
-          <a:ln/>
-        </p:spPr>
-      </p:sp>
-      <p:sp>
-        <p:nvSpPr>
-          <p:cNvPr id="12" name="Text 10"/>
-          <p:cNvSpPr/>
-          <p:nvPr/>
-        </p:nvSpPr>
-        <p:spPr>
-          <a:xfrm>
-            <a:off x="731520" y="2514600"/>
-            <a:ext cx="7772400" cy="640080"/>
+            <a:endParaRPr lang="en-US" sz="1100" dirty="0"/>
+          </a:p>
+        </p:txBody>
+      </p:sp>
+      <p:sp>
+        <p:nvSpPr>
+          <p:cNvPr id="17" name="Text 15"/>
+          <p:cNvSpPr/>
+          <p:nvPr/>
+        </p:nvSpPr>
+        <p:spPr>
+          <a:xfrm>
+            <a:off x="4846320" y="1920240"/>
+            <a:ext cx="3840480" cy="411480"/>
           </a:xfrm>
           <a:prstGeom prst="rect">
             <a:avLst/>
@@ -2457,77 +2994,30 @@
               <a:buNone/>
             </a:pPr>
             <a:r>
-              <a:rPr lang="en-US" sz="1300" dirty="0">
+              <a:rPr lang="en-US" sz="1100" dirty="0">
                 <a:solidFill>
-                  <a:srgbClr val="1A1A2E"/>
+                  <a:srgbClr val="333333"/>
                 </a:solidFill>
                 <a:latin typeface="Calibri" pitchFamily="34" charset="0"/>
                 <a:ea typeface="Calibri" pitchFamily="34" charset="-122"/>
                 <a:cs typeface="Calibri" pitchFamily="34" charset="-120"/>
               </a:rPr>
-              <a:t>Règle : ne PAS stocker les données calculées !</a:t>
+              <a:t>→ age = AUJOURD'HUI - date_naissance</a:t>
             </a:r>
-            <a:endParaRPr lang="en-US" sz="1300" dirty="0"/>
-          </a:p>
-        </p:txBody>
-      </p:sp>
-      <p:sp>
-        <p:nvSpPr>
-          <p:cNvPr id="13" name="Shape 11"/>
-          <p:cNvSpPr/>
-          <p:nvPr/>
-        </p:nvSpPr>
-        <p:spPr>
-          <a:xfrm>
-            <a:off x="457200" y="3246120"/>
-            <a:ext cx="8229600" cy="640080"/>
-          </a:xfrm>
-          <a:prstGeom prst="rect">
-            <a:avLst/>
-          </a:prstGeom>
-          <a:solidFill>
-            <a:srgbClr val="E8F5E9"/>
-          </a:solidFill>
-          <a:ln/>
-          <a:effectLst>
-            <a:outerShdw sx="100000" sy="100000" kx="0" ky="0" algn="bl" rotWithShape="0" blurRad="50800" dist="25400" dir="8100000">
-              <a:srgbClr val="000000">
-                <a:alpha val="12000"/>
-              </a:srgbClr>
-            </a:outerShdw>
-          </a:effectLst>
-        </p:spPr>
-      </p:sp>
-      <p:sp>
-        <p:nvSpPr>
-          <p:cNvPr id="14" name="Shape 12"/>
-          <p:cNvSpPr/>
-          <p:nvPr/>
-        </p:nvSpPr>
-        <p:spPr>
-          <a:xfrm>
-            <a:off x="457200" y="3246120"/>
-            <a:ext cx="54864" cy="640080"/>
-          </a:xfrm>
-          <a:prstGeom prst="rect">
-            <a:avLst/>
-          </a:prstGeom>
-          <a:solidFill>
-            <a:srgbClr val="2E7D32"/>
-          </a:solidFill>
-          <a:ln/>
-        </p:spPr>
-      </p:sp>
-      <p:sp>
-        <p:nvSpPr>
-          <p:cNvPr id="15" name="Text 13"/>
-          <p:cNvSpPr/>
-          <p:nvPr/>
-        </p:nvSpPr>
-        <p:spPr>
-          <a:xfrm>
-            <a:off x="731520" y="3246120"/>
-            <a:ext cx="7772400" cy="640080"/>
+            <a:endParaRPr lang="en-US" sz="1100" dirty="0"/>
+          </a:p>
+        </p:txBody>
+      </p:sp>
+      <p:sp>
+        <p:nvSpPr>
+          <p:cNvPr id="18" name="Text 16"/>
+          <p:cNvSpPr/>
+          <p:nvPr/>
+        </p:nvSpPr>
+        <p:spPr>
+          <a:xfrm>
+            <a:off x="4846320" y="2377440"/>
+            <a:ext cx="3840480" cy="411480"/>
           </a:xfrm>
           <a:prstGeom prst="rect">
             <a:avLst/>
@@ -2543,77 +3033,30 @@
               <a:buNone/>
             </a:pPr>
             <a:r>
-              <a:rPr lang="en-US" sz="1300" dirty="0">
+              <a:rPr lang="en-US" sz="1100" dirty="0">
                 <a:solidFill>
-                  <a:srgbClr val="1A1A2E"/>
+                  <a:srgbClr val="333333"/>
                 </a:solidFill>
                 <a:latin typeface="Calibri" pitchFamily="34" charset="0"/>
                 <a:ea typeface="Calibri" pitchFamily="34" charset="-122"/>
                 <a:cs typeface="Calibri" pitchFamily="34" charset="-120"/>
               </a:rPr>
-              <a:t>Elles sont recalculées à la demande (requête SQL)</a:t>
+              <a:t>→ duree_session = heure_fin - heure_debut</a:t>
             </a:r>
-            <a:endParaRPr lang="en-US" sz="1300" dirty="0"/>
-          </a:p>
-        </p:txBody>
-      </p:sp>
-      <p:sp>
-        <p:nvSpPr>
-          <p:cNvPr id="16" name="Shape 14"/>
-          <p:cNvSpPr/>
-          <p:nvPr/>
-        </p:nvSpPr>
-        <p:spPr>
-          <a:xfrm>
-            <a:off x="457200" y="3977640"/>
-            <a:ext cx="8229600" cy="640080"/>
-          </a:xfrm>
-          <a:prstGeom prst="rect">
-            <a:avLst/>
-          </a:prstGeom>
-          <a:solidFill>
-            <a:srgbClr val="FFFFFF"/>
-          </a:solidFill>
-          <a:ln/>
-          <a:effectLst>
-            <a:outerShdw sx="100000" sy="100000" kx="0" ky="0" algn="bl" rotWithShape="0" blurRad="50800" dist="25400" dir="8100000">
-              <a:srgbClr val="000000">
-                <a:alpha val="12000"/>
-              </a:srgbClr>
-            </a:outerShdw>
-          </a:effectLst>
-        </p:spPr>
-      </p:sp>
-      <p:sp>
-        <p:nvSpPr>
-          <p:cNvPr id="17" name="Shape 15"/>
-          <p:cNvSpPr/>
-          <p:nvPr/>
-        </p:nvSpPr>
-        <p:spPr>
-          <a:xfrm>
-            <a:off x="457200" y="3977640"/>
-            <a:ext cx="54864" cy="640080"/>
-          </a:xfrm>
-          <a:prstGeom prst="rect">
-            <a:avLst/>
-          </a:prstGeom>
-          <a:solidFill>
-            <a:srgbClr val="2E7D32"/>
-          </a:solidFill>
-          <a:ln/>
-        </p:spPr>
-      </p:sp>
-      <p:sp>
-        <p:nvSpPr>
-          <p:cNvPr id="18" name="Text 16"/>
-          <p:cNvSpPr/>
-          <p:nvPr/>
-        </p:nvSpPr>
-        <p:spPr>
-          <a:xfrm>
-            <a:off x="731520" y="3977640"/>
-            <a:ext cx="7772400" cy="640080"/>
+            <a:endParaRPr lang="en-US" sz="1100" dirty="0"/>
+          </a:p>
+        </p:txBody>
+      </p:sp>
+      <p:sp>
+        <p:nvSpPr>
+          <p:cNvPr id="19" name="Text 17"/>
+          <p:cNvSpPr/>
+          <p:nvPr/>
+        </p:nvSpPr>
+        <p:spPr>
+          <a:xfrm>
+            <a:off x="4846320" y="2834640"/>
+            <a:ext cx="3840480" cy="411480"/>
           </a:xfrm>
           <a:prstGeom prst="rect">
             <a:avLst/>
@@ -2629,30 +3072,30 @@
               <a:buNone/>
             </a:pPr>
             <a:r>
-              <a:rPr lang="en-US" sz="1300" dirty="0">
+              <a:rPr lang="en-US" sz="1100" dirty="0">
                 <a:solidFill>
-                  <a:srgbClr val="1A1A2E"/>
+                  <a:srgbClr val="333333"/>
                 </a:solidFill>
                 <a:latin typeface="Calibri" pitchFamily="34" charset="0"/>
                 <a:ea typeface="Calibri" pitchFamily="34" charset="-122"/>
                 <a:cs typeface="Calibri" pitchFamily="34" charset="-120"/>
               </a:rPr>
-              <a:t>Exception : dénormalisation volontaire (performance)</a:t>
+              <a:t>→ montant_facture = tarif × heures</a:t>
             </a:r>
-            <a:endParaRPr lang="en-US" sz="1300" dirty="0"/>
-          </a:p>
-        </p:txBody>
-      </p:sp>
-      <p:sp>
-        <p:nvSpPr>
-          <p:cNvPr id="19" name="Text 17"/>
-          <p:cNvSpPr/>
-          <p:nvPr/>
-        </p:nvSpPr>
-        <p:spPr>
-          <a:xfrm>
-            <a:off x="8229600" y="4754880"/>
-            <a:ext cx="731520" cy="274320"/>
+            <a:endParaRPr lang="en-US" sz="1100" dirty="0"/>
+          </a:p>
+        </p:txBody>
+      </p:sp>
+      <p:sp>
+        <p:nvSpPr>
+          <p:cNvPr id="20" name="Text 18"/>
+          <p:cNvSpPr/>
+          <p:nvPr/>
+        </p:nvSpPr>
+        <p:spPr>
+          <a:xfrm>
+            <a:off x="4846320" y="3291840"/>
+            <a:ext cx="3840480" cy="411480"/>
           </a:xfrm>
           <a:prstGeom prst="rect">
             <a:avLst/>
@@ -2664,21 +3107,60 @@
           <a:bodyPr wrap="square" lIns="0" tIns="0" rIns="0" bIns="0" rtlCol="0" anchor="ctr"/>
           <a:lstStyle/>
           <a:p>
-            <a:pPr algn="r" indent="0" marL="0">
+            <a:pPr indent="0" marL="0">
               <a:buNone/>
             </a:pPr>
             <a:r>
-              <a:rPr lang="en-US" sz="900" dirty="0">
+              <a:rPr lang="en-US" sz="1100" dirty="0">
                 <a:solidFill>
-                  <a:srgbClr val="AAAAAA"/>
+                  <a:srgbClr val="333333"/>
                 </a:solidFill>
                 <a:latin typeface="Calibri" pitchFamily="34" charset="0"/>
                 <a:ea typeface="Calibri" pitchFamily="34" charset="-122"/>
                 <a:cs typeface="Calibri" pitchFamily="34" charset="-120"/>
               </a:rPr>
-              <a:t>3/6</a:t>
+              <a:t>→ nb_albums = COUNT(albums de l'artiste)</a:t>
             </a:r>
-            <a:endParaRPr lang="en-US" sz="900" dirty="0"/>
+            <a:endParaRPr lang="en-US" sz="1100" dirty="0"/>
+          </a:p>
+        </p:txBody>
+      </p:sp>
+      <p:sp>
+        <p:nvSpPr>
+          <p:cNvPr id="21" name="Text 19"/>
+          <p:cNvSpPr/>
+          <p:nvPr/>
+        </p:nvSpPr>
+        <p:spPr>
+          <a:xfrm>
+            <a:off x="4846320" y="3749040"/>
+            <a:ext cx="3840480" cy="411480"/>
+          </a:xfrm>
+          <a:prstGeom prst="rect">
+            <a:avLst/>
+          </a:prstGeom>
+          <a:noFill/>
+          <a:ln/>
+        </p:spPr>
+        <p:txBody>
+          <a:bodyPr wrap="square" lIns="0" tIns="0" rIns="0" bIns="0" rtlCol="0" anchor="ctr"/>
+          <a:lstStyle/>
+          <a:p>
+            <a:pPr indent="0" marL="0">
+              <a:buNone/>
+            </a:pPr>
+            <a:r>
+              <a:rPr lang="en-US" sz="1100" dirty="0">
+                <a:solidFill>
+                  <a:srgbClr val="333333"/>
+                </a:solidFill>
+                <a:latin typeface="Calibri" pitchFamily="34" charset="0"/>
+                <a:ea typeface="Calibri" pitchFamily="34" charset="-122"/>
+                <a:cs typeface="Calibri" pitchFamily="34" charset="-120"/>
+              </a:rPr>
+              <a:t>→ Règle : on NE STOCKE PAS (sauf exception)</a:t>
+            </a:r>
+            <a:endParaRPr lang="en-US" sz="1100" dirty="0"/>
           </a:p>
         </p:txBody>
       </p:sp>
@@ -2723,7 +3205,7 @@
         <p:spPr>
           <a:xfrm>
             <a:off x="0" y="0"/>
-            <a:ext cx="9144000" cy="73152"/>
+            <a:ext cx="9144000" cy="54864"/>
           </a:xfrm>
           <a:prstGeom prst="rect">
             <a:avLst/>
@@ -2742,8 +3224,8 @@
         </p:nvSpPr>
         <p:spPr>
           <a:xfrm>
-            <a:off x="457200" y="228600"/>
-            <a:ext cx="8229600" cy="640080"/>
+            <a:off x="457200" y="182880"/>
+            <a:ext cx="8229600" cy="594360"/>
           </a:xfrm>
           <a:prstGeom prst="rect">
             <a:avLst/>
@@ -2759,7 +3241,7 @@
               <a:buNone/>
             </a:pPr>
             <a:r>
-              <a:rPr lang="en-US" sz="2600" b="1" dirty="0">
+              <a:rPr lang="en-US" sz="2400" b="1" dirty="0">
                 <a:solidFill>
                   <a:srgbClr val="1B5E20"/>
                 </a:solidFill>
@@ -2769,7 +3251,7 @@
               </a:rPr>
               <a:t>Éliminer synonymes et polysèmes</a:t>
             </a:r>
-            <a:endParaRPr lang="en-US" sz="2600" dirty="0"/>
+            <a:endParaRPr lang="en-US" sz="2400" dirty="0"/>
           </a:p>
         </p:txBody>
       </p:sp>
@@ -2781,8 +3263,8 @@
         </p:nvSpPr>
         <p:spPr>
           <a:xfrm>
-            <a:off x="457200" y="1051560"/>
-            <a:ext cx="8229600" cy="640080"/>
+            <a:off x="457200" y="914400"/>
+            <a:ext cx="8229600" cy="560397"/>
           </a:xfrm>
           <a:prstGeom prst="rect">
             <a:avLst/>
@@ -2808,8 +3290,8 @@
         </p:nvSpPr>
         <p:spPr>
           <a:xfrm>
-            <a:off x="457200" y="1051560"/>
-            <a:ext cx="54864" cy="640080"/>
+            <a:off x="457200" y="914400"/>
+            <a:ext cx="45720" cy="560397"/>
           </a:xfrm>
           <a:prstGeom prst="rect">
             <a:avLst/>
@@ -2828,8 +3310,8 @@
         </p:nvSpPr>
         <p:spPr>
           <a:xfrm>
-            <a:off x="731520" y="1051560"/>
-            <a:ext cx="7772400" cy="640080"/>
+            <a:off x="685800" y="914400"/>
+            <a:ext cx="7818120" cy="560397"/>
           </a:xfrm>
           <a:prstGeom prst="rect">
             <a:avLst/>
@@ -2845,7 +3327,7 @@
               <a:buNone/>
             </a:pPr>
             <a:r>
-              <a:rPr lang="en-US" sz="1300" dirty="0">
+              <a:rPr lang="en-US" sz="1200" dirty="0">
                 <a:solidFill>
                   <a:srgbClr val="1A1A2E"/>
                 </a:solidFill>
@@ -2853,9 +3335,9 @@
                 <a:ea typeface="Calibri" pitchFamily="34" charset="-122"/>
                 <a:cs typeface="Calibri" pitchFamily="34" charset="-120"/>
               </a:rPr>
-              <a:t>Synonyme : 2 noms pour la même donnée (téléphone = numéro = portable)</a:t>
+              <a:t>SYNONYME = 2 noms pour la même donnée</a:t>
             </a:r>
-            <a:endParaRPr lang="en-US" sz="1300" dirty="0"/>
+            <a:endParaRPr lang="en-US" sz="1200" dirty="0"/>
           </a:p>
         </p:txBody>
       </p:sp>
@@ -2867,8 +3349,8 @@
         </p:nvSpPr>
         <p:spPr>
           <a:xfrm>
-            <a:off x="457200" y="1783080"/>
-            <a:ext cx="8229600" cy="640080"/>
+            <a:off x="457200" y="1502229"/>
+            <a:ext cx="8229600" cy="560397"/>
           </a:xfrm>
           <a:prstGeom prst="rect">
             <a:avLst/>
@@ -2894,8 +3376,8 @@
         </p:nvSpPr>
         <p:spPr>
           <a:xfrm>
-            <a:off x="457200" y="1783080"/>
-            <a:ext cx="54864" cy="640080"/>
+            <a:off x="457200" y="1502229"/>
+            <a:ext cx="45720" cy="560397"/>
           </a:xfrm>
           <a:prstGeom prst="rect">
             <a:avLst/>
@@ -2914,8 +3396,8 @@
         </p:nvSpPr>
         <p:spPr>
           <a:xfrm>
-            <a:off x="731520" y="1783080"/>
-            <a:ext cx="7772400" cy="640080"/>
+            <a:off x="685800" y="1502229"/>
+            <a:ext cx="7818120" cy="560397"/>
           </a:xfrm>
           <a:prstGeom prst="rect">
             <a:avLst/>
@@ -2931,17 +3413,17 @@
               <a:buNone/>
             </a:pPr>
             <a:r>
-              <a:rPr lang="en-US" sz="1100" dirty="0">
+              <a:rPr lang="en-US" sz="1200" dirty="0">
                 <a:solidFill>
-                  <a:srgbClr val="1B5E20"/>
+                  <a:srgbClr val="1A1A2E"/>
                 </a:solidFill>
-                <a:latin typeface="JetBrains Mono" pitchFamily="34" charset="0"/>
-                <a:ea typeface="JetBrains Mono" pitchFamily="34" charset="-122"/>
-                <a:cs typeface="JetBrains Mono" pitchFamily="34" charset="-120"/>
+                <a:latin typeface="Calibri" pitchFamily="34" charset="0"/>
+                <a:ea typeface="Calibri" pitchFamily="34" charset="-122"/>
+                <a:cs typeface="Calibri" pitchFamily="34" charset="-120"/>
               </a:rPr>
-              <a:t>→ Choisir UN seul nom standardisé</a:t>
+              <a:t>❌ téléphone, numéro, portable, GSM → ✅ telephone</a:t>
             </a:r>
-            <a:endParaRPr lang="en-US" sz="1100" dirty="0"/>
+            <a:endParaRPr lang="en-US" sz="1200" dirty="0"/>
           </a:p>
         </p:txBody>
       </p:sp>
@@ -2953,8 +3435,8 @@
         </p:nvSpPr>
         <p:spPr>
           <a:xfrm>
-            <a:off x="457200" y="2514600"/>
-            <a:ext cx="8229600" cy="640080"/>
+            <a:off x="457200" y="2090057"/>
+            <a:ext cx="8229600" cy="560397"/>
           </a:xfrm>
           <a:prstGeom prst="rect">
             <a:avLst/>
@@ -2980,8 +3462,8 @@
         </p:nvSpPr>
         <p:spPr>
           <a:xfrm>
-            <a:off x="457200" y="2514600"/>
-            <a:ext cx="54864" cy="640080"/>
+            <a:off x="457200" y="2090057"/>
+            <a:ext cx="45720" cy="560397"/>
           </a:xfrm>
           <a:prstGeom prst="rect">
             <a:avLst/>
@@ -3000,8 +3482,8 @@
         </p:nvSpPr>
         <p:spPr>
           <a:xfrm>
-            <a:off x="731520" y="2514600"/>
-            <a:ext cx="7772400" cy="640080"/>
+            <a:off x="685800" y="2090057"/>
+            <a:ext cx="7818120" cy="560397"/>
           </a:xfrm>
           <a:prstGeom prst="rect">
             <a:avLst/>
@@ -3017,7 +3499,7 @@
               <a:buNone/>
             </a:pPr>
             <a:r>
-              <a:rPr lang="en-US" sz="1300" dirty="0">
+              <a:rPr lang="en-US" sz="1200" dirty="0">
                 <a:solidFill>
                   <a:srgbClr val="1A1A2E"/>
                 </a:solidFill>
@@ -3025,9 +3507,9 @@
                 <a:ea typeface="Calibri" pitchFamily="34" charset="-122"/>
                 <a:cs typeface="Calibri" pitchFamily="34" charset="-120"/>
               </a:rPr>
-              <a:t>Polysème : 1 nom pour 2 données différentes (date = date inscription ? date session ?)</a:t>
+              <a:t>❌ studio, salle, room → ✅ salle</a:t>
             </a:r>
-            <a:endParaRPr lang="en-US" sz="1300" dirty="0"/>
+            <a:endParaRPr lang="en-US" sz="1200" dirty="0"/>
           </a:p>
         </p:txBody>
       </p:sp>
@@ -3039,8 +3521,8 @@
         </p:nvSpPr>
         <p:spPr>
           <a:xfrm>
-            <a:off x="457200" y="3246120"/>
-            <a:ext cx="8229600" cy="640080"/>
+            <a:off x="457200" y="2677886"/>
+            <a:ext cx="8229600" cy="560397"/>
           </a:xfrm>
           <a:prstGeom prst="rect">
             <a:avLst/>
@@ -3066,8 +3548,8 @@
         </p:nvSpPr>
         <p:spPr>
           <a:xfrm>
-            <a:off x="457200" y="3246120"/>
-            <a:ext cx="54864" cy="640080"/>
+            <a:off x="457200" y="2677886"/>
+            <a:ext cx="45720" cy="560397"/>
           </a:xfrm>
           <a:prstGeom prst="rect">
             <a:avLst/>
@@ -3086,8 +3568,8 @@
         </p:nvSpPr>
         <p:spPr>
           <a:xfrm>
-            <a:off x="731520" y="3246120"/>
-            <a:ext cx="7772400" cy="640080"/>
+            <a:off x="685800" y="2677886"/>
+            <a:ext cx="7818120" cy="560397"/>
           </a:xfrm>
           <a:prstGeom prst="rect">
             <a:avLst/>
@@ -3103,17 +3585,17 @@
               <a:buNone/>
             </a:pPr>
             <a:r>
-              <a:rPr lang="en-US" sz="1100" dirty="0">
+              <a:rPr lang="en-US" sz="1200" dirty="0">
                 <a:solidFill>
-                  <a:srgbClr val="1B5E20"/>
+                  <a:srgbClr val="1A1A2E"/>
                 </a:solidFill>
-                <a:latin typeface="JetBrains Mono" pitchFamily="34" charset="0"/>
-                <a:ea typeface="JetBrains Mono" pitchFamily="34" charset="-122"/>
-                <a:cs typeface="JetBrains Mono" pitchFamily="34" charset="-120"/>
+                <a:latin typeface="Calibri" pitchFamily="34" charset="0"/>
+                <a:ea typeface="Calibri" pitchFamily="34" charset="-122"/>
+                <a:cs typeface="Calibri" pitchFamily="34" charset="-120"/>
               </a:rPr>
-              <a:t>→ Renommer pour lever l'ambiguïté</a:t>
+              <a:t>POLYSÈME = 1 nom pour 2 données différentes</a:t>
             </a:r>
-            <a:endParaRPr lang="en-US" sz="1100" dirty="0"/>
+            <a:endParaRPr lang="en-US" sz="1200" dirty="0"/>
           </a:p>
         </p:txBody>
       </p:sp>
@@ -3125,8 +3607,8 @@
         </p:nvSpPr>
         <p:spPr>
           <a:xfrm>
-            <a:off x="457200" y="3977640"/>
-            <a:ext cx="8229600" cy="640080"/>
+            <a:off x="457200" y="3265714"/>
+            <a:ext cx="8229600" cy="560397"/>
           </a:xfrm>
           <a:prstGeom prst="rect">
             <a:avLst/>
@@ -3152,8 +3634,8 @@
         </p:nvSpPr>
         <p:spPr>
           <a:xfrm>
-            <a:off x="457200" y="3977640"/>
-            <a:ext cx="54864" cy="640080"/>
+            <a:off x="457200" y="3265714"/>
+            <a:ext cx="45720" cy="560397"/>
           </a:xfrm>
           <a:prstGeom prst="rect">
             <a:avLst/>
@@ -3172,8 +3654,8 @@
         </p:nvSpPr>
         <p:spPr>
           <a:xfrm>
-            <a:off x="731520" y="3977640"/>
-            <a:ext cx="7772400" cy="640080"/>
+            <a:off x="685800" y="3265714"/>
+            <a:ext cx="7818120" cy="560397"/>
           </a:xfrm>
           <a:prstGeom prst="rect">
             <a:avLst/>
@@ -3189,7 +3671,7 @@
               <a:buNone/>
             </a:pPr>
             <a:r>
-              <a:rPr lang="en-US" sz="1300" dirty="0">
+              <a:rPr lang="en-US" sz="1200" dirty="0">
                 <a:solidFill>
                   <a:srgbClr val="1A1A2E"/>
                 </a:solidFill>
@@ -3197,22 +3679,69 @@
                 <a:ea typeface="Calibri" pitchFamily="34" charset="-122"/>
                 <a:cs typeface="Calibri" pitchFamily="34" charset="-120"/>
               </a:rPr>
-              <a:t>Convention : prefixer si nécessaire (date_inscription, date_session)</a:t>
+              <a:t>❌ 'date' → date_inscription ? date_session ? date_facture ?</a:t>
             </a:r>
-            <a:endParaRPr lang="en-US" sz="1300" dirty="0"/>
-          </a:p>
-        </p:txBody>
-      </p:sp>
-      <p:sp>
-        <p:nvSpPr>
-          <p:cNvPr id="19" name="Text 17"/>
-          <p:cNvSpPr/>
-          <p:nvPr/>
-        </p:nvSpPr>
-        <p:spPr>
-          <a:xfrm>
-            <a:off x="8229600" y="4754880"/>
-            <a:ext cx="731520" cy="274320"/>
+            <a:endParaRPr lang="en-US" sz="1200" dirty="0"/>
+          </a:p>
+        </p:txBody>
+      </p:sp>
+      <p:sp>
+        <p:nvSpPr>
+          <p:cNvPr id="19" name="Shape 17"/>
+          <p:cNvSpPr/>
+          <p:nvPr/>
+        </p:nvSpPr>
+        <p:spPr>
+          <a:xfrm>
+            <a:off x="457200" y="3853543"/>
+            <a:ext cx="8229600" cy="560397"/>
+          </a:xfrm>
+          <a:prstGeom prst="rect">
+            <a:avLst/>
+          </a:prstGeom>
+          <a:solidFill>
+            <a:srgbClr val="E8F5E9"/>
+          </a:solidFill>
+          <a:ln/>
+          <a:effectLst>
+            <a:outerShdw sx="100000" sy="100000" kx="0" ky="0" algn="bl" rotWithShape="0" blurRad="50800" dist="25400" dir="8100000">
+              <a:srgbClr val="000000">
+                <a:alpha val="12000"/>
+              </a:srgbClr>
+            </a:outerShdw>
+          </a:effectLst>
+        </p:spPr>
+      </p:sp>
+      <p:sp>
+        <p:nvSpPr>
+          <p:cNvPr id="20" name="Shape 18"/>
+          <p:cNvSpPr/>
+          <p:nvPr/>
+        </p:nvSpPr>
+        <p:spPr>
+          <a:xfrm>
+            <a:off x="457200" y="3853543"/>
+            <a:ext cx="45720" cy="560397"/>
+          </a:xfrm>
+          <a:prstGeom prst="rect">
+            <a:avLst/>
+          </a:prstGeom>
+          <a:solidFill>
+            <a:srgbClr val="2E7D32"/>
+          </a:solidFill>
+          <a:ln/>
+        </p:spPr>
+      </p:sp>
+      <p:sp>
+        <p:nvSpPr>
+          <p:cNvPr id="21" name="Text 19"/>
+          <p:cNvSpPr/>
+          <p:nvPr/>
+        </p:nvSpPr>
+        <p:spPr>
+          <a:xfrm>
+            <a:off x="685800" y="3853543"/>
+            <a:ext cx="7818120" cy="560397"/>
           </a:xfrm>
           <a:prstGeom prst="rect">
             <a:avLst/>
@@ -3224,21 +3753,107 @@
           <a:bodyPr wrap="square" lIns="0" tIns="0" rIns="0" bIns="0" rtlCol="0" anchor="ctr"/>
           <a:lstStyle/>
           <a:p>
-            <a:pPr algn="r" indent="0" marL="0">
+            <a:pPr indent="0" marL="0">
               <a:buNone/>
             </a:pPr>
             <a:r>
-              <a:rPr lang="en-US" sz="900" dirty="0">
+              <a:rPr lang="en-US" sz="1200" dirty="0">
                 <a:solidFill>
-                  <a:srgbClr val="AAAAAA"/>
+                  <a:srgbClr val="1A1A2E"/>
                 </a:solidFill>
                 <a:latin typeface="Calibri" pitchFamily="34" charset="0"/>
                 <a:ea typeface="Calibri" pitchFamily="34" charset="-122"/>
                 <a:cs typeface="Calibri" pitchFamily="34" charset="-120"/>
               </a:rPr>
-              <a:t>4/6</a:t>
+              <a:t>→ Toujours PRÉFIXER pour lever l'ambiguïté</a:t>
             </a:r>
-            <a:endParaRPr lang="en-US" sz="900" dirty="0"/>
+            <a:endParaRPr lang="en-US" sz="1200" dirty="0"/>
+          </a:p>
+        </p:txBody>
+      </p:sp>
+      <p:sp>
+        <p:nvSpPr>
+          <p:cNvPr id="22" name="Shape 20"/>
+          <p:cNvSpPr/>
+          <p:nvPr/>
+        </p:nvSpPr>
+        <p:spPr>
+          <a:xfrm>
+            <a:off x="457200" y="4441371"/>
+            <a:ext cx="8229600" cy="560397"/>
+          </a:xfrm>
+          <a:prstGeom prst="rect">
+            <a:avLst/>
+          </a:prstGeom>
+          <a:solidFill>
+            <a:srgbClr val="FFFFFF"/>
+          </a:solidFill>
+          <a:ln/>
+          <a:effectLst>
+            <a:outerShdw sx="100000" sy="100000" kx="0" ky="0" algn="bl" rotWithShape="0" blurRad="50800" dist="25400" dir="8100000">
+              <a:srgbClr val="000000">
+                <a:alpha val="12000"/>
+              </a:srgbClr>
+            </a:outerShdw>
+          </a:effectLst>
+        </p:spPr>
+      </p:sp>
+      <p:sp>
+        <p:nvSpPr>
+          <p:cNvPr id="23" name="Shape 21"/>
+          <p:cNvSpPr/>
+          <p:nvPr/>
+        </p:nvSpPr>
+        <p:spPr>
+          <a:xfrm>
+            <a:off x="457200" y="4441371"/>
+            <a:ext cx="45720" cy="560397"/>
+          </a:xfrm>
+          <a:prstGeom prst="rect">
+            <a:avLst/>
+          </a:prstGeom>
+          <a:solidFill>
+            <a:srgbClr val="2E7D32"/>
+          </a:solidFill>
+          <a:ln/>
+        </p:spPr>
+      </p:sp>
+      <p:sp>
+        <p:nvSpPr>
+          <p:cNvPr id="24" name="Text 22"/>
+          <p:cNvSpPr/>
+          <p:nvPr/>
+        </p:nvSpPr>
+        <p:spPr>
+          <a:xfrm>
+            <a:off x="685800" y="4441371"/>
+            <a:ext cx="7818120" cy="560397"/>
+          </a:xfrm>
+          <a:prstGeom prst="rect">
+            <a:avLst/>
+          </a:prstGeom>
+          <a:noFill/>
+          <a:ln/>
+        </p:spPr>
+        <p:txBody>
+          <a:bodyPr wrap="square" lIns="0" tIns="0" rIns="0" bIns="0" rtlCol="0" anchor="ctr"/>
+          <a:lstStyle/>
+          <a:p>
+            <a:pPr indent="0" marL="0">
+              <a:buNone/>
+            </a:pPr>
+            <a:r>
+              <a:rPr lang="en-US" sz="1200" dirty="0">
+                <a:solidFill>
+                  <a:srgbClr val="1A1A2E"/>
+                </a:solidFill>
+                <a:latin typeface="Calibri" pitchFamily="34" charset="0"/>
+                <a:ea typeface="Calibri" pitchFamily="34" charset="-122"/>
+                <a:cs typeface="Calibri" pitchFamily="34" charset="-120"/>
+              </a:rPr>
+              <a:t>Convention : minuscules, underscores, préfixe si nécessaire</a:t>
+            </a:r>
+            <a:endParaRPr lang="en-US" sz="1200" dirty="0"/>
           </a:p>
         </p:txBody>
       </p:sp>
@@ -3283,7 +3898,7 @@
         <p:spPr>
           <a:xfrm>
             <a:off x="0" y="0"/>
-            <a:ext cx="9144000" cy="73152"/>
+            <a:ext cx="9144000" cy="54864"/>
           </a:xfrm>
           <a:prstGeom prst="rect">
             <a:avLst/>
@@ -3302,8 +3917,8 @@
         </p:nvSpPr>
         <p:spPr>
           <a:xfrm>
-            <a:off x="457200" y="228600"/>
-            <a:ext cx="8229600" cy="640080"/>
+            <a:off x="457200" y="182880"/>
+            <a:ext cx="8229600" cy="548640"/>
           </a:xfrm>
           <a:prstGeom prst="rect">
             <a:avLst/>
@@ -3319,7 +3934,7 @@
               <a:buNone/>
             </a:pPr>
             <a:r>
-              <a:rPr lang="en-US" sz="2600" b="1" dirty="0">
+              <a:rPr lang="en-US" sz="2400" b="1" dirty="0">
                 <a:solidFill>
                   <a:srgbClr val="1B5E20"/>
                 </a:solidFill>
@@ -3327,481 +3942,2916 @@
                 <a:ea typeface="Trebuchet MS" pitchFamily="34" charset="-122"/>
                 <a:cs typeface="Trebuchet MS" pitchFamily="34" charset="-120"/>
               </a:rPr>
-              <a:t>Template du DD — SwissSound</a:t>
+              <a:t>DD de SwissSound — Extrait</a:t>
             </a:r>
-            <a:endParaRPr lang="en-US" sz="2600" dirty="0"/>
-          </a:p>
-        </p:txBody>
-      </p:sp>
-      <p:sp>
-        <p:nvSpPr>
-          <p:cNvPr id="4" name="Shape 2"/>
-          <p:cNvSpPr/>
-          <p:nvPr/>
-        </p:nvSpPr>
-        <p:spPr>
-          <a:xfrm>
-            <a:off x="457200" y="1051560"/>
-            <a:ext cx="8229600" cy="640080"/>
-          </a:xfrm>
-          <a:prstGeom prst="rect">
-            <a:avLst/>
-          </a:prstGeom>
-          <a:solidFill>
-            <a:srgbClr val="FFFFFF"/>
-          </a:solidFill>
-          <a:ln/>
-          <a:effectLst>
-            <a:outerShdw sx="100000" sy="100000" kx="0" ky="0" algn="bl" rotWithShape="0" blurRad="50800" dist="25400" dir="8100000">
-              <a:srgbClr val="000000">
-                <a:alpha val="12000"/>
-              </a:srgbClr>
-            </a:outerShdw>
-          </a:effectLst>
-        </p:spPr>
-      </p:sp>
-      <p:sp>
-        <p:nvSpPr>
-          <p:cNvPr id="5" name="Shape 3"/>
-          <p:cNvSpPr/>
-          <p:nvPr/>
-        </p:nvSpPr>
-        <p:spPr>
-          <a:xfrm>
-            <a:off x="457200" y="1051560"/>
-            <a:ext cx="54864" cy="640080"/>
-          </a:xfrm>
-          <a:prstGeom prst="rect">
-            <a:avLst/>
-          </a:prstGeom>
-          <a:solidFill>
-            <a:srgbClr val="2E7D32"/>
-          </a:solidFill>
-          <a:ln/>
-        </p:spPr>
-      </p:sp>
-      <p:sp>
-        <p:nvSpPr>
-          <p:cNvPr id="6" name="Text 4"/>
-          <p:cNvSpPr/>
-          <p:nvPr/>
-        </p:nvSpPr>
-        <p:spPr>
-          <a:xfrm>
-            <a:off x="731520" y="1051560"/>
-            <a:ext cx="7772400" cy="640080"/>
-          </a:xfrm>
-          <a:prstGeom prst="rect">
-            <a:avLst/>
-          </a:prstGeom>
-          <a:noFill/>
-          <a:ln/>
-        </p:spPr>
-        <p:txBody>
-          <a:bodyPr wrap="square" lIns="0" tIns="0" rIns="0" bIns="0" rtlCol="0" anchor="ctr"/>
-          <a:lstStyle/>
-          <a:p>
-            <a:pPr indent="0" marL="0">
-              <a:buNone/>
-            </a:pPr>
-            <a:r>
-              <a:rPr lang="en-US" sz="1300" dirty="0">
-                <a:solidFill>
-                  <a:srgbClr val="1A1A2E"/>
-                </a:solidFill>
-                <a:latin typeface="Calibri" pitchFamily="34" charset="0"/>
-                <a:ea typeface="Calibri" pitchFamily="34" charset="-122"/>
-                <a:cs typeface="Calibri" pitchFamily="34" charset="-120"/>
-              </a:rPr>
-              <a:t>| Nom | Description | Type | Format | Longueur | Règle |</a:t>
-            </a:r>
-            <a:endParaRPr lang="en-US" sz="1300" dirty="0"/>
-          </a:p>
-        </p:txBody>
-      </p:sp>
-      <p:sp>
-        <p:nvSpPr>
-          <p:cNvPr id="7" name="Shape 5"/>
-          <p:cNvSpPr/>
-          <p:nvPr/>
-        </p:nvSpPr>
-        <p:spPr>
-          <a:xfrm>
-            <a:off x="457200" y="1783080"/>
-            <a:ext cx="8229600" cy="640080"/>
-          </a:xfrm>
-          <a:prstGeom prst="rect">
-            <a:avLst/>
-          </a:prstGeom>
-          <a:solidFill>
-            <a:srgbClr val="E8F5E9"/>
-          </a:solidFill>
-          <a:ln/>
-          <a:effectLst>
-            <a:outerShdw sx="100000" sy="100000" kx="0" ky="0" algn="bl" rotWithShape="0" blurRad="50800" dist="25400" dir="8100000">
-              <a:srgbClr val="000000">
-                <a:alpha val="12000"/>
-              </a:srgbClr>
-            </a:outerShdw>
-          </a:effectLst>
-        </p:spPr>
-      </p:sp>
-      <p:sp>
-        <p:nvSpPr>
-          <p:cNvPr id="8" name="Shape 6"/>
-          <p:cNvSpPr/>
-          <p:nvPr/>
-        </p:nvSpPr>
-        <p:spPr>
-          <a:xfrm>
-            <a:off x="457200" y="1783080"/>
-            <a:ext cx="54864" cy="640080"/>
-          </a:xfrm>
-          <a:prstGeom prst="rect">
-            <a:avLst/>
-          </a:prstGeom>
-          <a:solidFill>
-            <a:srgbClr val="2E7D32"/>
-          </a:solidFill>
-          <a:ln/>
-        </p:spPr>
-      </p:sp>
-      <p:sp>
-        <p:nvSpPr>
-          <p:cNvPr id="9" name="Text 7"/>
-          <p:cNvSpPr/>
-          <p:nvPr/>
-        </p:nvSpPr>
-        <p:spPr>
-          <a:xfrm>
-            <a:off x="731520" y="1783080"/>
-            <a:ext cx="7772400" cy="640080"/>
-          </a:xfrm>
-          <a:prstGeom prst="rect">
-            <a:avLst/>
-          </a:prstGeom>
-          <a:noFill/>
-          <a:ln/>
-        </p:spPr>
-        <p:txBody>
-          <a:bodyPr wrap="square" lIns="0" tIns="0" rIns="0" bIns="0" rtlCol="0" anchor="ctr"/>
-          <a:lstStyle/>
-          <a:p>
-            <a:pPr indent="0" marL="0">
-              <a:buNone/>
-            </a:pPr>
-            <a:r>
-              <a:rPr lang="en-US" sz="1300" dirty="0">
-                <a:solidFill>
-                  <a:srgbClr val="1A1A2E"/>
-                </a:solidFill>
-                <a:latin typeface="Calibri" pitchFamily="34" charset="0"/>
-                <a:ea typeface="Calibri" pitchFamily="34" charset="-122"/>
-                <a:cs typeface="Calibri" pitchFamily="34" charset="-120"/>
-              </a:rPr>
-              <a:t>| id_artiste | Identifiant unique | Élémentaire | Entier | - | Auto-incrémenté |</a:t>
-            </a:r>
-            <a:endParaRPr lang="en-US" sz="1300" dirty="0"/>
-          </a:p>
-        </p:txBody>
-      </p:sp>
-      <p:sp>
-        <p:nvSpPr>
-          <p:cNvPr id="10" name="Shape 8"/>
-          <p:cNvSpPr/>
-          <p:nvPr/>
-        </p:nvSpPr>
-        <p:spPr>
-          <a:xfrm>
-            <a:off x="457200" y="2514600"/>
-            <a:ext cx="8229600" cy="640080"/>
-          </a:xfrm>
-          <a:prstGeom prst="rect">
-            <a:avLst/>
-          </a:prstGeom>
-          <a:solidFill>
-            <a:srgbClr val="FFFFFF"/>
-          </a:solidFill>
-          <a:ln/>
-          <a:effectLst>
-            <a:outerShdw sx="100000" sy="100000" kx="0" ky="0" algn="bl" rotWithShape="0" blurRad="50800" dist="25400" dir="8100000">
-              <a:srgbClr val="000000">
-                <a:alpha val="12000"/>
-              </a:srgbClr>
-            </a:outerShdw>
-          </a:effectLst>
-        </p:spPr>
-      </p:sp>
-      <p:sp>
-        <p:nvSpPr>
-          <p:cNvPr id="11" name="Shape 9"/>
-          <p:cNvSpPr/>
-          <p:nvPr/>
-        </p:nvSpPr>
-        <p:spPr>
-          <a:xfrm>
-            <a:off x="457200" y="2514600"/>
-            <a:ext cx="54864" cy="640080"/>
-          </a:xfrm>
-          <a:prstGeom prst="rect">
-            <a:avLst/>
-          </a:prstGeom>
-          <a:solidFill>
-            <a:srgbClr val="2E7D32"/>
-          </a:solidFill>
-          <a:ln/>
-        </p:spPr>
-      </p:sp>
-      <p:sp>
-        <p:nvSpPr>
-          <p:cNvPr id="12" name="Text 10"/>
-          <p:cNvSpPr/>
-          <p:nvPr/>
-        </p:nvSpPr>
-        <p:spPr>
-          <a:xfrm>
-            <a:off x="731520" y="2514600"/>
-            <a:ext cx="7772400" cy="640080"/>
-          </a:xfrm>
-          <a:prstGeom prst="rect">
-            <a:avLst/>
-          </a:prstGeom>
-          <a:noFill/>
-          <a:ln/>
-        </p:spPr>
-        <p:txBody>
-          <a:bodyPr wrap="square" lIns="0" tIns="0" rIns="0" bIns="0" rtlCol="0" anchor="ctr"/>
-          <a:lstStyle/>
-          <a:p>
-            <a:pPr indent="0" marL="0">
-              <a:buNone/>
-            </a:pPr>
-            <a:r>
-              <a:rPr lang="en-US" sz="1300" dirty="0">
-                <a:solidFill>
-                  <a:srgbClr val="1A1A2E"/>
-                </a:solidFill>
-                <a:latin typeface="Calibri" pitchFamily="34" charset="0"/>
-                <a:ea typeface="Calibri" pitchFamily="34" charset="-122"/>
-                <a:cs typeface="Calibri" pitchFamily="34" charset="-120"/>
-              </a:rPr>
-              <a:t>| nom_artiste | Nom de famille ou scène | Élémentaire | Texte | 100 | Obligatoire |</a:t>
-            </a:r>
-            <a:endParaRPr lang="en-US" sz="1300" dirty="0"/>
-          </a:p>
-        </p:txBody>
-      </p:sp>
-      <p:sp>
-        <p:nvSpPr>
-          <p:cNvPr id="13" name="Shape 11"/>
-          <p:cNvSpPr/>
-          <p:nvPr/>
-        </p:nvSpPr>
-        <p:spPr>
-          <a:xfrm>
-            <a:off x="457200" y="3246120"/>
-            <a:ext cx="8229600" cy="640080"/>
-          </a:xfrm>
-          <a:prstGeom prst="rect">
-            <a:avLst/>
-          </a:prstGeom>
-          <a:solidFill>
-            <a:srgbClr val="E8F5E9"/>
-          </a:solidFill>
-          <a:ln/>
-          <a:effectLst>
-            <a:outerShdw sx="100000" sy="100000" kx="0" ky="0" algn="bl" rotWithShape="0" blurRad="50800" dist="25400" dir="8100000">
-              <a:srgbClr val="000000">
-                <a:alpha val="12000"/>
-              </a:srgbClr>
-            </a:outerShdw>
-          </a:effectLst>
-        </p:spPr>
-      </p:sp>
-      <p:sp>
-        <p:nvSpPr>
-          <p:cNvPr id="14" name="Shape 12"/>
-          <p:cNvSpPr/>
-          <p:nvPr/>
-        </p:nvSpPr>
-        <p:spPr>
-          <a:xfrm>
-            <a:off x="457200" y="3246120"/>
-            <a:ext cx="54864" cy="640080"/>
-          </a:xfrm>
-          <a:prstGeom prst="rect">
-            <a:avLst/>
-          </a:prstGeom>
-          <a:solidFill>
-            <a:srgbClr val="2E7D32"/>
-          </a:solidFill>
-          <a:ln/>
-        </p:spPr>
-      </p:sp>
-      <p:sp>
-        <p:nvSpPr>
-          <p:cNvPr id="15" name="Text 13"/>
-          <p:cNvSpPr/>
-          <p:nvPr/>
-        </p:nvSpPr>
-        <p:spPr>
-          <a:xfrm>
-            <a:off x="731520" y="3246120"/>
-            <a:ext cx="7772400" cy="640080"/>
-          </a:xfrm>
-          <a:prstGeom prst="rect">
-            <a:avLst/>
-          </a:prstGeom>
-          <a:noFill/>
-          <a:ln/>
-        </p:spPr>
-        <p:txBody>
-          <a:bodyPr wrap="square" lIns="0" tIns="0" rIns="0" bIns="0" rtlCol="0" anchor="ctr"/>
-          <a:lstStyle/>
-          <a:p>
-            <a:pPr indent="0" marL="0">
-              <a:buNone/>
-            </a:pPr>
-            <a:r>
-              <a:rPr lang="en-US" sz="1300" dirty="0">
-                <a:solidFill>
-                  <a:srgbClr val="1A1A2E"/>
-                </a:solidFill>
-                <a:latin typeface="Calibri" pitchFamily="34" charset="0"/>
-                <a:ea typeface="Calibri" pitchFamily="34" charset="-122"/>
-                <a:cs typeface="Calibri" pitchFamily="34" charset="-120"/>
-              </a:rPr>
-              <a:t>| age_artiste | Âge de l'artiste | Calculé | Entier | - | = aujourd'hui - date_naissance |</a:t>
-            </a:r>
-            <a:endParaRPr lang="en-US" sz="1300" dirty="0"/>
-          </a:p>
-        </p:txBody>
-      </p:sp>
-      <p:sp>
-        <p:nvSpPr>
-          <p:cNvPr id="16" name="Shape 14"/>
-          <p:cNvSpPr/>
-          <p:nvPr/>
-        </p:nvSpPr>
-        <p:spPr>
-          <a:xfrm>
-            <a:off x="457200" y="3977640"/>
-            <a:ext cx="8229600" cy="640080"/>
-          </a:xfrm>
-          <a:prstGeom prst="rect">
-            <a:avLst/>
-          </a:prstGeom>
-          <a:solidFill>
-            <a:srgbClr val="FFFFFF"/>
-          </a:solidFill>
-          <a:ln/>
-          <a:effectLst>
-            <a:outerShdw sx="100000" sy="100000" kx="0" ky="0" algn="bl" rotWithShape="0" blurRad="50800" dist="25400" dir="8100000">
-              <a:srgbClr val="000000">
-                <a:alpha val="12000"/>
-              </a:srgbClr>
-            </a:outerShdw>
-          </a:effectLst>
-        </p:spPr>
-      </p:sp>
-      <p:sp>
-        <p:nvSpPr>
-          <p:cNvPr id="17" name="Shape 15"/>
-          <p:cNvSpPr/>
-          <p:nvPr/>
-        </p:nvSpPr>
-        <p:spPr>
-          <a:xfrm>
-            <a:off x="457200" y="3977640"/>
-            <a:ext cx="54864" cy="640080"/>
-          </a:xfrm>
-          <a:prstGeom prst="rect">
-            <a:avLst/>
-          </a:prstGeom>
-          <a:solidFill>
-            <a:srgbClr val="2E7D32"/>
-          </a:solidFill>
-          <a:ln/>
-        </p:spPr>
-      </p:sp>
-      <p:sp>
-        <p:nvSpPr>
-          <p:cNvPr id="18" name="Text 16"/>
-          <p:cNvSpPr/>
-          <p:nvPr/>
-        </p:nvSpPr>
-        <p:spPr>
-          <a:xfrm>
-            <a:off x="731520" y="3977640"/>
-            <a:ext cx="7772400" cy="640080"/>
-          </a:xfrm>
-          <a:prstGeom prst="rect">
-            <a:avLst/>
-          </a:prstGeom>
-          <a:noFill/>
-          <a:ln/>
-        </p:spPr>
-        <p:txBody>
-          <a:bodyPr wrap="square" lIns="0" tIns="0" rIns="0" bIns="0" rtlCol="0" anchor="ctr"/>
-          <a:lstStyle/>
-          <a:p>
-            <a:pPr indent="0" marL="0">
-              <a:buNone/>
-            </a:pPr>
-            <a:r>
-              <a:rPr lang="en-US" sz="1300" dirty="0">
-                <a:solidFill>
-                  <a:srgbClr val="1A1A2E"/>
-                </a:solidFill>
-                <a:latin typeface="Calibri" pitchFamily="34" charset="0"/>
-                <a:ea typeface="Calibri" pitchFamily="34" charset="-122"/>
-                <a:cs typeface="Calibri" pitchFamily="34" charset="-120"/>
-              </a:rPr>
-              <a:t>Exercice : compléter pour toutes les entités SwissSound</a:t>
-            </a:r>
-            <a:endParaRPr lang="en-US" sz="1300" dirty="0"/>
-          </a:p>
-        </p:txBody>
-      </p:sp>
-      <p:sp>
-        <p:nvSpPr>
-          <p:cNvPr id="19" name="Text 17"/>
-          <p:cNvSpPr/>
-          <p:nvPr/>
-        </p:nvSpPr>
-        <p:spPr>
-          <a:xfrm>
-            <a:off x="8229600" y="4754880"/>
-            <a:ext cx="731520" cy="274320"/>
-          </a:xfrm>
-          <a:prstGeom prst="rect">
-            <a:avLst/>
-          </a:prstGeom>
-          <a:noFill/>
-          <a:ln/>
-        </p:spPr>
-        <p:txBody>
-          <a:bodyPr wrap="square" lIns="0" tIns="0" rIns="0" bIns="0" rtlCol="0" anchor="ctr"/>
-          <a:lstStyle/>
-          <a:p>
-            <a:pPr algn="r" indent="0" marL="0">
-              <a:buNone/>
-            </a:pPr>
-            <a:r>
-              <a:rPr lang="en-US" sz="900" dirty="0">
-                <a:solidFill>
-                  <a:srgbClr val="AAAAAA"/>
-                </a:solidFill>
-                <a:latin typeface="Calibri" pitchFamily="34" charset="0"/>
-                <a:ea typeface="Calibri" pitchFamily="34" charset="-122"/>
-                <a:cs typeface="Calibri" pitchFamily="34" charset="-120"/>
-              </a:rPr>
-              <a:t>5/6</a:t>
-            </a:r>
-            <a:endParaRPr lang="en-US" sz="900" dirty="0"/>
-          </a:p>
-        </p:txBody>
-      </p:sp>
+            <a:endParaRPr lang="en-US" sz="2400" dirty="0"/>
+          </a:p>
+        </p:txBody>
+      </p:sp>
+      <p:graphicFrame>
+        <p:nvGraphicFramePr>
+          <p:cNvPr id="6" name="Table 0"/>
+          <p:cNvGraphicFramePr>
+            <a:graphicFrameLocks noGrp="1"/>
+          </p:cNvGraphicFramePr>
+          <p:nvPr>
+            <p:extLst>
+              <p:ext uri="{D42A27DB-BD31-4B8C-83A1-F6EECF244321}">
+                <p14:modId xmlns:p14="http://schemas.microsoft.com/office/powerpoint/2010/main" val="1579011935"/>
+              </p:ext>
+            </p:extLst>
+          </p:nvPr>
+        </p:nvGraphicFramePr>
+        <p:xfrm>
+          <a:off x="457200" y="914400"/>
+          <a:ext cx="8229600" cy="914400"/>
+        </p:xfrm>
+        <a:graphic>
+          <a:graphicData uri="http://schemas.openxmlformats.org/drawingml/2006/table">
+            <a:tbl>
+              <a:tblPr/>
+              <a:tblGrid>
+                <a:gridCol w="1371600"/>
+                <a:gridCol w="1371600"/>
+                <a:gridCol w="1371600"/>
+                <a:gridCol w="1371600"/>
+                <a:gridCol w="1371600"/>
+                <a:gridCol w="1371600"/>
+              </a:tblGrid>
+              <a:tr h="0">
+                <a:tc>
+                  <a:txBody>
+                    <a:bodyPr/>
+                    <a:lstStyle/>
+                    <a:p>
+                      <a:pPr indent="0" marL="0">
+                        <a:buNone/>
+                      </a:pPr>
+                      <a:r>
+                        <a:rPr lang="en-US" sz="1000" b="1" dirty="0">
+                          <a:solidFill>
+                            <a:srgbClr val="FFFFFF"/>
+                          </a:solidFill>
+                          <a:latin typeface="Trebuchet MS" pitchFamily="34" charset="0"/>
+                          <a:ea typeface="Trebuchet MS" pitchFamily="34" charset="-122"/>
+                          <a:cs typeface="Trebuchet MS" pitchFamily="34" charset="-120"/>
+                        </a:rPr>
+                        <a:t>Nom</a:t>
+                      </a:r>
+                      <a:endParaRPr lang="en-US" sz="1000" dirty="0">
+                        <a:latin typeface="Trebuchet MS" charset="0"/>
+                        <a:ea typeface="Trebuchet MS" charset="0"/>
+                        <a:cs typeface="Trebuchet MS" charset="0"/>
+                      </a:endParaRPr>
+                    </a:p>
+                  </a:txBody>
+                  <a:tcPr marL="91440" marR="91440" marT="45720" marB="45720">
+                    <a:lnL w="6350" cap="flat" cmpd="sng" algn="ctr">
+                      <a:solidFill>
+                        <a:srgbClr val="CCCCCC"/>
+                      </a:solidFill>
+                      <a:prstDash val="solid"/>
+                      <a:round/>
+                      <a:headEnd type="none" w="med" len="med"/>
+                      <a:tailEnd type="none" w="med" len="med"/>
+                    </a:lnL>
+                    <a:lnR w="6350" cap="flat" cmpd="sng" algn="ctr">
+                      <a:solidFill>
+                        <a:srgbClr val="CCCCCC"/>
+                      </a:solidFill>
+                      <a:prstDash val="solid"/>
+                      <a:round/>
+                      <a:headEnd type="none" w="med" len="med"/>
+                      <a:tailEnd type="none" w="med" len="med"/>
+                    </a:lnR>
+                    <a:lnT w="6350" cap="flat" cmpd="sng" algn="ctr">
+                      <a:solidFill>
+                        <a:srgbClr val="CCCCCC"/>
+                      </a:solidFill>
+                      <a:prstDash val="solid"/>
+                      <a:round/>
+                      <a:headEnd type="none" w="med" len="med"/>
+                      <a:tailEnd type="none" w="med" len="med"/>
+                    </a:lnT>
+                    <a:lnB w="6350" cap="flat" cmpd="sng" algn="ctr">
+                      <a:solidFill>
+                        <a:srgbClr val="CCCCCC"/>
+                      </a:solidFill>
+                      <a:prstDash val="solid"/>
+                      <a:round/>
+                      <a:headEnd type="none" w="med" len="med"/>
+                      <a:tailEnd type="none" w="med" len="med"/>
+                    </a:lnB>
+                    <a:solidFill>
+                      <a:srgbClr val="2E7D32"/>
+                    </a:solidFill>
+                  </a:tcPr>
+                </a:tc>
+                <a:tc>
+                  <a:txBody>
+                    <a:bodyPr/>
+                    <a:lstStyle/>
+                    <a:p>
+                      <a:pPr indent="0" marL="0">
+                        <a:buNone/>
+                      </a:pPr>
+                      <a:r>
+                        <a:rPr lang="en-US" sz="1000" b="1" dirty="0">
+                          <a:solidFill>
+                            <a:srgbClr val="FFFFFF"/>
+                          </a:solidFill>
+                          <a:latin typeface="Trebuchet MS" pitchFamily="34" charset="0"/>
+                          <a:ea typeface="Trebuchet MS" pitchFamily="34" charset="-122"/>
+                          <a:cs typeface="Trebuchet MS" pitchFamily="34" charset="-120"/>
+                        </a:rPr>
+                        <a:t>Description</a:t>
+                      </a:r>
+                      <a:endParaRPr lang="en-US" sz="1000" dirty="0">
+                        <a:latin typeface="Trebuchet MS" charset="0"/>
+                        <a:ea typeface="Trebuchet MS" charset="0"/>
+                        <a:cs typeface="Trebuchet MS" charset="0"/>
+                      </a:endParaRPr>
+                    </a:p>
+                  </a:txBody>
+                  <a:tcPr marL="91440" marR="91440" marT="45720" marB="45720">
+                    <a:lnL w="6350" cap="flat" cmpd="sng" algn="ctr">
+                      <a:solidFill>
+                        <a:srgbClr val="CCCCCC"/>
+                      </a:solidFill>
+                      <a:prstDash val="solid"/>
+                      <a:round/>
+                      <a:headEnd type="none" w="med" len="med"/>
+                      <a:tailEnd type="none" w="med" len="med"/>
+                    </a:lnL>
+                    <a:lnR w="6350" cap="flat" cmpd="sng" algn="ctr">
+                      <a:solidFill>
+                        <a:srgbClr val="CCCCCC"/>
+                      </a:solidFill>
+                      <a:prstDash val="solid"/>
+                      <a:round/>
+                      <a:headEnd type="none" w="med" len="med"/>
+                      <a:tailEnd type="none" w="med" len="med"/>
+                    </a:lnR>
+                    <a:lnT w="6350" cap="flat" cmpd="sng" algn="ctr">
+                      <a:solidFill>
+                        <a:srgbClr val="CCCCCC"/>
+                      </a:solidFill>
+                      <a:prstDash val="solid"/>
+                      <a:round/>
+                      <a:headEnd type="none" w="med" len="med"/>
+                      <a:tailEnd type="none" w="med" len="med"/>
+                    </a:lnT>
+                    <a:lnB w="6350" cap="flat" cmpd="sng" algn="ctr">
+                      <a:solidFill>
+                        <a:srgbClr val="CCCCCC"/>
+                      </a:solidFill>
+                      <a:prstDash val="solid"/>
+                      <a:round/>
+                      <a:headEnd type="none" w="med" len="med"/>
+                      <a:tailEnd type="none" w="med" len="med"/>
+                    </a:lnB>
+                    <a:solidFill>
+                      <a:srgbClr val="2E7D32"/>
+                    </a:solidFill>
+                  </a:tcPr>
+                </a:tc>
+                <a:tc>
+                  <a:txBody>
+                    <a:bodyPr/>
+                    <a:lstStyle/>
+                    <a:p>
+                      <a:pPr indent="0" marL="0">
+                        <a:buNone/>
+                      </a:pPr>
+                      <a:r>
+                        <a:rPr lang="en-US" sz="1000" b="1" dirty="0">
+                          <a:solidFill>
+                            <a:srgbClr val="FFFFFF"/>
+                          </a:solidFill>
+                          <a:latin typeface="Trebuchet MS" pitchFamily="34" charset="0"/>
+                          <a:ea typeface="Trebuchet MS" pitchFamily="34" charset="-122"/>
+                          <a:cs typeface="Trebuchet MS" pitchFamily="34" charset="-120"/>
+                        </a:rPr>
+                        <a:t>Type</a:t>
+                      </a:r>
+                      <a:endParaRPr lang="en-US" sz="1000" dirty="0">
+                        <a:latin typeface="Trebuchet MS" charset="0"/>
+                        <a:ea typeface="Trebuchet MS" charset="0"/>
+                        <a:cs typeface="Trebuchet MS" charset="0"/>
+                      </a:endParaRPr>
+                    </a:p>
+                  </a:txBody>
+                  <a:tcPr marL="91440" marR="91440" marT="45720" marB="45720">
+                    <a:lnL w="6350" cap="flat" cmpd="sng" algn="ctr">
+                      <a:solidFill>
+                        <a:srgbClr val="CCCCCC"/>
+                      </a:solidFill>
+                      <a:prstDash val="solid"/>
+                      <a:round/>
+                      <a:headEnd type="none" w="med" len="med"/>
+                      <a:tailEnd type="none" w="med" len="med"/>
+                    </a:lnL>
+                    <a:lnR w="6350" cap="flat" cmpd="sng" algn="ctr">
+                      <a:solidFill>
+                        <a:srgbClr val="CCCCCC"/>
+                      </a:solidFill>
+                      <a:prstDash val="solid"/>
+                      <a:round/>
+                      <a:headEnd type="none" w="med" len="med"/>
+                      <a:tailEnd type="none" w="med" len="med"/>
+                    </a:lnR>
+                    <a:lnT w="6350" cap="flat" cmpd="sng" algn="ctr">
+                      <a:solidFill>
+                        <a:srgbClr val="CCCCCC"/>
+                      </a:solidFill>
+                      <a:prstDash val="solid"/>
+                      <a:round/>
+                      <a:headEnd type="none" w="med" len="med"/>
+                      <a:tailEnd type="none" w="med" len="med"/>
+                    </a:lnT>
+                    <a:lnB w="6350" cap="flat" cmpd="sng" algn="ctr">
+                      <a:solidFill>
+                        <a:srgbClr val="CCCCCC"/>
+                      </a:solidFill>
+                      <a:prstDash val="solid"/>
+                      <a:round/>
+                      <a:headEnd type="none" w="med" len="med"/>
+                      <a:tailEnd type="none" w="med" len="med"/>
+                    </a:lnB>
+                    <a:solidFill>
+                      <a:srgbClr val="2E7D32"/>
+                    </a:solidFill>
+                  </a:tcPr>
+                </a:tc>
+                <a:tc>
+                  <a:txBody>
+                    <a:bodyPr/>
+                    <a:lstStyle/>
+                    <a:p>
+                      <a:pPr indent="0" marL="0">
+                        <a:buNone/>
+                      </a:pPr>
+                      <a:r>
+                        <a:rPr lang="en-US" sz="1000" b="1" dirty="0">
+                          <a:solidFill>
+                            <a:srgbClr val="FFFFFF"/>
+                          </a:solidFill>
+                          <a:latin typeface="Trebuchet MS" pitchFamily="34" charset="0"/>
+                          <a:ea typeface="Trebuchet MS" pitchFamily="34" charset="-122"/>
+                          <a:cs typeface="Trebuchet MS" pitchFamily="34" charset="-120"/>
+                        </a:rPr>
+                        <a:t>Format</a:t>
+                      </a:r>
+                      <a:endParaRPr lang="en-US" sz="1000" dirty="0">
+                        <a:latin typeface="Trebuchet MS" charset="0"/>
+                        <a:ea typeface="Trebuchet MS" charset="0"/>
+                        <a:cs typeface="Trebuchet MS" charset="0"/>
+                      </a:endParaRPr>
+                    </a:p>
+                  </a:txBody>
+                  <a:tcPr marL="91440" marR="91440" marT="45720" marB="45720">
+                    <a:lnL w="6350" cap="flat" cmpd="sng" algn="ctr">
+                      <a:solidFill>
+                        <a:srgbClr val="CCCCCC"/>
+                      </a:solidFill>
+                      <a:prstDash val="solid"/>
+                      <a:round/>
+                      <a:headEnd type="none" w="med" len="med"/>
+                      <a:tailEnd type="none" w="med" len="med"/>
+                    </a:lnL>
+                    <a:lnR w="6350" cap="flat" cmpd="sng" algn="ctr">
+                      <a:solidFill>
+                        <a:srgbClr val="CCCCCC"/>
+                      </a:solidFill>
+                      <a:prstDash val="solid"/>
+                      <a:round/>
+                      <a:headEnd type="none" w="med" len="med"/>
+                      <a:tailEnd type="none" w="med" len="med"/>
+                    </a:lnR>
+                    <a:lnT w="6350" cap="flat" cmpd="sng" algn="ctr">
+                      <a:solidFill>
+                        <a:srgbClr val="CCCCCC"/>
+                      </a:solidFill>
+                      <a:prstDash val="solid"/>
+                      <a:round/>
+                      <a:headEnd type="none" w="med" len="med"/>
+                      <a:tailEnd type="none" w="med" len="med"/>
+                    </a:lnT>
+                    <a:lnB w="6350" cap="flat" cmpd="sng" algn="ctr">
+                      <a:solidFill>
+                        <a:srgbClr val="CCCCCC"/>
+                      </a:solidFill>
+                      <a:prstDash val="solid"/>
+                      <a:round/>
+                      <a:headEnd type="none" w="med" len="med"/>
+                      <a:tailEnd type="none" w="med" len="med"/>
+                    </a:lnB>
+                    <a:solidFill>
+                      <a:srgbClr val="2E7D32"/>
+                    </a:solidFill>
+                  </a:tcPr>
+                </a:tc>
+                <a:tc>
+                  <a:txBody>
+                    <a:bodyPr/>
+                    <a:lstStyle/>
+                    <a:p>
+                      <a:pPr indent="0" marL="0">
+                        <a:buNone/>
+                      </a:pPr>
+                      <a:r>
+                        <a:rPr lang="en-US" sz="1000" b="1" dirty="0">
+                          <a:solidFill>
+                            <a:srgbClr val="FFFFFF"/>
+                          </a:solidFill>
+                          <a:latin typeface="Trebuchet MS" pitchFamily="34" charset="0"/>
+                          <a:ea typeface="Trebuchet MS" pitchFamily="34" charset="-122"/>
+                          <a:cs typeface="Trebuchet MS" pitchFamily="34" charset="-120"/>
+                        </a:rPr>
+                        <a:t>Longueur</a:t>
+                      </a:r>
+                      <a:endParaRPr lang="en-US" sz="1000" dirty="0">
+                        <a:latin typeface="Trebuchet MS" charset="0"/>
+                        <a:ea typeface="Trebuchet MS" charset="0"/>
+                        <a:cs typeface="Trebuchet MS" charset="0"/>
+                      </a:endParaRPr>
+                    </a:p>
+                  </a:txBody>
+                  <a:tcPr marL="91440" marR="91440" marT="45720" marB="45720">
+                    <a:lnL w="6350" cap="flat" cmpd="sng" algn="ctr">
+                      <a:solidFill>
+                        <a:srgbClr val="CCCCCC"/>
+                      </a:solidFill>
+                      <a:prstDash val="solid"/>
+                      <a:round/>
+                      <a:headEnd type="none" w="med" len="med"/>
+                      <a:tailEnd type="none" w="med" len="med"/>
+                    </a:lnL>
+                    <a:lnR w="6350" cap="flat" cmpd="sng" algn="ctr">
+                      <a:solidFill>
+                        <a:srgbClr val="CCCCCC"/>
+                      </a:solidFill>
+                      <a:prstDash val="solid"/>
+                      <a:round/>
+                      <a:headEnd type="none" w="med" len="med"/>
+                      <a:tailEnd type="none" w="med" len="med"/>
+                    </a:lnR>
+                    <a:lnT w="6350" cap="flat" cmpd="sng" algn="ctr">
+                      <a:solidFill>
+                        <a:srgbClr val="CCCCCC"/>
+                      </a:solidFill>
+                      <a:prstDash val="solid"/>
+                      <a:round/>
+                      <a:headEnd type="none" w="med" len="med"/>
+                      <a:tailEnd type="none" w="med" len="med"/>
+                    </a:lnT>
+                    <a:lnB w="6350" cap="flat" cmpd="sng" algn="ctr">
+                      <a:solidFill>
+                        <a:srgbClr val="CCCCCC"/>
+                      </a:solidFill>
+                      <a:prstDash val="solid"/>
+                      <a:round/>
+                      <a:headEnd type="none" w="med" len="med"/>
+                      <a:tailEnd type="none" w="med" len="med"/>
+                    </a:lnB>
+                    <a:solidFill>
+                      <a:srgbClr val="2E7D32"/>
+                    </a:solidFill>
+                  </a:tcPr>
+                </a:tc>
+                <a:tc>
+                  <a:txBody>
+                    <a:bodyPr/>
+                    <a:lstStyle/>
+                    <a:p>
+                      <a:pPr indent="0" marL="0">
+                        <a:buNone/>
+                      </a:pPr>
+                      <a:r>
+                        <a:rPr lang="en-US" sz="1000" b="1" dirty="0">
+                          <a:solidFill>
+                            <a:srgbClr val="FFFFFF"/>
+                          </a:solidFill>
+                          <a:latin typeface="Trebuchet MS" pitchFamily="34" charset="0"/>
+                          <a:ea typeface="Trebuchet MS" pitchFamily="34" charset="-122"/>
+                          <a:cs typeface="Trebuchet MS" pitchFamily="34" charset="-120"/>
+                        </a:rPr>
+                        <a:t>Règle</a:t>
+                      </a:r>
+                      <a:endParaRPr lang="en-US" sz="1000" dirty="0">
+                        <a:latin typeface="Trebuchet MS" charset="0"/>
+                        <a:ea typeface="Trebuchet MS" charset="0"/>
+                        <a:cs typeface="Trebuchet MS" charset="0"/>
+                      </a:endParaRPr>
+                    </a:p>
+                  </a:txBody>
+                  <a:tcPr marL="91440" marR="91440" marT="45720" marB="45720">
+                    <a:lnL w="6350" cap="flat" cmpd="sng" algn="ctr">
+                      <a:solidFill>
+                        <a:srgbClr val="CCCCCC"/>
+                      </a:solidFill>
+                      <a:prstDash val="solid"/>
+                      <a:round/>
+                      <a:headEnd type="none" w="med" len="med"/>
+                      <a:tailEnd type="none" w="med" len="med"/>
+                    </a:lnL>
+                    <a:lnR w="6350" cap="flat" cmpd="sng" algn="ctr">
+                      <a:solidFill>
+                        <a:srgbClr val="CCCCCC"/>
+                      </a:solidFill>
+                      <a:prstDash val="solid"/>
+                      <a:round/>
+                      <a:headEnd type="none" w="med" len="med"/>
+                      <a:tailEnd type="none" w="med" len="med"/>
+                    </a:lnR>
+                    <a:lnT w="6350" cap="flat" cmpd="sng" algn="ctr">
+                      <a:solidFill>
+                        <a:srgbClr val="CCCCCC"/>
+                      </a:solidFill>
+                      <a:prstDash val="solid"/>
+                      <a:round/>
+                      <a:headEnd type="none" w="med" len="med"/>
+                      <a:tailEnd type="none" w="med" len="med"/>
+                    </a:lnT>
+                    <a:lnB w="6350" cap="flat" cmpd="sng" algn="ctr">
+                      <a:solidFill>
+                        <a:srgbClr val="CCCCCC"/>
+                      </a:solidFill>
+                      <a:prstDash val="solid"/>
+                      <a:round/>
+                      <a:headEnd type="none" w="med" len="med"/>
+                      <a:tailEnd type="none" w="med" len="med"/>
+                    </a:lnB>
+                    <a:solidFill>
+                      <a:srgbClr val="2E7D32"/>
+                    </a:solidFill>
+                  </a:tcPr>
+                </a:tc>
+              </a:tr>
+              <a:tr h="0">
+                <a:tc>
+                  <a:txBody>
+                    <a:bodyPr/>
+                    <a:lstStyle/>
+                    <a:p>
+                      <a:pPr indent="0" marL="0">
+                        <a:buNone/>
+                      </a:pPr>
+                      <a:r>
+                        <a:rPr lang="en-US" sz="900" dirty="0">
+                          <a:solidFill>
+                            <a:srgbClr val="000000"/>
+                          </a:solidFill>
+                          <a:latin typeface="Calibri" pitchFamily="34" charset="0"/>
+                          <a:ea typeface="Calibri" pitchFamily="34" charset="-122"/>
+                          <a:cs typeface="Calibri" pitchFamily="34" charset="-120"/>
+                        </a:rPr>
+                        <a:t>id_artiste</a:t>
+                      </a:r>
+                      <a:endParaRPr lang="en-US" sz="900" dirty="0">
+                        <a:latin typeface="Calibri" charset="0"/>
+                        <a:ea typeface="Calibri" charset="0"/>
+                        <a:cs typeface="Calibri" charset="0"/>
+                      </a:endParaRPr>
+                    </a:p>
+                  </a:txBody>
+                  <a:tcPr marL="91440" marR="91440" marT="45720" marB="45720">
+                    <a:lnL w="6350" cap="flat" cmpd="sng" algn="ctr">
+                      <a:solidFill>
+                        <a:srgbClr val="CCCCCC"/>
+                      </a:solidFill>
+                      <a:prstDash val="solid"/>
+                      <a:round/>
+                      <a:headEnd type="none" w="med" len="med"/>
+                      <a:tailEnd type="none" w="med" len="med"/>
+                    </a:lnL>
+                    <a:lnR w="6350" cap="flat" cmpd="sng" algn="ctr">
+                      <a:solidFill>
+                        <a:srgbClr val="CCCCCC"/>
+                      </a:solidFill>
+                      <a:prstDash val="solid"/>
+                      <a:round/>
+                      <a:headEnd type="none" w="med" len="med"/>
+                      <a:tailEnd type="none" w="med" len="med"/>
+                    </a:lnR>
+                    <a:lnT w="6350" cap="flat" cmpd="sng" algn="ctr">
+                      <a:solidFill>
+                        <a:srgbClr val="CCCCCC"/>
+                      </a:solidFill>
+                      <a:prstDash val="solid"/>
+                      <a:round/>
+                      <a:headEnd type="none" w="med" len="med"/>
+                      <a:tailEnd type="none" w="med" len="med"/>
+                    </a:lnT>
+                    <a:lnB w="6350" cap="flat" cmpd="sng" algn="ctr">
+                      <a:solidFill>
+                        <a:srgbClr val="CCCCCC"/>
+                      </a:solidFill>
+                      <a:prstDash val="solid"/>
+                      <a:round/>
+                      <a:headEnd type="none" w="med" len="med"/>
+                      <a:tailEnd type="none" w="med" len="med"/>
+                    </a:lnB>
+                    <a:solidFill>
+                      <a:srgbClr val="FFFFFF"/>
+                    </a:solidFill>
+                  </a:tcPr>
+                </a:tc>
+                <a:tc>
+                  <a:txBody>
+                    <a:bodyPr/>
+                    <a:lstStyle/>
+                    <a:p>
+                      <a:pPr indent="0" marL="0">
+                        <a:buNone/>
+                      </a:pPr>
+                      <a:r>
+                        <a:rPr lang="en-US" sz="900" dirty="0">
+                          <a:solidFill>
+                            <a:srgbClr val="000000"/>
+                          </a:solidFill>
+                          <a:latin typeface="Calibri" pitchFamily="34" charset="0"/>
+                          <a:ea typeface="Calibri" pitchFamily="34" charset="-122"/>
+                          <a:cs typeface="Calibri" pitchFamily="34" charset="-120"/>
+                        </a:rPr>
+                        <a:t>Identifiant unique artiste</a:t>
+                      </a:r>
+                      <a:endParaRPr lang="en-US" sz="900" dirty="0">
+                        <a:latin typeface="Calibri" charset="0"/>
+                        <a:ea typeface="Calibri" charset="0"/>
+                        <a:cs typeface="Calibri" charset="0"/>
+                      </a:endParaRPr>
+                    </a:p>
+                  </a:txBody>
+                  <a:tcPr marL="91440" marR="91440" marT="45720" marB="45720">
+                    <a:lnL w="6350" cap="flat" cmpd="sng" algn="ctr">
+                      <a:solidFill>
+                        <a:srgbClr val="CCCCCC"/>
+                      </a:solidFill>
+                      <a:prstDash val="solid"/>
+                      <a:round/>
+                      <a:headEnd type="none" w="med" len="med"/>
+                      <a:tailEnd type="none" w="med" len="med"/>
+                    </a:lnL>
+                    <a:lnR w="6350" cap="flat" cmpd="sng" algn="ctr">
+                      <a:solidFill>
+                        <a:srgbClr val="CCCCCC"/>
+                      </a:solidFill>
+                      <a:prstDash val="solid"/>
+                      <a:round/>
+                      <a:headEnd type="none" w="med" len="med"/>
+                      <a:tailEnd type="none" w="med" len="med"/>
+                    </a:lnR>
+                    <a:lnT w="6350" cap="flat" cmpd="sng" algn="ctr">
+                      <a:solidFill>
+                        <a:srgbClr val="CCCCCC"/>
+                      </a:solidFill>
+                      <a:prstDash val="solid"/>
+                      <a:round/>
+                      <a:headEnd type="none" w="med" len="med"/>
+                      <a:tailEnd type="none" w="med" len="med"/>
+                    </a:lnT>
+                    <a:lnB w="6350" cap="flat" cmpd="sng" algn="ctr">
+                      <a:solidFill>
+                        <a:srgbClr val="CCCCCC"/>
+                      </a:solidFill>
+                      <a:prstDash val="solid"/>
+                      <a:round/>
+                      <a:headEnd type="none" w="med" len="med"/>
+                      <a:tailEnd type="none" w="med" len="med"/>
+                    </a:lnB>
+                    <a:solidFill>
+                      <a:srgbClr val="FFFFFF"/>
+                    </a:solidFill>
+                  </a:tcPr>
+                </a:tc>
+                <a:tc>
+                  <a:txBody>
+                    <a:bodyPr/>
+                    <a:lstStyle/>
+                    <a:p>
+                      <a:pPr indent="0" marL="0">
+                        <a:buNone/>
+                      </a:pPr>
+                      <a:r>
+                        <a:rPr lang="en-US" sz="900" dirty="0">
+                          <a:solidFill>
+                            <a:srgbClr val="000000"/>
+                          </a:solidFill>
+                          <a:latin typeface="Calibri" pitchFamily="34" charset="0"/>
+                          <a:ea typeface="Calibri" pitchFamily="34" charset="-122"/>
+                          <a:cs typeface="Calibri" pitchFamily="34" charset="-120"/>
+                        </a:rPr>
+                        <a:t>Élémentaire</a:t>
+                      </a:r>
+                      <a:endParaRPr lang="en-US" sz="900" dirty="0">
+                        <a:latin typeface="Calibri" charset="0"/>
+                        <a:ea typeface="Calibri" charset="0"/>
+                        <a:cs typeface="Calibri" charset="0"/>
+                      </a:endParaRPr>
+                    </a:p>
+                  </a:txBody>
+                  <a:tcPr marL="91440" marR="91440" marT="45720" marB="45720">
+                    <a:lnL w="6350" cap="flat" cmpd="sng" algn="ctr">
+                      <a:solidFill>
+                        <a:srgbClr val="CCCCCC"/>
+                      </a:solidFill>
+                      <a:prstDash val="solid"/>
+                      <a:round/>
+                      <a:headEnd type="none" w="med" len="med"/>
+                      <a:tailEnd type="none" w="med" len="med"/>
+                    </a:lnL>
+                    <a:lnR w="6350" cap="flat" cmpd="sng" algn="ctr">
+                      <a:solidFill>
+                        <a:srgbClr val="CCCCCC"/>
+                      </a:solidFill>
+                      <a:prstDash val="solid"/>
+                      <a:round/>
+                      <a:headEnd type="none" w="med" len="med"/>
+                      <a:tailEnd type="none" w="med" len="med"/>
+                    </a:lnR>
+                    <a:lnT w="6350" cap="flat" cmpd="sng" algn="ctr">
+                      <a:solidFill>
+                        <a:srgbClr val="CCCCCC"/>
+                      </a:solidFill>
+                      <a:prstDash val="solid"/>
+                      <a:round/>
+                      <a:headEnd type="none" w="med" len="med"/>
+                      <a:tailEnd type="none" w="med" len="med"/>
+                    </a:lnT>
+                    <a:lnB w="6350" cap="flat" cmpd="sng" algn="ctr">
+                      <a:solidFill>
+                        <a:srgbClr val="CCCCCC"/>
+                      </a:solidFill>
+                      <a:prstDash val="solid"/>
+                      <a:round/>
+                      <a:headEnd type="none" w="med" len="med"/>
+                      <a:tailEnd type="none" w="med" len="med"/>
+                    </a:lnB>
+                    <a:solidFill>
+                      <a:srgbClr val="FFFFFF"/>
+                    </a:solidFill>
+                  </a:tcPr>
+                </a:tc>
+                <a:tc>
+                  <a:txBody>
+                    <a:bodyPr/>
+                    <a:lstStyle/>
+                    <a:p>
+                      <a:pPr indent="0" marL="0">
+                        <a:buNone/>
+                      </a:pPr>
+                      <a:r>
+                        <a:rPr lang="en-US" sz="900" dirty="0">
+                          <a:solidFill>
+                            <a:srgbClr val="000000"/>
+                          </a:solidFill>
+                          <a:latin typeface="Calibri" pitchFamily="34" charset="0"/>
+                          <a:ea typeface="Calibri" pitchFamily="34" charset="-122"/>
+                          <a:cs typeface="Calibri" pitchFamily="34" charset="-120"/>
+                        </a:rPr>
+                        <a:t>Entier</a:t>
+                      </a:r>
+                      <a:endParaRPr lang="en-US" sz="900" dirty="0">
+                        <a:latin typeface="Calibri" charset="0"/>
+                        <a:ea typeface="Calibri" charset="0"/>
+                        <a:cs typeface="Calibri" charset="0"/>
+                      </a:endParaRPr>
+                    </a:p>
+                  </a:txBody>
+                  <a:tcPr marL="91440" marR="91440" marT="45720" marB="45720">
+                    <a:lnL w="6350" cap="flat" cmpd="sng" algn="ctr">
+                      <a:solidFill>
+                        <a:srgbClr val="CCCCCC"/>
+                      </a:solidFill>
+                      <a:prstDash val="solid"/>
+                      <a:round/>
+                      <a:headEnd type="none" w="med" len="med"/>
+                      <a:tailEnd type="none" w="med" len="med"/>
+                    </a:lnL>
+                    <a:lnR w="6350" cap="flat" cmpd="sng" algn="ctr">
+                      <a:solidFill>
+                        <a:srgbClr val="CCCCCC"/>
+                      </a:solidFill>
+                      <a:prstDash val="solid"/>
+                      <a:round/>
+                      <a:headEnd type="none" w="med" len="med"/>
+                      <a:tailEnd type="none" w="med" len="med"/>
+                    </a:lnR>
+                    <a:lnT w="6350" cap="flat" cmpd="sng" algn="ctr">
+                      <a:solidFill>
+                        <a:srgbClr val="CCCCCC"/>
+                      </a:solidFill>
+                      <a:prstDash val="solid"/>
+                      <a:round/>
+                      <a:headEnd type="none" w="med" len="med"/>
+                      <a:tailEnd type="none" w="med" len="med"/>
+                    </a:lnT>
+                    <a:lnB w="6350" cap="flat" cmpd="sng" algn="ctr">
+                      <a:solidFill>
+                        <a:srgbClr val="CCCCCC"/>
+                      </a:solidFill>
+                      <a:prstDash val="solid"/>
+                      <a:round/>
+                      <a:headEnd type="none" w="med" len="med"/>
+                      <a:tailEnd type="none" w="med" len="med"/>
+                    </a:lnB>
+                    <a:solidFill>
+                      <a:srgbClr val="FFFFFF"/>
+                    </a:solidFill>
+                  </a:tcPr>
+                </a:tc>
+                <a:tc>
+                  <a:txBody>
+                    <a:bodyPr/>
+                    <a:lstStyle/>
+                    <a:p>
+                      <a:pPr indent="0" marL="0">
+                        <a:buNone/>
+                      </a:pPr>
+                      <a:r>
+                        <a:rPr lang="en-US" sz="900" dirty="0">
+                          <a:solidFill>
+                            <a:srgbClr val="000000"/>
+                          </a:solidFill>
+                          <a:latin typeface="Calibri" pitchFamily="34" charset="0"/>
+                          <a:ea typeface="Calibri" pitchFamily="34" charset="-122"/>
+                          <a:cs typeface="Calibri" pitchFamily="34" charset="-120"/>
+                        </a:rPr>
+                        <a:t>—</a:t>
+                      </a:r>
+                      <a:endParaRPr lang="en-US" sz="900" dirty="0">
+                        <a:latin typeface="Calibri" charset="0"/>
+                        <a:ea typeface="Calibri" charset="0"/>
+                        <a:cs typeface="Calibri" charset="0"/>
+                      </a:endParaRPr>
+                    </a:p>
+                  </a:txBody>
+                  <a:tcPr marL="91440" marR="91440" marT="45720" marB="45720">
+                    <a:lnL w="6350" cap="flat" cmpd="sng" algn="ctr">
+                      <a:solidFill>
+                        <a:srgbClr val="CCCCCC"/>
+                      </a:solidFill>
+                      <a:prstDash val="solid"/>
+                      <a:round/>
+                      <a:headEnd type="none" w="med" len="med"/>
+                      <a:tailEnd type="none" w="med" len="med"/>
+                    </a:lnL>
+                    <a:lnR w="6350" cap="flat" cmpd="sng" algn="ctr">
+                      <a:solidFill>
+                        <a:srgbClr val="CCCCCC"/>
+                      </a:solidFill>
+                      <a:prstDash val="solid"/>
+                      <a:round/>
+                      <a:headEnd type="none" w="med" len="med"/>
+                      <a:tailEnd type="none" w="med" len="med"/>
+                    </a:lnR>
+                    <a:lnT w="6350" cap="flat" cmpd="sng" algn="ctr">
+                      <a:solidFill>
+                        <a:srgbClr val="CCCCCC"/>
+                      </a:solidFill>
+                      <a:prstDash val="solid"/>
+                      <a:round/>
+                      <a:headEnd type="none" w="med" len="med"/>
+                      <a:tailEnd type="none" w="med" len="med"/>
+                    </a:lnT>
+                    <a:lnB w="6350" cap="flat" cmpd="sng" algn="ctr">
+                      <a:solidFill>
+                        <a:srgbClr val="CCCCCC"/>
+                      </a:solidFill>
+                      <a:prstDash val="solid"/>
+                      <a:round/>
+                      <a:headEnd type="none" w="med" len="med"/>
+                      <a:tailEnd type="none" w="med" len="med"/>
+                    </a:lnB>
+                    <a:solidFill>
+                      <a:srgbClr val="FFFFFF"/>
+                    </a:solidFill>
+                  </a:tcPr>
+                </a:tc>
+                <a:tc>
+                  <a:txBody>
+                    <a:bodyPr/>
+                    <a:lstStyle/>
+                    <a:p>
+                      <a:pPr indent="0" marL="0">
+                        <a:buNone/>
+                      </a:pPr>
+                      <a:r>
+                        <a:rPr lang="en-US" sz="900" dirty="0">
+                          <a:solidFill>
+                            <a:srgbClr val="000000"/>
+                          </a:solidFill>
+                          <a:latin typeface="Calibri" pitchFamily="34" charset="0"/>
+                          <a:ea typeface="Calibri" pitchFamily="34" charset="-122"/>
+                          <a:cs typeface="Calibri" pitchFamily="34" charset="-120"/>
+                        </a:rPr>
+                        <a:t>Auto-incrémenté, PK</a:t>
+                      </a:r>
+                      <a:endParaRPr lang="en-US" sz="900" dirty="0">
+                        <a:latin typeface="Calibri" charset="0"/>
+                        <a:ea typeface="Calibri" charset="0"/>
+                        <a:cs typeface="Calibri" charset="0"/>
+                      </a:endParaRPr>
+                    </a:p>
+                  </a:txBody>
+                  <a:tcPr marL="91440" marR="91440" marT="45720" marB="45720">
+                    <a:lnL w="6350" cap="flat" cmpd="sng" algn="ctr">
+                      <a:solidFill>
+                        <a:srgbClr val="CCCCCC"/>
+                      </a:solidFill>
+                      <a:prstDash val="solid"/>
+                      <a:round/>
+                      <a:headEnd type="none" w="med" len="med"/>
+                      <a:tailEnd type="none" w="med" len="med"/>
+                    </a:lnL>
+                    <a:lnR w="6350" cap="flat" cmpd="sng" algn="ctr">
+                      <a:solidFill>
+                        <a:srgbClr val="CCCCCC"/>
+                      </a:solidFill>
+                      <a:prstDash val="solid"/>
+                      <a:round/>
+                      <a:headEnd type="none" w="med" len="med"/>
+                      <a:tailEnd type="none" w="med" len="med"/>
+                    </a:lnR>
+                    <a:lnT w="6350" cap="flat" cmpd="sng" algn="ctr">
+                      <a:solidFill>
+                        <a:srgbClr val="CCCCCC"/>
+                      </a:solidFill>
+                      <a:prstDash val="solid"/>
+                      <a:round/>
+                      <a:headEnd type="none" w="med" len="med"/>
+                      <a:tailEnd type="none" w="med" len="med"/>
+                    </a:lnT>
+                    <a:lnB w="6350" cap="flat" cmpd="sng" algn="ctr">
+                      <a:solidFill>
+                        <a:srgbClr val="CCCCCC"/>
+                      </a:solidFill>
+                      <a:prstDash val="solid"/>
+                      <a:round/>
+                      <a:headEnd type="none" w="med" len="med"/>
+                      <a:tailEnd type="none" w="med" len="med"/>
+                    </a:lnB>
+                    <a:solidFill>
+                      <a:srgbClr val="FFFFFF"/>
+                    </a:solidFill>
+                  </a:tcPr>
+                </a:tc>
+              </a:tr>
+              <a:tr h="0">
+                <a:tc>
+                  <a:txBody>
+                    <a:bodyPr/>
+                    <a:lstStyle/>
+                    <a:p>
+                      <a:pPr indent="0" marL="0">
+                        <a:buNone/>
+                      </a:pPr>
+                      <a:r>
+                        <a:rPr lang="en-US" sz="900" dirty="0">
+                          <a:solidFill>
+                            <a:srgbClr val="000000"/>
+                          </a:solidFill>
+                          <a:latin typeface="Calibri" pitchFamily="34" charset="0"/>
+                          <a:ea typeface="Calibri" pitchFamily="34" charset="-122"/>
+                          <a:cs typeface="Calibri" pitchFamily="34" charset="-120"/>
+                        </a:rPr>
+                        <a:t>nom_artiste</a:t>
+                      </a:r>
+                      <a:endParaRPr lang="en-US" sz="900" dirty="0">
+                        <a:latin typeface="Calibri" charset="0"/>
+                        <a:ea typeface="Calibri" charset="0"/>
+                        <a:cs typeface="Calibri" charset="0"/>
+                      </a:endParaRPr>
+                    </a:p>
+                  </a:txBody>
+                  <a:tcPr marL="91440" marR="91440" marT="45720" marB="45720">
+                    <a:lnL w="6350" cap="flat" cmpd="sng" algn="ctr">
+                      <a:solidFill>
+                        <a:srgbClr val="CCCCCC"/>
+                      </a:solidFill>
+                      <a:prstDash val="solid"/>
+                      <a:round/>
+                      <a:headEnd type="none" w="med" len="med"/>
+                      <a:tailEnd type="none" w="med" len="med"/>
+                    </a:lnL>
+                    <a:lnR w="6350" cap="flat" cmpd="sng" algn="ctr">
+                      <a:solidFill>
+                        <a:srgbClr val="CCCCCC"/>
+                      </a:solidFill>
+                      <a:prstDash val="solid"/>
+                      <a:round/>
+                      <a:headEnd type="none" w="med" len="med"/>
+                      <a:tailEnd type="none" w="med" len="med"/>
+                    </a:lnR>
+                    <a:lnT w="6350" cap="flat" cmpd="sng" algn="ctr">
+                      <a:solidFill>
+                        <a:srgbClr val="CCCCCC"/>
+                      </a:solidFill>
+                      <a:prstDash val="solid"/>
+                      <a:round/>
+                      <a:headEnd type="none" w="med" len="med"/>
+                      <a:tailEnd type="none" w="med" len="med"/>
+                    </a:lnT>
+                    <a:lnB w="6350" cap="flat" cmpd="sng" algn="ctr">
+                      <a:solidFill>
+                        <a:srgbClr val="CCCCCC"/>
+                      </a:solidFill>
+                      <a:prstDash val="solid"/>
+                      <a:round/>
+                      <a:headEnd type="none" w="med" len="med"/>
+                      <a:tailEnd type="none" w="med" len="med"/>
+                    </a:lnB>
+                    <a:solidFill>
+                      <a:srgbClr val="E8F5E9"/>
+                    </a:solidFill>
+                  </a:tcPr>
+                </a:tc>
+                <a:tc>
+                  <a:txBody>
+                    <a:bodyPr/>
+                    <a:lstStyle/>
+                    <a:p>
+                      <a:pPr indent="0" marL="0">
+                        <a:buNone/>
+                      </a:pPr>
+                      <a:r>
+                        <a:rPr lang="en-US" sz="900" dirty="0">
+                          <a:solidFill>
+                            <a:srgbClr val="000000"/>
+                          </a:solidFill>
+                          <a:latin typeface="Calibri" pitchFamily="34" charset="0"/>
+                          <a:ea typeface="Calibri" pitchFamily="34" charset="-122"/>
+                          <a:cs typeface="Calibri" pitchFamily="34" charset="-120"/>
+                        </a:rPr>
+                        <a:t>Nom de famille/scène</a:t>
+                      </a:r>
+                      <a:endParaRPr lang="en-US" sz="900" dirty="0">
+                        <a:latin typeface="Calibri" charset="0"/>
+                        <a:ea typeface="Calibri" charset="0"/>
+                        <a:cs typeface="Calibri" charset="0"/>
+                      </a:endParaRPr>
+                    </a:p>
+                  </a:txBody>
+                  <a:tcPr marL="91440" marR="91440" marT="45720" marB="45720">
+                    <a:lnL w="6350" cap="flat" cmpd="sng" algn="ctr">
+                      <a:solidFill>
+                        <a:srgbClr val="CCCCCC"/>
+                      </a:solidFill>
+                      <a:prstDash val="solid"/>
+                      <a:round/>
+                      <a:headEnd type="none" w="med" len="med"/>
+                      <a:tailEnd type="none" w="med" len="med"/>
+                    </a:lnL>
+                    <a:lnR w="6350" cap="flat" cmpd="sng" algn="ctr">
+                      <a:solidFill>
+                        <a:srgbClr val="CCCCCC"/>
+                      </a:solidFill>
+                      <a:prstDash val="solid"/>
+                      <a:round/>
+                      <a:headEnd type="none" w="med" len="med"/>
+                      <a:tailEnd type="none" w="med" len="med"/>
+                    </a:lnR>
+                    <a:lnT w="6350" cap="flat" cmpd="sng" algn="ctr">
+                      <a:solidFill>
+                        <a:srgbClr val="CCCCCC"/>
+                      </a:solidFill>
+                      <a:prstDash val="solid"/>
+                      <a:round/>
+                      <a:headEnd type="none" w="med" len="med"/>
+                      <a:tailEnd type="none" w="med" len="med"/>
+                    </a:lnT>
+                    <a:lnB w="6350" cap="flat" cmpd="sng" algn="ctr">
+                      <a:solidFill>
+                        <a:srgbClr val="CCCCCC"/>
+                      </a:solidFill>
+                      <a:prstDash val="solid"/>
+                      <a:round/>
+                      <a:headEnd type="none" w="med" len="med"/>
+                      <a:tailEnd type="none" w="med" len="med"/>
+                    </a:lnB>
+                    <a:solidFill>
+                      <a:srgbClr val="E8F5E9"/>
+                    </a:solidFill>
+                  </a:tcPr>
+                </a:tc>
+                <a:tc>
+                  <a:txBody>
+                    <a:bodyPr/>
+                    <a:lstStyle/>
+                    <a:p>
+                      <a:pPr indent="0" marL="0">
+                        <a:buNone/>
+                      </a:pPr>
+                      <a:r>
+                        <a:rPr lang="en-US" sz="900" dirty="0">
+                          <a:solidFill>
+                            <a:srgbClr val="000000"/>
+                          </a:solidFill>
+                          <a:latin typeface="Calibri" pitchFamily="34" charset="0"/>
+                          <a:ea typeface="Calibri" pitchFamily="34" charset="-122"/>
+                          <a:cs typeface="Calibri" pitchFamily="34" charset="-120"/>
+                        </a:rPr>
+                        <a:t>Élémentaire</a:t>
+                      </a:r>
+                      <a:endParaRPr lang="en-US" sz="900" dirty="0">
+                        <a:latin typeface="Calibri" charset="0"/>
+                        <a:ea typeface="Calibri" charset="0"/>
+                        <a:cs typeface="Calibri" charset="0"/>
+                      </a:endParaRPr>
+                    </a:p>
+                  </a:txBody>
+                  <a:tcPr marL="91440" marR="91440" marT="45720" marB="45720">
+                    <a:lnL w="6350" cap="flat" cmpd="sng" algn="ctr">
+                      <a:solidFill>
+                        <a:srgbClr val="CCCCCC"/>
+                      </a:solidFill>
+                      <a:prstDash val="solid"/>
+                      <a:round/>
+                      <a:headEnd type="none" w="med" len="med"/>
+                      <a:tailEnd type="none" w="med" len="med"/>
+                    </a:lnL>
+                    <a:lnR w="6350" cap="flat" cmpd="sng" algn="ctr">
+                      <a:solidFill>
+                        <a:srgbClr val="CCCCCC"/>
+                      </a:solidFill>
+                      <a:prstDash val="solid"/>
+                      <a:round/>
+                      <a:headEnd type="none" w="med" len="med"/>
+                      <a:tailEnd type="none" w="med" len="med"/>
+                    </a:lnR>
+                    <a:lnT w="6350" cap="flat" cmpd="sng" algn="ctr">
+                      <a:solidFill>
+                        <a:srgbClr val="CCCCCC"/>
+                      </a:solidFill>
+                      <a:prstDash val="solid"/>
+                      <a:round/>
+                      <a:headEnd type="none" w="med" len="med"/>
+                      <a:tailEnd type="none" w="med" len="med"/>
+                    </a:lnT>
+                    <a:lnB w="6350" cap="flat" cmpd="sng" algn="ctr">
+                      <a:solidFill>
+                        <a:srgbClr val="CCCCCC"/>
+                      </a:solidFill>
+                      <a:prstDash val="solid"/>
+                      <a:round/>
+                      <a:headEnd type="none" w="med" len="med"/>
+                      <a:tailEnd type="none" w="med" len="med"/>
+                    </a:lnB>
+                    <a:solidFill>
+                      <a:srgbClr val="E8F5E9"/>
+                    </a:solidFill>
+                  </a:tcPr>
+                </a:tc>
+                <a:tc>
+                  <a:txBody>
+                    <a:bodyPr/>
+                    <a:lstStyle/>
+                    <a:p>
+                      <a:pPr indent="0" marL="0">
+                        <a:buNone/>
+                      </a:pPr>
+                      <a:r>
+                        <a:rPr lang="en-US" sz="900" dirty="0">
+                          <a:solidFill>
+                            <a:srgbClr val="000000"/>
+                          </a:solidFill>
+                          <a:latin typeface="Calibri" pitchFamily="34" charset="0"/>
+                          <a:ea typeface="Calibri" pitchFamily="34" charset="-122"/>
+                          <a:cs typeface="Calibri" pitchFamily="34" charset="-120"/>
+                        </a:rPr>
+                        <a:t>Texte</a:t>
+                      </a:r>
+                      <a:endParaRPr lang="en-US" sz="900" dirty="0">
+                        <a:latin typeface="Calibri" charset="0"/>
+                        <a:ea typeface="Calibri" charset="0"/>
+                        <a:cs typeface="Calibri" charset="0"/>
+                      </a:endParaRPr>
+                    </a:p>
+                  </a:txBody>
+                  <a:tcPr marL="91440" marR="91440" marT="45720" marB="45720">
+                    <a:lnL w="6350" cap="flat" cmpd="sng" algn="ctr">
+                      <a:solidFill>
+                        <a:srgbClr val="CCCCCC"/>
+                      </a:solidFill>
+                      <a:prstDash val="solid"/>
+                      <a:round/>
+                      <a:headEnd type="none" w="med" len="med"/>
+                      <a:tailEnd type="none" w="med" len="med"/>
+                    </a:lnL>
+                    <a:lnR w="6350" cap="flat" cmpd="sng" algn="ctr">
+                      <a:solidFill>
+                        <a:srgbClr val="CCCCCC"/>
+                      </a:solidFill>
+                      <a:prstDash val="solid"/>
+                      <a:round/>
+                      <a:headEnd type="none" w="med" len="med"/>
+                      <a:tailEnd type="none" w="med" len="med"/>
+                    </a:lnR>
+                    <a:lnT w="6350" cap="flat" cmpd="sng" algn="ctr">
+                      <a:solidFill>
+                        <a:srgbClr val="CCCCCC"/>
+                      </a:solidFill>
+                      <a:prstDash val="solid"/>
+                      <a:round/>
+                      <a:headEnd type="none" w="med" len="med"/>
+                      <a:tailEnd type="none" w="med" len="med"/>
+                    </a:lnT>
+                    <a:lnB w="6350" cap="flat" cmpd="sng" algn="ctr">
+                      <a:solidFill>
+                        <a:srgbClr val="CCCCCC"/>
+                      </a:solidFill>
+                      <a:prstDash val="solid"/>
+                      <a:round/>
+                      <a:headEnd type="none" w="med" len="med"/>
+                      <a:tailEnd type="none" w="med" len="med"/>
+                    </a:lnB>
+                    <a:solidFill>
+                      <a:srgbClr val="E8F5E9"/>
+                    </a:solidFill>
+                  </a:tcPr>
+                </a:tc>
+                <a:tc>
+                  <a:txBody>
+                    <a:bodyPr/>
+                    <a:lstStyle/>
+                    <a:p>
+                      <a:pPr indent="0" marL="0">
+                        <a:buNone/>
+                      </a:pPr>
+                      <a:r>
+                        <a:rPr lang="en-US" sz="900" dirty="0">
+                          <a:solidFill>
+                            <a:srgbClr val="000000"/>
+                          </a:solidFill>
+                          <a:latin typeface="Calibri" pitchFamily="34" charset="0"/>
+                          <a:ea typeface="Calibri" pitchFamily="34" charset="-122"/>
+                          <a:cs typeface="Calibri" pitchFamily="34" charset="-120"/>
+                        </a:rPr>
+                        <a:t>100 car.</a:t>
+                      </a:r>
+                      <a:endParaRPr lang="en-US" sz="900" dirty="0">
+                        <a:latin typeface="Calibri" charset="0"/>
+                        <a:ea typeface="Calibri" charset="0"/>
+                        <a:cs typeface="Calibri" charset="0"/>
+                      </a:endParaRPr>
+                    </a:p>
+                  </a:txBody>
+                  <a:tcPr marL="91440" marR="91440" marT="45720" marB="45720">
+                    <a:lnL w="6350" cap="flat" cmpd="sng" algn="ctr">
+                      <a:solidFill>
+                        <a:srgbClr val="CCCCCC"/>
+                      </a:solidFill>
+                      <a:prstDash val="solid"/>
+                      <a:round/>
+                      <a:headEnd type="none" w="med" len="med"/>
+                      <a:tailEnd type="none" w="med" len="med"/>
+                    </a:lnL>
+                    <a:lnR w="6350" cap="flat" cmpd="sng" algn="ctr">
+                      <a:solidFill>
+                        <a:srgbClr val="CCCCCC"/>
+                      </a:solidFill>
+                      <a:prstDash val="solid"/>
+                      <a:round/>
+                      <a:headEnd type="none" w="med" len="med"/>
+                      <a:tailEnd type="none" w="med" len="med"/>
+                    </a:lnR>
+                    <a:lnT w="6350" cap="flat" cmpd="sng" algn="ctr">
+                      <a:solidFill>
+                        <a:srgbClr val="CCCCCC"/>
+                      </a:solidFill>
+                      <a:prstDash val="solid"/>
+                      <a:round/>
+                      <a:headEnd type="none" w="med" len="med"/>
+                      <a:tailEnd type="none" w="med" len="med"/>
+                    </a:lnT>
+                    <a:lnB w="6350" cap="flat" cmpd="sng" algn="ctr">
+                      <a:solidFill>
+                        <a:srgbClr val="CCCCCC"/>
+                      </a:solidFill>
+                      <a:prstDash val="solid"/>
+                      <a:round/>
+                      <a:headEnd type="none" w="med" len="med"/>
+                      <a:tailEnd type="none" w="med" len="med"/>
+                    </a:lnB>
+                    <a:solidFill>
+                      <a:srgbClr val="E8F5E9"/>
+                    </a:solidFill>
+                  </a:tcPr>
+                </a:tc>
+                <a:tc>
+                  <a:txBody>
+                    <a:bodyPr/>
+                    <a:lstStyle/>
+                    <a:p>
+                      <a:pPr indent="0" marL="0">
+                        <a:buNone/>
+                      </a:pPr>
+                      <a:r>
+                        <a:rPr lang="en-US" sz="900" dirty="0">
+                          <a:solidFill>
+                            <a:srgbClr val="000000"/>
+                          </a:solidFill>
+                          <a:latin typeface="Calibri" pitchFamily="34" charset="0"/>
+                          <a:ea typeface="Calibri" pitchFamily="34" charset="-122"/>
+                          <a:cs typeface="Calibri" pitchFamily="34" charset="-120"/>
+                        </a:rPr>
+                        <a:t>Obligatoire</a:t>
+                      </a:r>
+                      <a:endParaRPr lang="en-US" sz="900" dirty="0">
+                        <a:latin typeface="Calibri" charset="0"/>
+                        <a:ea typeface="Calibri" charset="0"/>
+                        <a:cs typeface="Calibri" charset="0"/>
+                      </a:endParaRPr>
+                    </a:p>
+                  </a:txBody>
+                  <a:tcPr marL="91440" marR="91440" marT="45720" marB="45720">
+                    <a:lnL w="6350" cap="flat" cmpd="sng" algn="ctr">
+                      <a:solidFill>
+                        <a:srgbClr val="CCCCCC"/>
+                      </a:solidFill>
+                      <a:prstDash val="solid"/>
+                      <a:round/>
+                      <a:headEnd type="none" w="med" len="med"/>
+                      <a:tailEnd type="none" w="med" len="med"/>
+                    </a:lnL>
+                    <a:lnR w="6350" cap="flat" cmpd="sng" algn="ctr">
+                      <a:solidFill>
+                        <a:srgbClr val="CCCCCC"/>
+                      </a:solidFill>
+                      <a:prstDash val="solid"/>
+                      <a:round/>
+                      <a:headEnd type="none" w="med" len="med"/>
+                      <a:tailEnd type="none" w="med" len="med"/>
+                    </a:lnR>
+                    <a:lnT w="6350" cap="flat" cmpd="sng" algn="ctr">
+                      <a:solidFill>
+                        <a:srgbClr val="CCCCCC"/>
+                      </a:solidFill>
+                      <a:prstDash val="solid"/>
+                      <a:round/>
+                      <a:headEnd type="none" w="med" len="med"/>
+                      <a:tailEnd type="none" w="med" len="med"/>
+                    </a:lnT>
+                    <a:lnB w="6350" cap="flat" cmpd="sng" algn="ctr">
+                      <a:solidFill>
+                        <a:srgbClr val="CCCCCC"/>
+                      </a:solidFill>
+                      <a:prstDash val="solid"/>
+                      <a:round/>
+                      <a:headEnd type="none" w="med" len="med"/>
+                      <a:tailEnd type="none" w="med" len="med"/>
+                    </a:lnB>
+                    <a:solidFill>
+                      <a:srgbClr val="E8F5E9"/>
+                    </a:solidFill>
+                  </a:tcPr>
+                </a:tc>
+              </a:tr>
+              <a:tr h="0">
+                <a:tc>
+                  <a:txBody>
+                    <a:bodyPr/>
+                    <a:lstStyle/>
+                    <a:p>
+                      <a:pPr indent="0" marL="0">
+                        <a:buNone/>
+                      </a:pPr>
+                      <a:r>
+                        <a:rPr lang="en-US" sz="900" dirty="0">
+                          <a:solidFill>
+                            <a:srgbClr val="000000"/>
+                          </a:solidFill>
+                          <a:latin typeface="Calibri" pitchFamily="34" charset="0"/>
+                          <a:ea typeface="Calibri" pitchFamily="34" charset="-122"/>
+                          <a:cs typeface="Calibri" pitchFamily="34" charset="-120"/>
+                        </a:rPr>
+                        <a:t>prenom_artiste</a:t>
+                      </a:r>
+                      <a:endParaRPr lang="en-US" sz="900" dirty="0">
+                        <a:latin typeface="Calibri" charset="0"/>
+                        <a:ea typeface="Calibri" charset="0"/>
+                        <a:cs typeface="Calibri" charset="0"/>
+                      </a:endParaRPr>
+                    </a:p>
+                  </a:txBody>
+                  <a:tcPr marL="91440" marR="91440" marT="45720" marB="45720">
+                    <a:lnL w="6350" cap="flat" cmpd="sng" algn="ctr">
+                      <a:solidFill>
+                        <a:srgbClr val="CCCCCC"/>
+                      </a:solidFill>
+                      <a:prstDash val="solid"/>
+                      <a:round/>
+                      <a:headEnd type="none" w="med" len="med"/>
+                      <a:tailEnd type="none" w="med" len="med"/>
+                    </a:lnL>
+                    <a:lnR w="6350" cap="flat" cmpd="sng" algn="ctr">
+                      <a:solidFill>
+                        <a:srgbClr val="CCCCCC"/>
+                      </a:solidFill>
+                      <a:prstDash val="solid"/>
+                      <a:round/>
+                      <a:headEnd type="none" w="med" len="med"/>
+                      <a:tailEnd type="none" w="med" len="med"/>
+                    </a:lnR>
+                    <a:lnT w="6350" cap="flat" cmpd="sng" algn="ctr">
+                      <a:solidFill>
+                        <a:srgbClr val="CCCCCC"/>
+                      </a:solidFill>
+                      <a:prstDash val="solid"/>
+                      <a:round/>
+                      <a:headEnd type="none" w="med" len="med"/>
+                      <a:tailEnd type="none" w="med" len="med"/>
+                    </a:lnT>
+                    <a:lnB w="6350" cap="flat" cmpd="sng" algn="ctr">
+                      <a:solidFill>
+                        <a:srgbClr val="CCCCCC"/>
+                      </a:solidFill>
+                      <a:prstDash val="solid"/>
+                      <a:round/>
+                      <a:headEnd type="none" w="med" len="med"/>
+                      <a:tailEnd type="none" w="med" len="med"/>
+                    </a:lnB>
+                    <a:solidFill>
+                      <a:srgbClr val="FFFFFF"/>
+                    </a:solidFill>
+                  </a:tcPr>
+                </a:tc>
+                <a:tc>
+                  <a:txBody>
+                    <a:bodyPr/>
+                    <a:lstStyle/>
+                    <a:p>
+                      <a:pPr indent="0" marL="0">
+                        <a:buNone/>
+                      </a:pPr>
+                      <a:r>
+                        <a:rPr lang="en-US" sz="900" dirty="0">
+                          <a:solidFill>
+                            <a:srgbClr val="000000"/>
+                          </a:solidFill>
+                          <a:latin typeface="Calibri" pitchFamily="34" charset="0"/>
+                          <a:ea typeface="Calibri" pitchFamily="34" charset="-122"/>
+                          <a:cs typeface="Calibri" pitchFamily="34" charset="-120"/>
+                        </a:rPr>
+                        <a:t>Prénom</a:t>
+                      </a:r>
+                      <a:endParaRPr lang="en-US" sz="900" dirty="0">
+                        <a:latin typeface="Calibri" charset="0"/>
+                        <a:ea typeface="Calibri" charset="0"/>
+                        <a:cs typeface="Calibri" charset="0"/>
+                      </a:endParaRPr>
+                    </a:p>
+                  </a:txBody>
+                  <a:tcPr marL="91440" marR="91440" marT="45720" marB="45720">
+                    <a:lnL w="6350" cap="flat" cmpd="sng" algn="ctr">
+                      <a:solidFill>
+                        <a:srgbClr val="CCCCCC"/>
+                      </a:solidFill>
+                      <a:prstDash val="solid"/>
+                      <a:round/>
+                      <a:headEnd type="none" w="med" len="med"/>
+                      <a:tailEnd type="none" w="med" len="med"/>
+                    </a:lnL>
+                    <a:lnR w="6350" cap="flat" cmpd="sng" algn="ctr">
+                      <a:solidFill>
+                        <a:srgbClr val="CCCCCC"/>
+                      </a:solidFill>
+                      <a:prstDash val="solid"/>
+                      <a:round/>
+                      <a:headEnd type="none" w="med" len="med"/>
+                      <a:tailEnd type="none" w="med" len="med"/>
+                    </a:lnR>
+                    <a:lnT w="6350" cap="flat" cmpd="sng" algn="ctr">
+                      <a:solidFill>
+                        <a:srgbClr val="CCCCCC"/>
+                      </a:solidFill>
+                      <a:prstDash val="solid"/>
+                      <a:round/>
+                      <a:headEnd type="none" w="med" len="med"/>
+                      <a:tailEnd type="none" w="med" len="med"/>
+                    </a:lnT>
+                    <a:lnB w="6350" cap="flat" cmpd="sng" algn="ctr">
+                      <a:solidFill>
+                        <a:srgbClr val="CCCCCC"/>
+                      </a:solidFill>
+                      <a:prstDash val="solid"/>
+                      <a:round/>
+                      <a:headEnd type="none" w="med" len="med"/>
+                      <a:tailEnd type="none" w="med" len="med"/>
+                    </a:lnB>
+                    <a:solidFill>
+                      <a:srgbClr val="FFFFFF"/>
+                    </a:solidFill>
+                  </a:tcPr>
+                </a:tc>
+                <a:tc>
+                  <a:txBody>
+                    <a:bodyPr/>
+                    <a:lstStyle/>
+                    <a:p>
+                      <a:pPr indent="0" marL="0">
+                        <a:buNone/>
+                      </a:pPr>
+                      <a:r>
+                        <a:rPr lang="en-US" sz="900" dirty="0">
+                          <a:solidFill>
+                            <a:srgbClr val="000000"/>
+                          </a:solidFill>
+                          <a:latin typeface="Calibri" pitchFamily="34" charset="0"/>
+                          <a:ea typeface="Calibri" pitchFamily="34" charset="-122"/>
+                          <a:cs typeface="Calibri" pitchFamily="34" charset="-120"/>
+                        </a:rPr>
+                        <a:t>Élémentaire</a:t>
+                      </a:r>
+                      <a:endParaRPr lang="en-US" sz="900" dirty="0">
+                        <a:latin typeface="Calibri" charset="0"/>
+                        <a:ea typeface="Calibri" charset="0"/>
+                        <a:cs typeface="Calibri" charset="0"/>
+                      </a:endParaRPr>
+                    </a:p>
+                  </a:txBody>
+                  <a:tcPr marL="91440" marR="91440" marT="45720" marB="45720">
+                    <a:lnL w="6350" cap="flat" cmpd="sng" algn="ctr">
+                      <a:solidFill>
+                        <a:srgbClr val="CCCCCC"/>
+                      </a:solidFill>
+                      <a:prstDash val="solid"/>
+                      <a:round/>
+                      <a:headEnd type="none" w="med" len="med"/>
+                      <a:tailEnd type="none" w="med" len="med"/>
+                    </a:lnL>
+                    <a:lnR w="6350" cap="flat" cmpd="sng" algn="ctr">
+                      <a:solidFill>
+                        <a:srgbClr val="CCCCCC"/>
+                      </a:solidFill>
+                      <a:prstDash val="solid"/>
+                      <a:round/>
+                      <a:headEnd type="none" w="med" len="med"/>
+                      <a:tailEnd type="none" w="med" len="med"/>
+                    </a:lnR>
+                    <a:lnT w="6350" cap="flat" cmpd="sng" algn="ctr">
+                      <a:solidFill>
+                        <a:srgbClr val="CCCCCC"/>
+                      </a:solidFill>
+                      <a:prstDash val="solid"/>
+                      <a:round/>
+                      <a:headEnd type="none" w="med" len="med"/>
+                      <a:tailEnd type="none" w="med" len="med"/>
+                    </a:lnT>
+                    <a:lnB w="6350" cap="flat" cmpd="sng" algn="ctr">
+                      <a:solidFill>
+                        <a:srgbClr val="CCCCCC"/>
+                      </a:solidFill>
+                      <a:prstDash val="solid"/>
+                      <a:round/>
+                      <a:headEnd type="none" w="med" len="med"/>
+                      <a:tailEnd type="none" w="med" len="med"/>
+                    </a:lnB>
+                    <a:solidFill>
+                      <a:srgbClr val="FFFFFF"/>
+                    </a:solidFill>
+                  </a:tcPr>
+                </a:tc>
+                <a:tc>
+                  <a:txBody>
+                    <a:bodyPr/>
+                    <a:lstStyle/>
+                    <a:p>
+                      <a:pPr indent="0" marL="0">
+                        <a:buNone/>
+                      </a:pPr>
+                      <a:r>
+                        <a:rPr lang="en-US" sz="900" dirty="0">
+                          <a:solidFill>
+                            <a:srgbClr val="000000"/>
+                          </a:solidFill>
+                          <a:latin typeface="Calibri" pitchFamily="34" charset="0"/>
+                          <a:ea typeface="Calibri" pitchFamily="34" charset="-122"/>
+                          <a:cs typeface="Calibri" pitchFamily="34" charset="-120"/>
+                        </a:rPr>
+                        <a:t>Texte</a:t>
+                      </a:r>
+                      <a:endParaRPr lang="en-US" sz="900" dirty="0">
+                        <a:latin typeface="Calibri" charset="0"/>
+                        <a:ea typeface="Calibri" charset="0"/>
+                        <a:cs typeface="Calibri" charset="0"/>
+                      </a:endParaRPr>
+                    </a:p>
+                  </a:txBody>
+                  <a:tcPr marL="91440" marR="91440" marT="45720" marB="45720">
+                    <a:lnL w="6350" cap="flat" cmpd="sng" algn="ctr">
+                      <a:solidFill>
+                        <a:srgbClr val="CCCCCC"/>
+                      </a:solidFill>
+                      <a:prstDash val="solid"/>
+                      <a:round/>
+                      <a:headEnd type="none" w="med" len="med"/>
+                      <a:tailEnd type="none" w="med" len="med"/>
+                    </a:lnL>
+                    <a:lnR w="6350" cap="flat" cmpd="sng" algn="ctr">
+                      <a:solidFill>
+                        <a:srgbClr val="CCCCCC"/>
+                      </a:solidFill>
+                      <a:prstDash val="solid"/>
+                      <a:round/>
+                      <a:headEnd type="none" w="med" len="med"/>
+                      <a:tailEnd type="none" w="med" len="med"/>
+                    </a:lnR>
+                    <a:lnT w="6350" cap="flat" cmpd="sng" algn="ctr">
+                      <a:solidFill>
+                        <a:srgbClr val="CCCCCC"/>
+                      </a:solidFill>
+                      <a:prstDash val="solid"/>
+                      <a:round/>
+                      <a:headEnd type="none" w="med" len="med"/>
+                      <a:tailEnd type="none" w="med" len="med"/>
+                    </a:lnT>
+                    <a:lnB w="6350" cap="flat" cmpd="sng" algn="ctr">
+                      <a:solidFill>
+                        <a:srgbClr val="CCCCCC"/>
+                      </a:solidFill>
+                      <a:prstDash val="solid"/>
+                      <a:round/>
+                      <a:headEnd type="none" w="med" len="med"/>
+                      <a:tailEnd type="none" w="med" len="med"/>
+                    </a:lnB>
+                    <a:solidFill>
+                      <a:srgbClr val="FFFFFF"/>
+                    </a:solidFill>
+                  </a:tcPr>
+                </a:tc>
+                <a:tc>
+                  <a:txBody>
+                    <a:bodyPr/>
+                    <a:lstStyle/>
+                    <a:p>
+                      <a:pPr indent="0" marL="0">
+                        <a:buNone/>
+                      </a:pPr>
+                      <a:r>
+                        <a:rPr lang="en-US" sz="900" dirty="0">
+                          <a:solidFill>
+                            <a:srgbClr val="000000"/>
+                          </a:solidFill>
+                          <a:latin typeface="Calibri" pitchFamily="34" charset="0"/>
+                          <a:ea typeface="Calibri" pitchFamily="34" charset="-122"/>
+                          <a:cs typeface="Calibri" pitchFamily="34" charset="-120"/>
+                        </a:rPr>
+                        <a:t>100 car.</a:t>
+                      </a:r>
+                      <a:endParaRPr lang="en-US" sz="900" dirty="0">
+                        <a:latin typeface="Calibri" charset="0"/>
+                        <a:ea typeface="Calibri" charset="0"/>
+                        <a:cs typeface="Calibri" charset="0"/>
+                      </a:endParaRPr>
+                    </a:p>
+                  </a:txBody>
+                  <a:tcPr marL="91440" marR="91440" marT="45720" marB="45720">
+                    <a:lnL w="6350" cap="flat" cmpd="sng" algn="ctr">
+                      <a:solidFill>
+                        <a:srgbClr val="CCCCCC"/>
+                      </a:solidFill>
+                      <a:prstDash val="solid"/>
+                      <a:round/>
+                      <a:headEnd type="none" w="med" len="med"/>
+                      <a:tailEnd type="none" w="med" len="med"/>
+                    </a:lnL>
+                    <a:lnR w="6350" cap="flat" cmpd="sng" algn="ctr">
+                      <a:solidFill>
+                        <a:srgbClr val="CCCCCC"/>
+                      </a:solidFill>
+                      <a:prstDash val="solid"/>
+                      <a:round/>
+                      <a:headEnd type="none" w="med" len="med"/>
+                      <a:tailEnd type="none" w="med" len="med"/>
+                    </a:lnR>
+                    <a:lnT w="6350" cap="flat" cmpd="sng" algn="ctr">
+                      <a:solidFill>
+                        <a:srgbClr val="CCCCCC"/>
+                      </a:solidFill>
+                      <a:prstDash val="solid"/>
+                      <a:round/>
+                      <a:headEnd type="none" w="med" len="med"/>
+                      <a:tailEnd type="none" w="med" len="med"/>
+                    </a:lnT>
+                    <a:lnB w="6350" cap="flat" cmpd="sng" algn="ctr">
+                      <a:solidFill>
+                        <a:srgbClr val="CCCCCC"/>
+                      </a:solidFill>
+                      <a:prstDash val="solid"/>
+                      <a:round/>
+                      <a:headEnd type="none" w="med" len="med"/>
+                      <a:tailEnd type="none" w="med" len="med"/>
+                    </a:lnB>
+                    <a:solidFill>
+                      <a:srgbClr val="FFFFFF"/>
+                    </a:solidFill>
+                  </a:tcPr>
+                </a:tc>
+                <a:tc>
+                  <a:txBody>
+                    <a:bodyPr/>
+                    <a:lstStyle/>
+                    <a:p>
+                      <a:pPr indent="0" marL="0">
+                        <a:buNone/>
+                      </a:pPr>
+                      <a:r>
+                        <a:rPr lang="en-US" sz="900" dirty="0">
+                          <a:solidFill>
+                            <a:srgbClr val="000000"/>
+                          </a:solidFill>
+                          <a:latin typeface="Calibri" pitchFamily="34" charset="0"/>
+                          <a:ea typeface="Calibri" pitchFamily="34" charset="-122"/>
+                          <a:cs typeface="Calibri" pitchFamily="34" charset="-120"/>
+                        </a:rPr>
+                        <a:t>NULL si groupe</a:t>
+                      </a:r>
+                      <a:endParaRPr lang="en-US" sz="900" dirty="0">
+                        <a:latin typeface="Calibri" charset="0"/>
+                        <a:ea typeface="Calibri" charset="0"/>
+                        <a:cs typeface="Calibri" charset="0"/>
+                      </a:endParaRPr>
+                    </a:p>
+                  </a:txBody>
+                  <a:tcPr marL="91440" marR="91440" marT="45720" marB="45720">
+                    <a:lnL w="6350" cap="flat" cmpd="sng" algn="ctr">
+                      <a:solidFill>
+                        <a:srgbClr val="CCCCCC"/>
+                      </a:solidFill>
+                      <a:prstDash val="solid"/>
+                      <a:round/>
+                      <a:headEnd type="none" w="med" len="med"/>
+                      <a:tailEnd type="none" w="med" len="med"/>
+                    </a:lnL>
+                    <a:lnR w="6350" cap="flat" cmpd="sng" algn="ctr">
+                      <a:solidFill>
+                        <a:srgbClr val="CCCCCC"/>
+                      </a:solidFill>
+                      <a:prstDash val="solid"/>
+                      <a:round/>
+                      <a:headEnd type="none" w="med" len="med"/>
+                      <a:tailEnd type="none" w="med" len="med"/>
+                    </a:lnR>
+                    <a:lnT w="6350" cap="flat" cmpd="sng" algn="ctr">
+                      <a:solidFill>
+                        <a:srgbClr val="CCCCCC"/>
+                      </a:solidFill>
+                      <a:prstDash val="solid"/>
+                      <a:round/>
+                      <a:headEnd type="none" w="med" len="med"/>
+                      <a:tailEnd type="none" w="med" len="med"/>
+                    </a:lnT>
+                    <a:lnB w="6350" cap="flat" cmpd="sng" algn="ctr">
+                      <a:solidFill>
+                        <a:srgbClr val="CCCCCC"/>
+                      </a:solidFill>
+                      <a:prstDash val="solid"/>
+                      <a:round/>
+                      <a:headEnd type="none" w="med" len="med"/>
+                      <a:tailEnd type="none" w="med" len="med"/>
+                    </a:lnB>
+                    <a:solidFill>
+                      <a:srgbClr val="FFFFFF"/>
+                    </a:solidFill>
+                  </a:tcPr>
+                </a:tc>
+              </a:tr>
+              <a:tr h="0">
+                <a:tc>
+                  <a:txBody>
+                    <a:bodyPr/>
+                    <a:lstStyle/>
+                    <a:p>
+                      <a:pPr indent="0" marL="0">
+                        <a:buNone/>
+                      </a:pPr>
+                      <a:r>
+                        <a:rPr lang="en-US" sz="900" dirty="0">
+                          <a:solidFill>
+                            <a:srgbClr val="000000"/>
+                          </a:solidFill>
+                          <a:latin typeface="Calibri" pitchFamily="34" charset="0"/>
+                          <a:ea typeface="Calibri" pitchFamily="34" charset="-122"/>
+                          <a:cs typeface="Calibri" pitchFamily="34" charset="-120"/>
+                        </a:rPr>
+                        <a:t>email_artiste</a:t>
+                      </a:r>
+                      <a:endParaRPr lang="en-US" sz="900" dirty="0">
+                        <a:latin typeface="Calibri" charset="0"/>
+                        <a:ea typeface="Calibri" charset="0"/>
+                        <a:cs typeface="Calibri" charset="0"/>
+                      </a:endParaRPr>
+                    </a:p>
+                  </a:txBody>
+                  <a:tcPr marL="91440" marR="91440" marT="45720" marB="45720">
+                    <a:lnL w="6350" cap="flat" cmpd="sng" algn="ctr">
+                      <a:solidFill>
+                        <a:srgbClr val="CCCCCC"/>
+                      </a:solidFill>
+                      <a:prstDash val="solid"/>
+                      <a:round/>
+                      <a:headEnd type="none" w="med" len="med"/>
+                      <a:tailEnd type="none" w="med" len="med"/>
+                    </a:lnL>
+                    <a:lnR w="6350" cap="flat" cmpd="sng" algn="ctr">
+                      <a:solidFill>
+                        <a:srgbClr val="CCCCCC"/>
+                      </a:solidFill>
+                      <a:prstDash val="solid"/>
+                      <a:round/>
+                      <a:headEnd type="none" w="med" len="med"/>
+                      <a:tailEnd type="none" w="med" len="med"/>
+                    </a:lnR>
+                    <a:lnT w="6350" cap="flat" cmpd="sng" algn="ctr">
+                      <a:solidFill>
+                        <a:srgbClr val="CCCCCC"/>
+                      </a:solidFill>
+                      <a:prstDash val="solid"/>
+                      <a:round/>
+                      <a:headEnd type="none" w="med" len="med"/>
+                      <a:tailEnd type="none" w="med" len="med"/>
+                    </a:lnT>
+                    <a:lnB w="6350" cap="flat" cmpd="sng" algn="ctr">
+                      <a:solidFill>
+                        <a:srgbClr val="CCCCCC"/>
+                      </a:solidFill>
+                      <a:prstDash val="solid"/>
+                      <a:round/>
+                      <a:headEnd type="none" w="med" len="med"/>
+                      <a:tailEnd type="none" w="med" len="med"/>
+                    </a:lnB>
+                    <a:solidFill>
+                      <a:srgbClr val="E8F5E9"/>
+                    </a:solidFill>
+                  </a:tcPr>
+                </a:tc>
+                <a:tc>
+                  <a:txBody>
+                    <a:bodyPr/>
+                    <a:lstStyle/>
+                    <a:p>
+                      <a:pPr indent="0" marL="0">
+                        <a:buNone/>
+                      </a:pPr>
+                      <a:r>
+                        <a:rPr lang="en-US" sz="900" dirty="0">
+                          <a:solidFill>
+                            <a:srgbClr val="000000"/>
+                          </a:solidFill>
+                          <a:latin typeface="Calibri" pitchFamily="34" charset="0"/>
+                          <a:ea typeface="Calibri" pitchFamily="34" charset="-122"/>
+                          <a:cs typeface="Calibri" pitchFamily="34" charset="-120"/>
+                        </a:rPr>
+                        <a:t>Email de contact</a:t>
+                      </a:r>
+                      <a:endParaRPr lang="en-US" sz="900" dirty="0">
+                        <a:latin typeface="Calibri" charset="0"/>
+                        <a:ea typeface="Calibri" charset="0"/>
+                        <a:cs typeface="Calibri" charset="0"/>
+                      </a:endParaRPr>
+                    </a:p>
+                  </a:txBody>
+                  <a:tcPr marL="91440" marR="91440" marT="45720" marB="45720">
+                    <a:lnL w="6350" cap="flat" cmpd="sng" algn="ctr">
+                      <a:solidFill>
+                        <a:srgbClr val="CCCCCC"/>
+                      </a:solidFill>
+                      <a:prstDash val="solid"/>
+                      <a:round/>
+                      <a:headEnd type="none" w="med" len="med"/>
+                      <a:tailEnd type="none" w="med" len="med"/>
+                    </a:lnL>
+                    <a:lnR w="6350" cap="flat" cmpd="sng" algn="ctr">
+                      <a:solidFill>
+                        <a:srgbClr val="CCCCCC"/>
+                      </a:solidFill>
+                      <a:prstDash val="solid"/>
+                      <a:round/>
+                      <a:headEnd type="none" w="med" len="med"/>
+                      <a:tailEnd type="none" w="med" len="med"/>
+                    </a:lnR>
+                    <a:lnT w="6350" cap="flat" cmpd="sng" algn="ctr">
+                      <a:solidFill>
+                        <a:srgbClr val="CCCCCC"/>
+                      </a:solidFill>
+                      <a:prstDash val="solid"/>
+                      <a:round/>
+                      <a:headEnd type="none" w="med" len="med"/>
+                      <a:tailEnd type="none" w="med" len="med"/>
+                    </a:lnT>
+                    <a:lnB w="6350" cap="flat" cmpd="sng" algn="ctr">
+                      <a:solidFill>
+                        <a:srgbClr val="CCCCCC"/>
+                      </a:solidFill>
+                      <a:prstDash val="solid"/>
+                      <a:round/>
+                      <a:headEnd type="none" w="med" len="med"/>
+                      <a:tailEnd type="none" w="med" len="med"/>
+                    </a:lnB>
+                    <a:solidFill>
+                      <a:srgbClr val="E8F5E9"/>
+                    </a:solidFill>
+                  </a:tcPr>
+                </a:tc>
+                <a:tc>
+                  <a:txBody>
+                    <a:bodyPr/>
+                    <a:lstStyle/>
+                    <a:p>
+                      <a:pPr indent="0" marL="0">
+                        <a:buNone/>
+                      </a:pPr>
+                      <a:r>
+                        <a:rPr lang="en-US" sz="900" dirty="0">
+                          <a:solidFill>
+                            <a:srgbClr val="000000"/>
+                          </a:solidFill>
+                          <a:latin typeface="Calibri" pitchFamily="34" charset="0"/>
+                          <a:ea typeface="Calibri" pitchFamily="34" charset="-122"/>
+                          <a:cs typeface="Calibri" pitchFamily="34" charset="-120"/>
+                        </a:rPr>
+                        <a:t>Élémentaire</a:t>
+                      </a:r>
+                      <a:endParaRPr lang="en-US" sz="900" dirty="0">
+                        <a:latin typeface="Calibri" charset="0"/>
+                        <a:ea typeface="Calibri" charset="0"/>
+                        <a:cs typeface="Calibri" charset="0"/>
+                      </a:endParaRPr>
+                    </a:p>
+                  </a:txBody>
+                  <a:tcPr marL="91440" marR="91440" marT="45720" marB="45720">
+                    <a:lnL w="6350" cap="flat" cmpd="sng" algn="ctr">
+                      <a:solidFill>
+                        <a:srgbClr val="CCCCCC"/>
+                      </a:solidFill>
+                      <a:prstDash val="solid"/>
+                      <a:round/>
+                      <a:headEnd type="none" w="med" len="med"/>
+                      <a:tailEnd type="none" w="med" len="med"/>
+                    </a:lnL>
+                    <a:lnR w="6350" cap="flat" cmpd="sng" algn="ctr">
+                      <a:solidFill>
+                        <a:srgbClr val="CCCCCC"/>
+                      </a:solidFill>
+                      <a:prstDash val="solid"/>
+                      <a:round/>
+                      <a:headEnd type="none" w="med" len="med"/>
+                      <a:tailEnd type="none" w="med" len="med"/>
+                    </a:lnR>
+                    <a:lnT w="6350" cap="flat" cmpd="sng" algn="ctr">
+                      <a:solidFill>
+                        <a:srgbClr val="CCCCCC"/>
+                      </a:solidFill>
+                      <a:prstDash val="solid"/>
+                      <a:round/>
+                      <a:headEnd type="none" w="med" len="med"/>
+                      <a:tailEnd type="none" w="med" len="med"/>
+                    </a:lnT>
+                    <a:lnB w="6350" cap="flat" cmpd="sng" algn="ctr">
+                      <a:solidFill>
+                        <a:srgbClr val="CCCCCC"/>
+                      </a:solidFill>
+                      <a:prstDash val="solid"/>
+                      <a:round/>
+                      <a:headEnd type="none" w="med" len="med"/>
+                      <a:tailEnd type="none" w="med" len="med"/>
+                    </a:lnB>
+                    <a:solidFill>
+                      <a:srgbClr val="E8F5E9"/>
+                    </a:solidFill>
+                  </a:tcPr>
+                </a:tc>
+                <a:tc>
+                  <a:txBody>
+                    <a:bodyPr/>
+                    <a:lstStyle/>
+                    <a:p>
+                      <a:pPr indent="0" marL="0">
+                        <a:buNone/>
+                      </a:pPr>
+                      <a:r>
+                        <a:rPr lang="en-US" sz="900" dirty="0">
+                          <a:solidFill>
+                            <a:srgbClr val="000000"/>
+                          </a:solidFill>
+                          <a:latin typeface="Calibri" pitchFamily="34" charset="0"/>
+                          <a:ea typeface="Calibri" pitchFamily="34" charset="-122"/>
+                          <a:cs typeface="Calibri" pitchFamily="34" charset="-120"/>
+                        </a:rPr>
+                        <a:t>Texte</a:t>
+                      </a:r>
+                      <a:endParaRPr lang="en-US" sz="900" dirty="0">
+                        <a:latin typeface="Calibri" charset="0"/>
+                        <a:ea typeface="Calibri" charset="0"/>
+                        <a:cs typeface="Calibri" charset="0"/>
+                      </a:endParaRPr>
+                    </a:p>
+                  </a:txBody>
+                  <a:tcPr marL="91440" marR="91440" marT="45720" marB="45720">
+                    <a:lnL w="6350" cap="flat" cmpd="sng" algn="ctr">
+                      <a:solidFill>
+                        <a:srgbClr val="CCCCCC"/>
+                      </a:solidFill>
+                      <a:prstDash val="solid"/>
+                      <a:round/>
+                      <a:headEnd type="none" w="med" len="med"/>
+                      <a:tailEnd type="none" w="med" len="med"/>
+                    </a:lnL>
+                    <a:lnR w="6350" cap="flat" cmpd="sng" algn="ctr">
+                      <a:solidFill>
+                        <a:srgbClr val="CCCCCC"/>
+                      </a:solidFill>
+                      <a:prstDash val="solid"/>
+                      <a:round/>
+                      <a:headEnd type="none" w="med" len="med"/>
+                      <a:tailEnd type="none" w="med" len="med"/>
+                    </a:lnR>
+                    <a:lnT w="6350" cap="flat" cmpd="sng" algn="ctr">
+                      <a:solidFill>
+                        <a:srgbClr val="CCCCCC"/>
+                      </a:solidFill>
+                      <a:prstDash val="solid"/>
+                      <a:round/>
+                      <a:headEnd type="none" w="med" len="med"/>
+                      <a:tailEnd type="none" w="med" len="med"/>
+                    </a:lnT>
+                    <a:lnB w="6350" cap="flat" cmpd="sng" algn="ctr">
+                      <a:solidFill>
+                        <a:srgbClr val="CCCCCC"/>
+                      </a:solidFill>
+                      <a:prstDash val="solid"/>
+                      <a:round/>
+                      <a:headEnd type="none" w="med" len="med"/>
+                      <a:tailEnd type="none" w="med" len="med"/>
+                    </a:lnB>
+                    <a:solidFill>
+                      <a:srgbClr val="E8F5E9"/>
+                    </a:solidFill>
+                  </a:tcPr>
+                </a:tc>
+                <a:tc>
+                  <a:txBody>
+                    <a:bodyPr/>
+                    <a:lstStyle/>
+                    <a:p>
+                      <a:pPr indent="0" marL="0">
+                        <a:buNone/>
+                      </a:pPr>
+                      <a:r>
+                        <a:rPr lang="en-US" sz="900" dirty="0">
+                          <a:solidFill>
+                            <a:srgbClr val="000000"/>
+                          </a:solidFill>
+                          <a:latin typeface="Calibri" pitchFamily="34" charset="0"/>
+                          <a:ea typeface="Calibri" pitchFamily="34" charset="-122"/>
+                          <a:cs typeface="Calibri" pitchFamily="34" charset="-120"/>
+                        </a:rPr>
+                        <a:t>150 car.</a:t>
+                      </a:r>
+                      <a:endParaRPr lang="en-US" sz="900" dirty="0">
+                        <a:latin typeface="Calibri" charset="0"/>
+                        <a:ea typeface="Calibri" charset="0"/>
+                        <a:cs typeface="Calibri" charset="0"/>
+                      </a:endParaRPr>
+                    </a:p>
+                  </a:txBody>
+                  <a:tcPr marL="91440" marR="91440" marT="45720" marB="45720">
+                    <a:lnL w="6350" cap="flat" cmpd="sng" algn="ctr">
+                      <a:solidFill>
+                        <a:srgbClr val="CCCCCC"/>
+                      </a:solidFill>
+                      <a:prstDash val="solid"/>
+                      <a:round/>
+                      <a:headEnd type="none" w="med" len="med"/>
+                      <a:tailEnd type="none" w="med" len="med"/>
+                    </a:lnL>
+                    <a:lnR w="6350" cap="flat" cmpd="sng" algn="ctr">
+                      <a:solidFill>
+                        <a:srgbClr val="CCCCCC"/>
+                      </a:solidFill>
+                      <a:prstDash val="solid"/>
+                      <a:round/>
+                      <a:headEnd type="none" w="med" len="med"/>
+                      <a:tailEnd type="none" w="med" len="med"/>
+                    </a:lnR>
+                    <a:lnT w="6350" cap="flat" cmpd="sng" algn="ctr">
+                      <a:solidFill>
+                        <a:srgbClr val="CCCCCC"/>
+                      </a:solidFill>
+                      <a:prstDash val="solid"/>
+                      <a:round/>
+                      <a:headEnd type="none" w="med" len="med"/>
+                      <a:tailEnd type="none" w="med" len="med"/>
+                    </a:lnT>
+                    <a:lnB w="6350" cap="flat" cmpd="sng" algn="ctr">
+                      <a:solidFill>
+                        <a:srgbClr val="CCCCCC"/>
+                      </a:solidFill>
+                      <a:prstDash val="solid"/>
+                      <a:round/>
+                      <a:headEnd type="none" w="med" len="med"/>
+                      <a:tailEnd type="none" w="med" len="med"/>
+                    </a:lnB>
+                    <a:solidFill>
+                      <a:srgbClr val="E8F5E9"/>
+                    </a:solidFill>
+                  </a:tcPr>
+                </a:tc>
+                <a:tc>
+                  <a:txBody>
+                    <a:bodyPr/>
+                    <a:lstStyle/>
+                    <a:p>
+                      <a:pPr indent="0" marL="0">
+                        <a:buNone/>
+                      </a:pPr>
+                      <a:r>
+                        <a:rPr lang="en-US" sz="900" dirty="0">
+                          <a:solidFill>
+                            <a:srgbClr val="000000"/>
+                          </a:solidFill>
+                          <a:latin typeface="Calibri" pitchFamily="34" charset="0"/>
+                          <a:ea typeface="Calibri" pitchFamily="34" charset="-122"/>
+                          <a:cs typeface="Calibri" pitchFamily="34" charset="-120"/>
+                        </a:rPr>
+                        <a:t>Obligatoire, unique, format email</a:t>
+                      </a:r>
+                      <a:endParaRPr lang="en-US" sz="900" dirty="0">
+                        <a:latin typeface="Calibri" charset="0"/>
+                        <a:ea typeface="Calibri" charset="0"/>
+                        <a:cs typeface="Calibri" charset="0"/>
+                      </a:endParaRPr>
+                    </a:p>
+                  </a:txBody>
+                  <a:tcPr marL="91440" marR="91440" marT="45720" marB="45720">
+                    <a:lnL w="6350" cap="flat" cmpd="sng" algn="ctr">
+                      <a:solidFill>
+                        <a:srgbClr val="CCCCCC"/>
+                      </a:solidFill>
+                      <a:prstDash val="solid"/>
+                      <a:round/>
+                      <a:headEnd type="none" w="med" len="med"/>
+                      <a:tailEnd type="none" w="med" len="med"/>
+                    </a:lnL>
+                    <a:lnR w="6350" cap="flat" cmpd="sng" algn="ctr">
+                      <a:solidFill>
+                        <a:srgbClr val="CCCCCC"/>
+                      </a:solidFill>
+                      <a:prstDash val="solid"/>
+                      <a:round/>
+                      <a:headEnd type="none" w="med" len="med"/>
+                      <a:tailEnd type="none" w="med" len="med"/>
+                    </a:lnR>
+                    <a:lnT w="6350" cap="flat" cmpd="sng" algn="ctr">
+                      <a:solidFill>
+                        <a:srgbClr val="CCCCCC"/>
+                      </a:solidFill>
+                      <a:prstDash val="solid"/>
+                      <a:round/>
+                      <a:headEnd type="none" w="med" len="med"/>
+                      <a:tailEnd type="none" w="med" len="med"/>
+                    </a:lnT>
+                    <a:lnB w="6350" cap="flat" cmpd="sng" algn="ctr">
+                      <a:solidFill>
+                        <a:srgbClr val="CCCCCC"/>
+                      </a:solidFill>
+                      <a:prstDash val="solid"/>
+                      <a:round/>
+                      <a:headEnd type="none" w="med" len="med"/>
+                      <a:tailEnd type="none" w="med" len="med"/>
+                    </a:lnB>
+                    <a:solidFill>
+                      <a:srgbClr val="E8F5E9"/>
+                    </a:solidFill>
+                  </a:tcPr>
+                </a:tc>
+              </a:tr>
+              <a:tr h="0">
+                <a:tc>
+                  <a:txBody>
+                    <a:bodyPr/>
+                    <a:lstStyle/>
+                    <a:p>
+                      <a:pPr indent="0" marL="0">
+                        <a:buNone/>
+                      </a:pPr>
+                      <a:r>
+                        <a:rPr lang="en-US" sz="900" dirty="0">
+                          <a:solidFill>
+                            <a:srgbClr val="000000"/>
+                          </a:solidFill>
+                          <a:latin typeface="Calibri" pitchFamily="34" charset="0"/>
+                          <a:ea typeface="Calibri" pitchFamily="34" charset="-122"/>
+                          <a:cs typeface="Calibri" pitchFamily="34" charset="-120"/>
+                        </a:rPr>
+                        <a:t>date_inscription</a:t>
+                      </a:r>
+                      <a:endParaRPr lang="en-US" sz="900" dirty="0">
+                        <a:latin typeface="Calibri" charset="0"/>
+                        <a:ea typeface="Calibri" charset="0"/>
+                        <a:cs typeface="Calibri" charset="0"/>
+                      </a:endParaRPr>
+                    </a:p>
+                  </a:txBody>
+                  <a:tcPr marL="91440" marR="91440" marT="45720" marB="45720">
+                    <a:lnL w="6350" cap="flat" cmpd="sng" algn="ctr">
+                      <a:solidFill>
+                        <a:srgbClr val="CCCCCC"/>
+                      </a:solidFill>
+                      <a:prstDash val="solid"/>
+                      <a:round/>
+                      <a:headEnd type="none" w="med" len="med"/>
+                      <a:tailEnd type="none" w="med" len="med"/>
+                    </a:lnL>
+                    <a:lnR w="6350" cap="flat" cmpd="sng" algn="ctr">
+                      <a:solidFill>
+                        <a:srgbClr val="CCCCCC"/>
+                      </a:solidFill>
+                      <a:prstDash val="solid"/>
+                      <a:round/>
+                      <a:headEnd type="none" w="med" len="med"/>
+                      <a:tailEnd type="none" w="med" len="med"/>
+                    </a:lnR>
+                    <a:lnT w="6350" cap="flat" cmpd="sng" algn="ctr">
+                      <a:solidFill>
+                        <a:srgbClr val="CCCCCC"/>
+                      </a:solidFill>
+                      <a:prstDash val="solid"/>
+                      <a:round/>
+                      <a:headEnd type="none" w="med" len="med"/>
+                      <a:tailEnd type="none" w="med" len="med"/>
+                    </a:lnT>
+                    <a:lnB w="6350" cap="flat" cmpd="sng" algn="ctr">
+                      <a:solidFill>
+                        <a:srgbClr val="CCCCCC"/>
+                      </a:solidFill>
+                      <a:prstDash val="solid"/>
+                      <a:round/>
+                      <a:headEnd type="none" w="med" len="med"/>
+                      <a:tailEnd type="none" w="med" len="med"/>
+                    </a:lnB>
+                    <a:solidFill>
+                      <a:srgbClr val="FFFFFF"/>
+                    </a:solidFill>
+                  </a:tcPr>
+                </a:tc>
+                <a:tc>
+                  <a:txBody>
+                    <a:bodyPr/>
+                    <a:lstStyle/>
+                    <a:p>
+                      <a:pPr indent="0" marL="0">
+                        <a:buNone/>
+                      </a:pPr>
+                      <a:r>
+                        <a:rPr lang="en-US" sz="900" dirty="0">
+                          <a:solidFill>
+                            <a:srgbClr val="000000"/>
+                          </a:solidFill>
+                          <a:latin typeface="Calibri" pitchFamily="34" charset="0"/>
+                          <a:ea typeface="Calibri" pitchFamily="34" charset="-122"/>
+                          <a:cs typeface="Calibri" pitchFamily="34" charset="-120"/>
+                        </a:rPr>
+                        <a:t>Date d'inscription</a:t>
+                      </a:r>
+                      <a:endParaRPr lang="en-US" sz="900" dirty="0">
+                        <a:latin typeface="Calibri" charset="0"/>
+                        <a:ea typeface="Calibri" charset="0"/>
+                        <a:cs typeface="Calibri" charset="0"/>
+                      </a:endParaRPr>
+                    </a:p>
+                  </a:txBody>
+                  <a:tcPr marL="91440" marR="91440" marT="45720" marB="45720">
+                    <a:lnL w="6350" cap="flat" cmpd="sng" algn="ctr">
+                      <a:solidFill>
+                        <a:srgbClr val="CCCCCC"/>
+                      </a:solidFill>
+                      <a:prstDash val="solid"/>
+                      <a:round/>
+                      <a:headEnd type="none" w="med" len="med"/>
+                      <a:tailEnd type="none" w="med" len="med"/>
+                    </a:lnL>
+                    <a:lnR w="6350" cap="flat" cmpd="sng" algn="ctr">
+                      <a:solidFill>
+                        <a:srgbClr val="CCCCCC"/>
+                      </a:solidFill>
+                      <a:prstDash val="solid"/>
+                      <a:round/>
+                      <a:headEnd type="none" w="med" len="med"/>
+                      <a:tailEnd type="none" w="med" len="med"/>
+                    </a:lnR>
+                    <a:lnT w="6350" cap="flat" cmpd="sng" algn="ctr">
+                      <a:solidFill>
+                        <a:srgbClr val="CCCCCC"/>
+                      </a:solidFill>
+                      <a:prstDash val="solid"/>
+                      <a:round/>
+                      <a:headEnd type="none" w="med" len="med"/>
+                      <a:tailEnd type="none" w="med" len="med"/>
+                    </a:lnT>
+                    <a:lnB w="6350" cap="flat" cmpd="sng" algn="ctr">
+                      <a:solidFill>
+                        <a:srgbClr val="CCCCCC"/>
+                      </a:solidFill>
+                      <a:prstDash val="solid"/>
+                      <a:round/>
+                      <a:headEnd type="none" w="med" len="med"/>
+                      <a:tailEnd type="none" w="med" len="med"/>
+                    </a:lnB>
+                    <a:solidFill>
+                      <a:srgbClr val="FFFFFF"/>
+                    </a:solidFill>
+                  </a:tcPr>
+                </a:tc>
+                <a:tc>
+                  <a:txBody>
+                    <a:bodyPr/>
+                    <a:lstStyle/>
+                    <a:p>
+                      <a:pPr indent="0" marL="0">
+                        <a:buNone/>
+                      </a:pPr>
+                      <a:r>
+                        <a:rPr lang="en-US" sz="900" dirty="0">
+                          <a:solidFill>
+                            <a:srgbClr val="000000"/>
+                          </a:solidFill>
+                          <a:latin typeface="Calibri" pitchFamily="34" charset="0"/>
+                          <a:ea typeface="Calibri" pitchFamily="34" charset="-122"/>
+                          <a:cs typeface="Calibri" pitchFamily="34" charset="-120"/>
+                        </a:rPr>
+                        <a:t>Élémentaire</a:t>
+                      </a:r>
+                      <a:endParaRPr lang="en-US" sz="900" dirty="0">
+                        <a:latin typeface="Calibri" charset="0"/>
+                        <a:ea typeface="Calibri" charset="0"/>
+                        <a:cs typeface="Calibri" charset="0"/>
+                      </a:endParaRPr>
+                    </a:p>
+                  </a:txBody>
+                  <a:tcPr marL="91440" marR="91440" marT="45720" marB="45720">
+                    <a:lnL w="6350" cap="flat" cmpd="sng" algn="ctr">
+                      <a:solidFill>
+                        <a:srgbClr val="CCCCCC"/>
+                      </a:solidFill>
+                      <a:prstDash val="solid"/>
+                      <a:round/>
+                      <a:headEnd type="none" w="med" len="med"/>
+                      <a:tailEnd type="none" w="med" len="med"/>
+                    </a:lnL>
+                    <a:lnR w="6350" cap="flat" cmpd="sng" algn="ctr">
+                      <a:solidFill>
+                        <a:srgbClr val="CCCCCC"/>
+                      </a:solidFill>
+                      <a:prstDash val="solid"/>
+                      <a:round/>
+                      <a:headEnd type="none" w="med" len="med"/>
+                      <a:tailEnd type="none" w="med" len="med"/>
+                    </a:lnR>
+                    <a:lnT w="6350" cap="flat" cmpd="sng" algn="ctr">
+                      <a:solidFill>
+                        <a:srgbClr val="CCCCCC"/>
+                      </a:solidFill>
+                      <a:prstDash val="solid"/>
+                      <a:round/>
+                      <a:headEnd type="none" w="med" len="med"/>
+                      <a:tailEnd type="none" w="med" len="med"/>
+                    </a:lnT>
+                    <a:lnB w="6350" cap="flat" cmpd="sng" algn="ctr">
+                      <a:solidFill>
+                        <a:srgbClr val="CCCCCC"/>
+                      </a:solidFill>
+                      <a:prstDash val="solid"/>
+                      <a:round/>
+                      <a:headEnd type="none" w="med" len="med"/>
+                      <a:tailEnd type="none" w="med" len="med"/>
+                    </a:lnB>
+                    <a:solidFill>
+                      <a:srgbClr val="FFFFFF"/>
+                    </a:solidFill>
+                  </a:tcPr>
+                </a:tc>
+                <a:tc>
+                  <a:txBody>
+                    <a:bodyPr/>
+                    <a:lstStyle/>
+                    <a:p>
+                      <a:pPr indent="0" marL="0">
+                        <a:buNone/>
+                      </a:pPr>
+                      <a:r>
+                        <a:rPr lang="en-US" sz="900" dirty="0">
+                          <a:solidFill>
+                            <a:srgbClr val="000000"/>
+                          </a:solidFill>
+                          <a:latin typeface="Calibri" pitchFamily="34" charset="0"/>
+                          <a:ea typeface="Calibri" pitchFamily="34" charset="-122"/>
+                          <a:cs typeface="Calibri" pitchFamily="34" charset="-120"/>
+                        </a:rPr>
+                        <a:t>Date</a:t>
+                      </a:r>
+                      <a:endParaRPr lang="en-US" sz="900" dirty="0">
+                        <a:latin typeface="Calibri" charset="0"/>
+                        <a:ea typeface="Calibri" charset="0"/>
+                        <a:cs typeface="Calibri" charset="0"/>
+                      </a:endParaRPr>
+                    </a:p>
+                  </a:txBody>
+                  <a:tcPr marL="91440" marR="91440" marT="45720" marB="45720">
+                    <a:lnL w="6350" cap="flat" cmpd="sng" algn="ctr">
+                      <a:solidFill>
+                        <a:srgbClr val="CCCCCC"/>
+                      </a:solidFill>
+                      <a:prstDash val="solid"/>
+                      <a:round/>
+                      <a:headEnd type="none" w="med" len="med"/>
+                      <a:tailEnd type="none" w="med" len="med"/>
+                    </a:lnL>
+                    <a:lnR w="6350" cap="flat" cmpd="sng" algn="ctr">
+                      <a:solidFill>
+                        <a:srgbClr val="CCCCCC"/>
+                      </a:solidFill>
+                      <a:prstDash val="solid"/>
+                      <a:round/>
+                      <a:headEnd type="none" w="med" len="med"/>
+                      <a:tailEnd type="none" w="med" len="med"/>
+                    </a:lnR>
+                    <a:lnT w="6350" cap="flat" cmpd="sng" algn="ctr">
+                      <a:solidFill>
+                        <a:srgbClr val="CCCCCC"/>
+                      </a:solidFill>
+                      <a:prstDash val="solid"/>
+                      <a:round/>
+                      <a:headEnd type="none" w="med" len="med"/>
+                      <a:tailEnd type="none" w="med" len="med"/>
+                    </a:lnT>
+                    <a:lnB w="6350" cap="flat" cmpd="sng" algn="ctr">
+                      <a:solidFill>
+                        <a:srgbClr val="CCCCCC"/>
+                      </a:solidFill>
+                      <a:prstDash val="solid"/>
+                      <a:round/>
+                      <a:headEnd type="none" w="med" len="med"/>
+                      <a:tailEnd type="none" w="med" len="med"/>
+                    </a:lnB>
+                    <a:solidFill>
+                      <a:srgbClr val="FFFFFF"/>
+                    </a:solidFill>
+                  </a:tcPr>
+                </a:tc>
+                <a:tc>
+                  <a:txBody>
+                    <a:bodyPr/>
+                    <a:lstStyle/>
+                    <a:p>
+                      <a:pPr indent="0" marL="0">
+                        <a:buNone/>
+                      </a:pPr>
+                      <a:r>
+                        <a:rPr lang="en-US" sz="900" dirty="0">
+                          <a:solidFill>
+                            <a:srgbClr val="000000"/>
+                          </a:solidFill>
+                          <a:latin typeface="Calibri" pitchFamily="34" charset="0"/>
+                          <a:ea typeface="Calibri" pitchFamily="34" charset="-122"/>
+                          <a:cs typeface="Calibri" pitchFamily="34" charset="-120"/>
+                        </a:rPr>
+                        <a:t>JJ/MM/AAAA</a:t>
+                      </a:r>
+                      <a:endParaRPr lang="en-US" sz="900" dirty="0">
+                        <a:latin typeface="Calibri" charset="0"/>
+                        <a:ea typeface="Calibri" charset="0"/>
+                        <a:cs typeface="Calibri" charset="0"/>
+                      </a:endParaRPr>
+                    </a:p>
+                  </a:txBody>
+                  <a:tcPr marL="91440" marR="91440" marT="45720" marB="45720">
+                    <a:lnL w="6350" cap="flat" cmpd="sng" algn="ctr">
+                      <a:solidFill>
+                        <a:srgbClr val="CCCCCC"/>
+                      </a:solidFill>
+                      <a:prstDash val="solid"/>
+                      <a:round/>
+                      <a:headEnd type="none" w="med" len="med"/>
+                      <a:tailEnd type="none" w="med" len="med"/>
+                    </a:lnL>
+                    <a:lnR w="6350" cap="flat" cmpd="sng" algn="ctr">
+                      <a:solidFill>
+                        <a:srgbClr val="CCCCCC"/>
+                      </a:solidFill>
+                      <a:prstDash val="solid"/>
+                      <a:round/>
+                      <a:headEnd type="none" w="med" len="med"/>
+                      <a:tailEnd type="none" w="med" len="med"/>
+                    </a:lnR>
+                    <a:lnT w="6350" cap="flat" cmpd="sng" algn="ctr">
+                      <a:solidFill>
+                        <a:srgbClr val="CCCCCC"/>
+                      </a:solidFill>
+                      <a:prstDash val="solid"/>
+                      <a:round/>
+                      <a:headEnd type="none" w="med" len="med"/>
+                      <a:tailEnd type="none" w="med" len="med"/>
+                    </a:lnT>
+                    <a:lnB w="6350" cap="flat" cmpd="sng" algn="ctr">
+                      <a:solidFill>
+                        <a:srgbClr val="CCCCCC"/>
+                      </a:solidFill>
+                      <a:prstDash val="solid"/>
+                      <a:round/>
+                      <a:headEnd type="none" w="med" len="med"/>
+                      <a:tailEnd type="none" w="med" len="med"/>
+                    </a:lnB>
+                    <a:solidFill>
+                      <a:srgbClr val="FFFFFF"/>
+                    </a:solidFill>
+                  </a:tcPr>
+                </a:tc>
+                <a:tc>
+                  <a:txBody>
+                    <a:bodyPr/>
+                    <a:lstStyle/>
+                    <a:p>
+                      <a:pPr indent="0" marL="0">
+                        <a:buNone/>
+                      </a:pPr>
+                      <a:r>
+                        <a:rPr lang="en-US" sz="900" dirty="0">
+                          <a:solidFill>
+                            <a:srgbClr val="000000"/>
+                          </a:solidFill>
+                          <a:latin typeface="Calibri" pitchFamily="34" charset="0"/>
+                          <a:ea typeface="Calibri" pitchFamily="34" charset="-122"/>
+                          <a:cs typeface="Calibri" pitchFamily="34" charset="-120"/>
+                        </a:rPr>
+                        <a:t>Défaut = aujourd'hui</a:t>
+                      </a:r>
+                      <a:endParaRPr lang="en-US" sz="900" dirty="0">
+                        <a:latin typeface="Calibri" charset="0"/>
+                        <a:ea typeface="Calibri" charset="0"/>
+                        <a:cs typeface="Calibri" charset="0"/>
+                      </a:endParaRPr>
+                    </a:p>
+                  </a:txBody>
+                  <a:tcPr marL="91440" marR="91440" marT="45720" marB="45720">
+                    <a:lnL w="6350" cap="flat" cmpd="sng" algn="ctr">
+                      <a:solidFill>
+                        <a:srgbClr val="CCCCCC"/>
+                      </a:solidFill>
+                      <a:prstDash val="solid"/>
+                      <a:round/>
+                      <a:headEnd type="none" w="med" len="med"/>
+                      <a:tailEnd type="none" w="med" len="med"/>
+                    </a:lnL>
+                    <a:lnR w="6350" cap="flat" cmpd="sng" algn="ctr">
+                      <a:solidFill>
+                        <a:srgbClr val="CCCCCC"/>
+                      </a:solidFill>
+                      <a:prstDash val="solid"/>
+                      <a:round/>
+                      <a:headEnd type="none" w="med" len="med"/>
+                      <a:tailEnd type="none" w="med" len="med"/>
+                    </a:lnR>
+                    <a:lnT w="6350" cap="flat" cmpd="sng" algn="ctr">
+                      <a:solidFill>
+                        <a:srgbClr val="CCCCCC"/>
+                      </a:solidFill>
+                      <a:prstDash val="solid"/>
+                      <a:round/>
+                      <a:headEnd type="none" w="med" len="med"/>
+                      <a:tailEnd type="none" w="med" len="med"/>
+                    </a:lnT>
+                    <a:lnB w="6350" cap="flat" cmpd="sng" algn="ctr">
+                      <a:solidFill>
+                        <a:srgbClr val="CCCCCC"/>
+                      </a:solidFill>
+                      <a:prstDash val="solid"/>
+                      <a:round/>
+                      <a:headEnd type="none" w="med" len="med"/>
+                      <a:tailEnd type="none" w="med" len="med"/>
+                    </a:lnB>
+                    <a:solidFill>
+                      <a:srgbClr val="FFFFFF"/>
+                    </a:solidFill>
+                  </a:tcPr>
+                </a:tc>
+              </a:tr>
+              <a:tr h="0">
+                <a:tc>
+                  <a:txBody>
+                    <a:bodyPr/>
+                    <a:lstStyle/>
+                    <a:p>
+                      <a:pPr indent="0" marL="0">
+                        <a:buNone/>
+                      </a:pPr>
+                      <a:r>
+                        <a:rPr lang="en-US" sz="900" dirty="0">
+                          <a:solidFill>
+                            <a:srgbClr val="000000"/>
+                          </a:solidFill>
+                          <a:latin typeface="Calibri" pitchFamily="34" charset="0"/>
+                          <a:ea typeface="Calibri" pitchFamily="34" charset="-122"/>
+                          <a:cs typeface="Calibri" pitchFamily="34" charset="-120"/>
+                        </a:rPr>
+                        <a:t>age_artiste</a:t>
+                      </a:r>
+                      <a:endParaRPr lang="en-US" sz="900" dirty="0">
+                        <a:latin typeface="Calibri" charset="0"/>
+                        <a:ea typeface="Calibri" charset="0"/>
+                        <a:cs typeface="Calibri" charset="0"/>
+                      </a:endParaRPr>
+                    </a:p>
+                  </a:txBody>
+                  <a:tcPr marL="91440" marR="91440" marT="45720" marB="45720">
+                    <a:lnL w="6350" cap="flat" cmpd="sng" algn="ctr">
+                      <a:solidFill>
+                        <a:srgbClr val="CCCCCC"/>
+                      </a:solidFill>
+                      <a:prstDash val="solid"/>
+                      <a:round/>
+                      <a:headEnd type="none" w="med" len="med"/>
+                      <a:tailEnd type="none" w="med" len="med"/>
+                    </a:lnL>
+                    <a:lnR w="6350" cap="flat" cmpd="sng" algn="ctr">
+                      <a:solidFill>
+                        <a:srgbClr val="CCCCCC"/>
+                      </a:solidFill>
+                      <a:prstDash val="solid"/>
+                      <a:round/>
+                      <a:headEnd type="none" w="med" len="med"/>
+                      <a:tailEnd type="none" w="med" len="med"/>
+                    </a:lnR>
+                    <a:lnT w="6350" cap="flat" cmpd="sng" algn="ctr">
+                      <a:solidFill>
+                        <a:srgbClr val="CCCCCC"/>
+                      </a:solidFill>
+                      <a:prstDash val="solid"/>
+                      <a:round/>
+                      <a:headEnd type="none" w="med" len="med"/>
+                      <a:tailEnd type="none" w="med" len="med"/>
+                    </a:lnT>
+                    <a:lnB w="6350" cap="flat" cmpd="sng" algn="ctr">
+                      <a:solidFill>
+                        <a:srgbClr val="CCCCCC"/>
+                      </a:solidFill>
+                      <a:prstDash val="solid"/>
+                      <a:round/>
+                      <a:headEnd type="none" w="med" len="med"/>
+                      <a:tailEnd type="none" w="med" len="med"/>
+                    </a:lnB>
+                    <a:solidFill>
+                      <a:srgbClr val="E8F5E9"/>
+                    </a:solidFill>
+                  </a:tcPr>
+                </a:tc>
+                <a:tc>
+                  <a:txBody>
+                    <a:bodyPr/>
+                    <a:lstStyle/>
+                    <a:p>
+                      <a:pPr indent="0" marL="0">
+                        <a:buNone/>
+                      </a:pPr>
+                      <a:r>
+                        <a:rPr lang="en-US" sz="900" dirty="0">
+                          <a:solidFill>
+                            <a:srgbClr val="000000"/>
+                          </a:solidFill>
+                          <a:latin typeface="Calibri" pitchFamily="34" charset="0"/>
+                          <a:ea typeface="Calibri" pitchFamily="34" charset="-122"/>
+                          <a:cs typeface="Calibri" pitchFamily="34" charset="-120"/>
+                        </a:rPr>
+                        <a:t>Âge de l'artiste</a:t>
+                      </a:r>
+                      <a:endParaRPr lang="en-US" sz="900" dirty="0">
+                        <a:latin typeface="Calibri" charset="0"/>
+                        <a:ea typeface="Calibri" charset="0"/>
+                        <a:cs typeface="Calibri" charset="0"/>
+                      </a:endParaRPr>
+                    </a:p>
+                  </a:txBody>
+                  <a:tcPr marL="91440" marR="91440" marT="45720" marB="45720">
+                    <a:lnL w="6350" cap="flat" cmpd="sng" algn="ctr">
+                      <a:solidFill>
+                        <a:srgbClr val="CCCCCC"/>
+                      </a:solidFill>
+                      <a:prstDash val="solid"/>
+                      <a:round/>
+                      <a:headEnd type="none" w="med" len="med"/>
+                      <a:tailEnd type="none" w="med" len="med"/>
+                    </a:lnL>
+                    <a:lnR w="6350" cap="flat" cmpd="sng" algn="ctr">
+                      <a:solidFill>
+                        <a:srgbClr val="CCCCCC"/>
+                      </a:solidFill>
+                      <a:prstDash val="solid"/>
+                      <a:round/>
+                      <a:headEnd type="none" w="med" len="med"/>
+                      <a:tailEnd type="none" w="med" len="med"/>
+                    </a:lnR>
+                    <a:lnT w="6350" cap="flat" cmpd="sng" algn="ctr">
+                      <a:solidFill>
+                        <a:srgbClr val="CCCCCC"/>
+                      </a:solidFill>
+                      <a:prstDash val="solid"/>
+                      <a:round/>
+                      <a:headEnd type="none" w="med" len="med"/>
+                      <a:tailEnd type="none" w="med" len="med"/>
+                    </a:lnT>
+                    <a:lnB w="6350" cap="flat" cmpd="sng" algn="ctr">
+                      <a:solidFill>
+                        <a:srgbClr val="CCCCCC"/>
+                      </a:solidFill>
+                      <a:prstDash val="solid"/>
+                      <a:round/>
+                      <a:headEnd type="none" w="med" len="med"/>
+                      <a:tailEnd type="none" w="med" len="med"/>
+                    </a:lnB>
+                    <a:solidFill>
+                      <a:srgbClr val="E8F5E9"/>
+                    </a:solidFill>
+                  </a:tcPr>
+                </a:tc>
+                <a:tc>
+                  <a:txBody>
+                    <a:bodyPr/>
+                    <a:lstStyle/>
+                    <a:p>
+                      <a:pPr indent="0" marL="0">
+                        <a:buNone/>
+                      </a:pPr>
+                      <a:r>
+                        <a:rPr lang="en-US" sz="900" dirty="0">
+                          <a:solidFill>
+                            <a:srgbClr val="000000"/>
+                          </a:solidFill>
+                          <a:latin typeface="Calibri" pitchFamily="34" charset="0"/>
+                          <a:ea typeface="Calibri" pitchFamily="34" charset="-122"/>
+                          <a:cs typeface="Calibri" pitchFamily="34" charset="-120"/>
+                        </a:rPr>
+                        <a:t>Calculé</a:t>
+                      </a:r>
+                      <a:endParaRPr lang="en-US" sz="900" dirty="0">
+                        <a:latin typeface="Calibri" charset="0"/>
+                        <a:ea typeface="Calibri" charset="0"/>
+                        <a:cs typeface="Calibri" charset="0"/>
+                      </a:endParaRPr>
+                    </a:p>
+                  </a:txBody>
+                  <a:tcPr marL="91440" marR="91440" marT="45720" marB="45720">
+                    <a:lnL w="6350" cap="flat" cmpd="sng" algn="ctr">
+                      <a:solidFill>
+                        <a:srgbClr val="CCCCCC"/>
+                      </a:solidFill>
+                      <a:prstDash val="solid"/>
+                      <a:round/>
+                      <a:headEnd type="none" w="med" len="med"/>
+                      <a:tailEnd type="none" w="med" len="med"/>
+                    </a:lnL>
+                    <a:lnR w="6350" cap="flat" cmpd="sng" algn="ctr">
+                      <a:solidFill>
+                        <a:srgbClr val="CCCCCC"/>
+                      </a:solidFill>
+                      <a:prstDash val="solid"/>
+                      <a:round/>
+                      <a:headEnd type="none" w="med" len="med"/>
+                      <a:tailEnd type="none" w="med" len="med"/>
+                    </a:lnR>
+                    <a:lnT w="6350" cap="flat" cmpd="sng" algn="ctr">
+                      <a:solidFill>
+                        <a:srgbClr val="CCCCCC"/>
+                      </a:solidFill>
+                      <a:prstDash val="solid"/>
+                      <a:round/>
+                      <a:headEnd type="none" w="med" len="med"/>
+                      <a:tailEnd type="none" w="med" len="med"/>
+                    </a:lnT>
+                    <a:lnB w="6350" cap="flat" cmpd="sng" algn="ctr">
+                      <a:solidFill>
+                        <a:srgbClr val="CCCCCC"/>
+                      </a:solidFill>
+                      <a:prstDash val="solid"/>
+                      <a:round/>
+                      <a:headEnd type="none" w="med" len="med"/>
+                      <a:tailEnd type="none" w="med" len="med"/>
+                    </a:lnB>
+                    <a:solidFill>
+                      <a:srgbClr val="E8F5E9"/>
+                    </a:solidFill>
+                  </a:tcPr>
+                </a:tc>
+                <a:tc>
+                  <a:txBody>
+                    <a:bodyPr/>
+                    <a:lstStyle/>
+                    <a:p>
+                      <a:pPr indent="0" marL="0">
+                        <a:buNone/>
+                      </a:pPr>
+                      <a:r>
+                        <a:rPr lang="en-US" sz="900" dirty="0">
+                          <a:solidFill>
+                            <a:srgbClr val="000000"/>
+                          </a:solidFill>
+                          <a:latin typeface="Calibri" pitchFamily="34" charset="0"/>
+                          <a:ea typeface="Calibri" pitchFamily="34" charset="-122"/>
+                          <a:cs typeface="Calibri" pitchFamily="34" charset="-120"/>
+                        </a:rPr>
+                        <a:t>Entier</a:t>
+                      </a:r>
+                      <a:endParaRPr lang="en-US" sz="900" dirty="0">
+                        <a:latin typeface="Calibri" charset="0"/>
+                        <a:ea typeface="Calibri" charset="0"/>
+                        <a:cs typeface="Calibri" charset="0"/>
+                      </a:endParaRPr>
+                    </a:p>
+                  </a:txBody>
+                  <a:tcPr marL="91440" marR="91440" marT="45720" marB="45720">
+                    <a:lnL w="6350" cap="flat" cmpd="sng" algn="ctr">
+                      <a:solidFill>
+                        <a:srgbClr val="CCCCCC"/>
+                      </a:solidFill>
+                      <a:prstDash val="solid"/>
+                      <a:round/>
+                      <a:headEnd type="none" w="med" len="med"/>
+                      <a:tailEnd type="none" w="med" len="med"/>
+                    </a:lnL>
+                    <a:lnR w="6350" cap="flat" cmpd="sng" algn="ctr">
+                      <a:solidFill>
+                        <a:srgbClr val="CCCCCC"/>
+                      </a:solidFill>
+                      <a:prstDash val="solid"/>
+                      <a:round/>
+                      <a:headEnd type="none" w="med" len="med"/>
+                      <a:tailEnd type="none" w="med" len="med"/>
+                    </a:lnR>
+                    <a:lnT w="6350" cap="flat" cmpd="sng" algn="ctr">
+                      <a:solidFill>
+                        <a:srgbClr val="CCCCCC"/>
+                      </a:solidFill>
+                      <a:prstDash val="solid"/>
+                      <a:round/>
+                      <a:headEnd type="none" w="med" len="med"/>
+                      <a:tailEnd type="none" w="med" len="med"/>
+                    </a:lnT>
+                    <a:lnB w="6350" cap="flat" cmpd="sng" algn="ctr">
+                      <a:solidFill>
+                        <a:srgbClr val="CCCCCC"/>
+                      </a:solidFill>
+                      <a:prstDash val="solid"/>
+                      <a:round/>
+                      <a:headEnd type="none" w="med" len="med"/>
+                      <a:tailEnd type="none" w="med" len="med"/>
+                    </a:lnB>
+                    <a:solidFill>
+                      <a:srgbClr val="E8F5E9"/>
+                    </a:solidFill>
+                  </a:tcPr>
+                </a:tc>
+                <a:tc>
+                  <a:txBody>
+                    <a:bodyPr/>
+                    <a:lstStyle/>
+                    <a:p>
+                      <a:pPr indent="0" marL="0">
+                        <a:buNone/>
+                      </a:pPr>
+                      <a:r>
+                        <a:rPr lang="en-US" sz="900" dirty="0">
+                          <a:solidFill>
+                            <a:srgbClr val="000000"/>
+                          </a:solidFill>
+                          <a:latin typeface="Calibri" pitchFamily="34" charset="0"/>
+                          <a:ea typeface="Calibri" pitchFamily="34" charset="-122"/>
+                          <a:cs typeface="Calibri" pitchFamily="34" charset="-120"/>
+                        </a:rPr>
+                        <a:t>—</a:t>
+                      </a:r>
+                      <a:endParaRPr lang="en-US" sz="900" dirty="0">
+                        <a:latin typeface="Calibri" charset="0"/>
+                        <a:ea typeface="Calibri" charset="0"/>
+                        <a:cs typeface="Calibri" charset="0"/>
+                      </a:endParaRPr>
+                    </a:p>
+                  </a:txBody>
+                  <a:tcPr marL="91440" marR="91440" marT="45720" marB="45720">
+                    <a:lnL w="6350" cap="flat" cmpd="sng" algn="ctr">
+                      <a:solidFill>
+                        <a:srgbClr val="CCCCCC"/>
+                      </a:solidFill>
+                      <a:prstDash val="solid"/>
+                      <a:round/>
+                      <a:headEnd type="none" w="med" len="med"/>
+                      <a:tailEnd type="none" w="med" len="med"/>
+                    </a:lnL>
+                    <a:lnR w="6350" cap="flat" cmpd="sng" algn="ctr">
+                      <a:solidFill>
+                        <a:srgbClr val="CCCCCC"/>
+                      </a:solidFill>
+                      <a:prstDash val="solid"/>
+                      <a:round/>
+                      <a:headEnd type="none" w="med" len="med"/>
+                      <a:tailEnd type="none" w="med" len="med"/>
+                    </a:lnR>
+                    <a:lnT w="6350" cap="flat" cmpd="sng" algn="ctr">
+                      <a:solidFill>
+                        <a:srgbClr val="CCCCCC"/>
+                      </a:solidFill>
+                      <a:prstDash val="solid"/>
+                      <a:round/>
+                      <a:headEnd type="none" w="med" len="med"/>
+                      <a:tailEnd type="none" w="med" len="med"/>
+                    </a:lnT>
+                    <a:lnB w="6350" cap="flat" cmpd="sng" algn="ctr">
+                      <a:solidFill>
+                        <a:srgbClr val="CCCCCC"/>
+                      </a:solidFill>
+                      <a:prstDash val="solid"/>
+                      <a:round/>
+                      <a:headEnd type="none" w="med" len="med"/>
+                      <a:tailEnd type="none" w="med" len="med"/>
+                    </a:lnB>
+                    <a:solidFill>
+                      <a:srgbClr val="E8F5E9"/>
+                    </a:solidFill>
+                  </a:tcPr>
+                </a:tc>
+                <a:tc>
+                  <a:txBody>
+                    <a:bodyPr/>
+                    <a:lstStyle/>
+                    <a:p>
+                      <a:pPr indent="0" marL="0">
+                        <a:buNone/>
+                      </a:pPr>
+                      <a:r>
+                        <a:rPr lang="en-US" sz="900" dirty="0">
+                          <a:solidFill>
+                            <a:srgbClr val="000000"/>
+                          </a:solidFill>
+                          <a:latin typeface="Calibri" pitchFamily="34" charset="0"/>
+                          <a:ea typeface="Calibri" pitchFamily="34" charset="-122"/>
+                          <a:cs typeface="Calibri" pitchFamily="34" charset="-120"/>
+                        </a:rPr>
+                        <a:t>= aujourd'hui - date_naissance</a:t>
+                      </a:r>
+                      <a:endParaRPr lang="en-US" sz="900" dirty="0">
+                        <a:latin typeface="Calibri" charset="0"/>
+                        <a:ea typeface="Calibri" charset="0"/>
+                        <a:cs typeface="Calibri" charset="0"/>
+                      </a:endParaRPr>
+                    </a:p>
+                  </a:txBody>
+                  <a:tcPr marL="91440" marR="91440" marT="45720" marB="45720">
+                    <a:lnL w="6350" cap="flat" cmpd="sng" algn="ctr">
+                      <a:solidFill>
+                        <a:srgbClr val="CCCCCC"/>
+                      </a:solidFill>
+                      <a:prstDash val="solid"/>
+                      <a:round/>
+                      <a:headEnd type="none" w="med" len="med"/>
+                      <a:tailEnd type="none" w="med" len="med"/>
+                    </a:lnL>
+                    <a:lnR w="6350" cap="flat" cmpd="sng" algn="ctr">
+                      <a:solidFill>
+                        <a:srgbClr val="CCCCCC"/>
+                      </a:solidFill>
+                      <a:prstDash val="solid"/>
+                      <a:round/>
+                      <a:headEnd type="none" w="med" len="med"/>
+                      <a:tailEnd type="none" w="med" len="med"/>
+                    </a:lnR>
+                    <a:lnT w="6350" cap="flat" cmpd="sng" algn="ctr">
+                      <a:solidFill>
+                        <a:srgbClr val="CCCCCC"/>
+                      </a:solidFill>
+                      <a:prstDash val="solid"/>
+                      <a:round/>
+                      <a:headEnd type="none" w="med" len="med"/>
+                      <a:tailEnd type="none" w="med" len="med"/>
+                    </a:lnT>
+                    <a:lnB w="6350" cap="flat" cmpd="sng" algn="ctr">
+                      <a:solidFill>
+                        <a:srgbClr val="CCCCCC"/>
+                      </a:solidFill>
+                      <a:prstDash val="solid"/>
+                      <a:round/>
+                      <a:headEnd type="none" w="med" len="med"/>
+                      <a:tailEnd type="none" w="med" len="med"/>
+                    </a:lnB>
+                    <a:solidFill>
+                      <a:srgbClr val="E8F5E9"/>
+                    </a:solidFill>
+                  </a:tcPr>
+                </a:tc>
+              </a:tr>
+            </a:tbl>
+          </a:graphicData>
+        </a:graphic>
+      </p:graphicFrame>
     </p:spTree>
   </p:cSld>
   <p:clrMapOvr>
@@ -3813,6 +6863,1540 @@
 <file path=ppt/slides/slide6.xml><?xml version="1.0" encoding="utf-8"?>
 <p:sld xmlns:a="http://schemas.openxmlformats.org/drawingml/2006/main" xmlns:r="http://schemas.openxmlformats.org/officeDocument/2006/relationships" xmlns:p="http://schemas.openxmlformats.org/presentationml/2006/main">
   <p:cSld name="Slide 6">
+    <p:bg>
+      <p:bgPr>
+        <a:solidFill>
+          <a:srgbClr val="F5F7FA"/>
+        </a:solidFill>
+      </p:bgPr>
+    </p:bg>
+    <p:spTree>
+      <p:nvGrpSpPr>
+        <p:cNvPr id="1" name=""/>
+        <p:cNvGrpSpPr/>
+        <p:nvPr/>
+      </p:nvGrpSpPr>
+      <p:grpSpPr>
+        <a:xfrm>
+          <a:off x="0" y="0"/>
+          <a:ext cx="0" cy="0"/>
+          <a:chOff x="0" y="0"/>
+          <a:chExt cx="0" cy="0"/>
+        </a:xfrm>
+      </p:grpSpPr>
+      <p:sp>
+        <p:nvSpPr>
+          <p:cNvPr id="2" name="Shape 0"/>
+          <p:cNvSpPr/>
+          <p:nvPr/>
+        </p:nvSpPr>
+        <p:spPr>
+          <a:xfrm>
+            <a:off x="0" y="0"/>
+            <a:ext cx="9144000" cy="54864"/>
+          </a:xfrm>
+          <a:prstGeom prst="rect">
+            <a:avLst/>
+          </a:prstGeom>
+          <a:solidFill>
+            <a:srgbClr val="2E7D32"/>
+          </a:solidFill>
+          <a:ln/>
+        </p:spPr>
+      </p:sp>
+      <p:sp>
+        <p:nvSpPr>
+          <p:cNvPr id="3" name="Text 1"/>
+          <p:cNvSpPr/>
+          <p:nvPr/>
+        </p:nvSpPr>
+        <p:spPr>
+          <a:xfrm>
+            <a:off x="457200" y="182880"/>
+            <a:ext cx="8229600" cy="594360"/>
+          </a:xfrm>
+          <a:prstGeom prst="rect">
+            <a:avLst/>
+          </a:prstGeom>
+          <a:noFill/>
+          <a:ln/>
+        </p:spPr>
+        <p:txBody>
+          <a:bodyPr wrap="square" lIns="0" tIns="0" rIns="0" bIns="0" rtlCol="0" anchor="ctr"/>
+          <a:lstStyle/>
+          <a:p>
+            <a:pPr indent="0" marL="0">
+              <a:buNone/>
+            </a:pPr>
+            <a:r>
+              <a:rPr lang="en-US" sz="2400" b="1" dirty="0">
+                <a:solidFill>
+                  <a:srgbClr val="1B5E20"/>
+                </a:solidFill>
+                <a:latin typeface="Trebuchet MS" pitchFamily="34" charset="0"/>
+                <a:ea typeface="Trebuchet MS" pitchFamily="34" charset="-122"/>
+                <a:cs typeface="Trebuchet MS" pitchFamily="34" charset="-120"/>
+              </a:rPr>
+              <a:t>Règles de gestion</a:t>
+            </a:r>
+            <a:endParaRPr lang="en-US" sz="2400" dirty="0"/>
+          </a:p>
+        </p:txBody>
+      </p:sp>
+      <p:sp>
+        <p:nvSpPr>
+          <p:cNvPr id="4" name="Shape 2"/>
+          <p:cNvSpPr/>
+          <p:nvPr/>
+        </p:nvSpPr>
+        <p:spPr>
+          <a:xfrm>
+            <a:off x="457200" y="914400"/>
+            <a:ext cx="8229600" cy="560397"/>
+          </a:xfrm>
+          <a:prstGeom prst="rect">
+            <a:avLst/>
+          </a:prstGeom>
+          <a:solidFill>
+            <a:srgbClr val="FFFFFF"/>
+          </a:solidFill>
+          <a:ln/>
+          <a:effectLst>
+            <a:outerShdw sx="100000" sy="100000" kx="0" ky="0" algn="bl" rotWithShape="0" blurRad="50800" dist="25400" dir="8100000">
+              <a:srgbClr val="000000">
+                <a:alpha val="12000"/>
+              </a:srgbClr>
+            </a:outerShdw>
+          </a:effectLst>
+        </p:spPr>
+      </p:sp>
+      <p:sp>
+        <p:nvSpPr>
+          <p:cNvPr id="5" name="Shape 3"/>
+          <p:cNvSpPr/>
+          <p:nvPr/>
+        </p:nvSpPr>
+        <p:spPr>
+          <a:xfrm>
+            <a:off x="457200" y="914400"/>
+            <a:ext cx="45720" cy="560397"/>
+          </a:xfrm>
+          <a:prstGeom prst="rect">
+            <a:avLst/>
+          </a:prstGeom>
+          <a:solidFill>
+            <a:srgbClr val="2E7D32"/>
+          </a:solidFill>
+          <a:ln/>
+        </p:spPr>
+      </p:sp>
+      <p:sp>
+        <p:nvSpPr>
+          <p:cNvPr id="6" name="Text 4"/>
+          <p:cNvSpPr/>
+          <p:nvPr/>
+        </p:nvSpPr>
+        <p:spPr>
+          <a:xfrm>
+            <a:off x="685800" y="914400"/>
+            <a:ext cx="7818120" cy="560397"/>
+          </a:xfrm>
+          <a:prstGeom prst="rect">
+            <a:avLst/>
+          </a:prstGeom>
+          <a:noFill/>
+          <a:ln/>
+        </p:spPr>
+        <p:txBody>
+          <a:bodyPr wrap="square" lIns="0" tIns="0" rIns="0" bIns="0" rtlCol="0" anchor="ctr"/>
+          <a:lstStyle/>
+          <a:p>
+            <a:pPr indent="0" marL="0">
+              <a:buNone/>
+            </a:pPr>
+            <a:r>
+              <a:rPr lang="en-US" sz="1200" dirty="0">
+                <a:solidFill>
+                  <a:srgbClr val="1A1A2E"/>
+                </a:solidFill>
+                <a:latin typeface="Calibri" pitchFamily="34" charset="0"/>
+                <a:ea typeface="Calibri" pitchFamily="34" charset="-122"/>
+                <a:cs typeface="Calibri" pitchFamily="34" charset="-120"/>
+              </a:rPr>
+              <a:t>Extraites de l'interview et des documents métier</a:t>
+            </a:r>
+            <a:endParaRPr lang="en-US" sz="1200" dirty="0"/>
+          </a:p>
+        </p:txBody>
+      </p:sp>
+      <p:sp>
+        <p:nvSpPr>
+          <p:cNvPr id="7" name="Shape 5"/>
+          <p:cNvSpPr/>
+          <p:nvPr/>
+        </p:nvSpPr>
+        <p:spPr>
+          <a:xfrm>
+            <a:off x="457200" y="1502229"/>
+            <a:ext cx="8229600" cy="560397"/>
+          </a:xfrm>
+          <a:prstGeom prst="rect">
+            <a:avLst/>
+          </a:prstGeom>
+          <a:solidFill>
+            <a:srgbClr val="E8F5E9"/>
+          </a:solidFill>
+          <a:ln/>
+          <a:effectLst>
+            <a:outerShdw sx="100000" sy="100000" kx="0" ky="0" algn="bl" rotWithShape="0" blurRad="50800" dist="25400" dir="8100000">
+              <a:srgbClr val="000000">
+                <a:alpha val="12000"/>
+              </a:srgbClr>
+            </a:outerShdw>
+          </a:effectLst>
+        </p:spPr>
+      </p:sp>
+      <p:sp>
+        <p:nvSpPr>
+          <p:cNvPr id="8" name="Shape 6"/>
+          <p:cNvSpPr/>
+          <p:nvPr/>
+        </p:nvSpPr>
+        <p:spPr>
+          <a:xfrm>
+            <a:off x="457200" y="1502229"/>
+            <a:ext cx="45720" cy="560397"/>
+          </a:xfrm>
+          <a:prstGeom prst="rect">
+            <a:avLst/>
+          </a:prstGeom>
+          <a:solidFill>
+            <a:srgbClr val="2E7D32"/>
+          </a:solidFill>
+          <a:ln/>
+        </p:spPr>
+      </p:sp>
+      <p:sp>
+        <p:nvSpPr>
+          <p:cNvPr id="9" name="Text 7"/>
+          <p:cNvSpPr/>
+          <p:nvPr/>
+        </p:nvSpPr>
+        <p:spPr>
+          <a:xfrm>
+            <a:off x="685800" y="1502229"/>
+            <a:ext cx="7818120" cy="560397"/>
+          </a:xfrm>
+          <a:prstGeom prst="rect">
+            <a:avLst/>
+          </a:prstGeom>
+          <a:noFill/>
+          <a:ln/>
+        </p:spPr>
+        <p:txBody>
+          <a:bodyPr wrap="square" lIns="0" tIns="0" rIns="0" bIns="0" rtlCol="0" anchor="ctr"/>
+          <a:lstStyle/>
+          <a:p>
+            <a:pPr indent="0" marL="0">
+              <a:buNone/>
+            </a:pPr>
+            <a:r>
+              <a:rPr lang="en-US" sz="1200" dirty="0">
+                <a:solidFill>
+                  <a:srgbClr val="1A1A2E"/>
+                </a:solidFill>
+                <a:latin typeface="Calibri" pitchFamily="34" charset="0"/>
+                <a:ea typeface="Calibri" pitchFamily="34" charset="-122"/>
+                <a:cs typeface="Calibri" pitchFamily="34" charset="-120"/>
+              </a:rPr>
+              <a:t>'Un artiste peut avoir PLUSIEURS genres musicaux' → relation N:M</a:t>
+            </a:r>
+            <a:endParaRPr lang="en-US" sz="1200" dirty="0"/>
+          </a:p>
+        </p:txBody>
+      </p:sp>
+      <p:sp>
+        <p:nvSpPr>
+          <p:cNvPr id="10" name="Shape 8"/>
+          <p:cNvSpPr/>
+          <p:nvPr/>
+        </p:nvSpPr>
+        <p:spPr>
+          <a:xfrm>
+            <a:off x="457200" y="2090057"/>
+            <a:ext cx="8229600" cy="560397"/>
+          </a:xfrm>
+          <a:prstGeom prst="rect">
+            <a:avLst/>
+          </a:prstGeom>
+          <a:solidFill>
+            <a:srgbClr val="FFFFFF"/>
+          </a:solidFill>
+          <a:ln/>
+          <a:effectLst>
+            <a:outerShdw sx="100000" sy="100000" kx="0" ky="0" algn="bl" rotWithShape="0" blurRad="50800" dist="25400" dir="8100000">
+              <a:srgbClr val="000000">
+                <a:alpha val="12000"/>
+              </a:srgbClr>
+            </a:outerShdw>
+          </a:effectLst>
+        </p:spPr>
+      </p:sp>
+      <p:sp>
+        <p:nvSpPr>
+          <p:cNvPr id="11" name="Shape 9"/>
+          <p:cNvSpPr/>
+          <p:nvPr/>
+        </p:nvSpPr>
+        <p:spPr>
+          <a:xfrm>
+            <a:off x="457200" y="2090057"/>
+            <a:ext cx="45720" cy="560397"/>
+          </a:xfrm>
+          <a:prstGeom prst="rect">
+            <a:avLst/>
+          </a:prstGeom>
+          <a:solidFill>
+            <a:srgbClr val="2E7D32"/>
+          </a:solidFill>
+          <a:ln/>
+        </p:spPr>
+      </p:sp>
+      <p:sp>
+        <p:nvSpPr>
+          <p:cNvPr id="12" name="Text 10"/>
+          <p:cNvSpPr/>
+          <p:nvPr/>
+        </p:nvSpPr>
+        <p:spPr>
+          <a:xfrm>
+            <a:off x="685800" y="2090057"/>
+            <a:ext cx="7818120" cy="560397"/>
+          </a:xfrm>
+          <a:prstGeom prst="rect">
+            <a:avLst/>
+          </a:prstGeom>
+          <a:noFill/>
+          <a:ln/>
+        </p:spPr>
+        <p:txBody>
+          <a:bodyPr wrap="square" lIns="0" tIns="0" rIns="0" bIns="0" rtlCol="0" anchor="ctr"/>
+          <a:lstStyle/>
+          <a:p>
+            <a:pPr indent="0" marL="0">
+              <a:buNone/>
+            </a:pPr>
+            <a:r>
+              <a:rPr lang="en-US" sz="1200" dirty="0">
+                <a:solidFill>
+                  <a:srgbClr val="1A1A2E"/>
+                </a:solidFill>
+                <a:latin typeface="Calibri" pitchFamily="34" charset="0"/>
+                <a:ea typeface="Calibri" pitchFamily="34" charset="-122"/>
+                <a:cs typeface="Calibri" pitchFamily="34" charset="-120"/>
+              </a:rPr>
+              <a:t>'Une session se déroule dans UNE SEULE salle' → relation 1:N</a:t>
+            </a:r>
+            <a:endParaRPr lang="en-US" sz="1200" dirty="0"/>
+          </a:p>
+        </p:txBody>
+      </p:sp>
+      <p:sp>
+        <p:nvSpPr>
+          <p:cNvPr id="13" name="Shape 11"/>
+          <p:cNvSpPr/>
+          <p:nvPr/>
+        </p:nvSpPr>
+        <p:spPr>
+          <a:xfrm>
+            <a:off x="457200" y="2677886"/>
+            <a:ext cx="8229600" cy="560397"/>
+          </a:xfrm>
+          <a:prstGeom prst="rect">
+            <a:avLst/>
+          </a:prstGeom>
+          <a:solidFill>
+            <a:srgbClr val="E8F5E9"/>
+          </a:solidFill>
+          <a:ln/>
+          <a:effectLst>
+            <a:outerShdw sx="100000" sy="100000" kx="0" ky="0" algn="bl" rotWithShape="0" blurRad="50800" dist="25400" dir="8100000">
+              <a:srgbClr val="000000">
+                <a:alpha val="12000"/>
+              </a:srgbClr>
+            </a:outerShdw>
+          </a:effectLst>
+        </p:spPr>
+      </p:sp>
+      <p:sp>
+        <p:nvSpPr>
+          <p:cNvPr id="14" name="Shape 12"/>
+          <p:cNvSpPr/>
+          <p:nvPr/>
+        </p:nvSpPr>
+        <p:spPr>
+          <a:xfrm>
+            <a:off x="457200" y="2677886"/>
+            <a:ext cx="45720" cy="560397"/>
+          </a:xfrm>
+          <a:prstGeom prst="rect">
+            <a:avLst/>
+          </a:prstGeom>
+          <a:solidFill>
+            <a:srgbClr val="2E7D32"/>
+          </a:solidFill>
+          <a:ln/>
+        </p:spPr>
+      </p:sp>
+      <p:sp>
+        <p:nvSpPr>
+          <p:cNvPr id="15" name="Text 13"/>
+          <p:cNvSpPr/>
+          <p:nvPr/>
+        </p:nvSpPr>
+        <p:spPr>
+          <a:xfrm>
+            <a:off x="685800" y="2677886"/>
+            <a:ext cx="7818120" cy="560397"/>
+          </a:xfrm>
+          <a:prstGeom prst="rect">
+            <a:avLst/>
+          </a:prstGeom>
+          <a:noFill/>
+          <a:ln/>
+        </p:spPr>
+        <p:txBody>
+          <a:bodyPr wrap="square" lIns="0" tIns="0" rIns="0" bIns="0" rtlCol="0" anchor="ctr"/>
+          <a:lstStyle/>
+          <a:p>
+            <a:pPr indent="0" marL="0">
+              <a:buNone/>
+            </a:pPr>
+            <a:r>
+              <a:rPr lang="en-US" sz="1200" dirty="0">
+                <a:solidFill>
+                  <a:srgbClr val="1A1A2E"/>
+                </a:solidFill>
+                <a:latin typeface="Calibri" pitchFamily="34" charset="0"/>
+                <a:ea typeface="Calibri" pitchFamily="34" charset="-122"/>
+                <a:cs typeface="Calibri" pitchFamily="34" charset="-120"/>
+              </a:rPr>
+              <a:t>'Le tarif horaire doit être POSITIF' → contrainte CHECK &gt; 0</a:t>
+            </a:r>
+            <a:endParaRPr lang="en-US" sz="1200" dirty="0"/>
+          </a:p>
+        </p:txBody>
+      </p:sp>
+      <p:sp>
+        <p:nvSpPr>
+          <p:cNvPr id="16" name="Shape 14"/>
+          <p:cNvSpPr/>
+          <p:nvPr/>
+        </p:nvSpPr>
+        <p:spPr>
+          <a:xfrm>
+            <a:off x="457200" y="3265714"/>
+            <a:ext cx="8229600" cy="560397"/>
+          </a:xfrm>
+          <a:prstGeom prst="rect">
+            <a:avLst/>
+          </a:prstGeom>
+          <a:solidFill>
+            <a:srgbClr val="FFFFFF"/>
+          </a:solidFill>
+          <a:ln/>
+          <a:effectLst>
+            <a:outerShdw sx="100000" sy="100000" kx="0" ky="0" algn="bl" rotWithShape="0" blurRad="50800" dist="25400" dir="8100000">
+              <a:srgbClr val="000000">
+                <a:alpha val="12000"/>
+              </a:srgbClr>
+            </a:outerShdw>
+          </a:effectLst>
+        </p:spPr>
+      </p:sp>
+      <p:sp>
+        <p:nvSpPr>
+          <p:cNvPr id="17" name="Shape 15"/>
+          <p:cNvSpPr/>
+          <p:nvPr/>
+        </p:nvSpPr>
+        <p:spPr>
+          <a:xfrm>
+            <a:off x="457200" y="3265714"/>
+            <a:ext cx="45720" cy="560397"/>
+          </a:xfrm>
+          <a:prstGeom prst="rect">
+            <a:avLst/>
+          </a:prstGeom>
+          <a:solidFill>
+            <a:srgbClr val="2E7D32"/>
+          </a:solidFill>
+          <a:ln/>
+        </p:spPr>
+      </p:sp>
+      <p:sp>
+        <p:nvSpPr>
+          <p:cNvPr id="18" name="Text 16"/>
+          <p:cNvSpPr/>
+          <p:nvPr/>
+        </p:nvSpPr>
+        <p:spPr>
+          <a:xfrm>
+            <a:off x="685800" y="3265714"/>
+            <a:ext cx="7818120" cy="560397"/>
+          </a:xfrm>
+          <a:prstGeom prst="rect">
+            <a:avLst/>
+          </a:prstGeom>
+          <a:noFill/>
+          <a:ln/>
+        </p:spPr>
+        <p:txBody>
+          <a:bodyPr wrap="square" lIns="0" tIns="0" rIns="0" bIns="0" rtlCol="0" anchor="ctr"/>
+          <a:lstStyle/>
+          <a:p>
+            <a:pPr indent="0" marL="0">
+              <a:buNone/>
+            </a:pPr>
+            <a:r>
+              <a:rPr lang="en-US" sz="1200" dirty="0">
+                <a:solidFill>
+                  <a:srgbClr val="1A1A2E"/>
+                </a:solidFill>
+                <a:latin typeface="Calibri" pitchFamily="34" charset="0"/>
+                <a:ea typeface="Calibri" pitchFamily="34" charset="-122"/>
+                <a:cs typeface="Calibri" pitchFamily="34" charset="-120"/>
+              </a:rPr>
+              <a:t>'L'email de l'artiste doit être UNIQUE' → contrainte UNIQUE</a:t>
+            </a:r>
+            <a:endParaRPr lang="en-US" sz="1200" dirty="0"/>
+          </a:p>
+        </p:txBody>
+      </p:sp>
+      <p:sp>
+        <p:nvSpPr>
+          <p:cNvPr id="19" name="Shape 17"/>
+          <p:cNvSpPr/>
+          <p:nvPr/>
+        </p:nvSpPr>
+        <p:spPr>
+          <a:xfrm>
+            <a:off x="457200" y="3853543"/>
+            <a:ext cx="8229600" cy="560397"/>
+          </a:xfrm>
+          <a:prstGeom prst="rect">
+            <a:avLst/>
+          </a:prstGeom>
+          <a:solidFill>
+            <a:srgbClr val="E8F5E9"/>
+          </a:solidFill>
+          <a:ln/>
+          <a:effectLst>
+            <a:outerShdw sx="100000" sy="100000" kx="0" ky="0" algn="bl" rotWithShape="0" blurRad="50800" dist="25400" dir="8100000">
+              <a:srgbClr val="000000">
+                <a:alpha val="12000"/>
+              </a:srgbClr>
+            </a:outerShdw>
+          </a:effectLst>
+        </p:spPr>
+      </p:sp>
+      <p:sp>
+        <p:nvSpPr>
+          <p:cNvPr id="20" name="Shape 18"/>
+          <p:cNvSpPr/>
+          <p:nvPr/>
+        </p:nvSpPr>
+        <p:spPr>
+          <a:xfrm>
+            <a:off x="457200" y="3853543"/>
+            <a:ext cx="45720" cy="560397"/>
+          </a:xfrm>
+          <a:prstGeom prst="rect">
+            <a:avLst/>
+          </a:prstGeom>
+          <a:solidFill>
+            <a:srgbClr val="2E7D32"/>
+          </a:solidFill>
+          <a:ln/>
+        </p:spPr>
+      </p:sp>
+      <p:sp>
+        <p:nvSpPr>
+          <p:cNvPr id="21" name="Text 19"/>
+          <p:cNvSpPr/>
+          <p:nvPr/>
+        </p:nvSpPr>
+        <p:spPr>
+          <a:xfrm>
+            <a:off x="685800" y="3853543"/>
+            <a:ext cx="7818120" cy="560397"/>
+          </a:xfrm>
+          <a:prstGeom prst="rect">
+            <a:avLst/>
+          </a:prstGeom>
+          <a:noFill/>
+          <a:ln/>
+        </p:spPr>
+        <p:txBody>
+          <a:bodyPr wrap="square" lIns="0" tIns="0" rIns="0" bIns="0" rtlCol="0" anchor="ctr"/>
+          <a:lstStyle/>
+          <a:p>
+            <a:pPr indent="0" marL="0">
+              <a:buNone/>
+            </a:pPr>
+            <a:r>
+              <a:rPr lang="en-US" sz="1200" dirty="0">
+                <a:solidFill>
+                  <a:srgbClr val="1A1A2E"/>
+                </a:solidFill>
+                <a:latin typeface="Calibri" pitchFamily="34" charset="0"/>
+                <a:ea typeface="Calibri" pitchFamily="34" charset="-122"/>
+                <a:cs typeface="Calibri" pitchFamily="34" charset="-120"/>
+              </a:rPr>
+              <a:t>'Un artiste inactif garde son historique' → pas de DELETE, flag booléen</a:t>
+            </a:r>
+            <a:endParaRPr lang="en-US" sz="1200" dirty="0"/>
+          </a:p>
+        </p:txBody>
+      </p:sp>
+      <p:sp>
+        <p:nvSpPr>
+          <p:cNvPr id="22" name="Shape 20"/>
+          <p:cNvSpPr/>
+          <p:nvPr/>
+        </p:nvSpPr>
+        <p:spPr>
+          <a:xfrm>
+            <a:off x="457200" y="4441371"/>
+            <a:ext cx="8229600" cy="560397"/>
+          </a:xfrm>
+          <a:prstGeom prst="rect">
+            <a:avLst/>
+          </a:prstGeom>
+          <a:solidFill>
+            <a:srgbClr val="FFFFFF"/>
+          </a:solidFill>
+          <a:ln/>
+          <a:effectLst>
+            <a:outerShdw sx="100000" sy="100000" kx="0" ky="0" algn="bl" rotWithShape="0" blurRad="50800" dist="25400" dir="8100000">
+              <a:srgbClr val="000000">
+                <a:alpha val="12000"/>
+              </a:srgbClr>
+            </a:outerShdw>
+          </a:effectLst>
+        </p:spPr>
+      </p:sp>
+      <p:sp>
+        <p:nvSpPr>
+          <p:cNvPr id="23" name="Shape 21"/>
+          <p:cNvSpPr/>
+          <p:nvPr/>
+        </p:nvSpPr>
+        <p:spPr>
+          <a:xfrm>
+            <a:off x="457200" y="4441371"/>
+            <a:ext cx="45720" cy="560397"/>
+          </a:xfrm>
+          <a:prstGeom prst="rect">
+            <a:avLst/>
+          </a:prstGeom>
+          <a:solidFill>
+            <a:srgbClr val="2E7D32"/>
+          </a:solidFill>
+          <a:ln/>
+        </p:spPr>
+      </p:sp>
+      <p:sp>
+        <p:nvSpPr>
+          <p:cNvPr id="24" name="Text 22"/>
+          <p:cNvSpPr/>
+          <p:nvPr/>
+        </p:nvSpPr>
+        <p:spPr>
+          <a:xfrm>
+            <a:off x="685800" y="4441371"/>
+            <a:ext cx="7818120" cy="560397"/>
+          </a:xfrm>
+          <a:prstGeom prst="rect">
+            <a:avLst/>
+          </a:prstGeom>
+          <a:noFill/>
+          <a:ln/>
+        </p:spPr>
+        <p:txBody>
+          <a:bodyPr wrap="square" lIns="0" tIns="0" rIns="0" bIns="0" rtlCol="0" anchor="ctr"/>
+          <a:lstStyle/>
+          <a:p>
+            <a:pPr indent="0" marL="0">
+              <a:buNone/>
+            </a:pPr>
+            <a:r>
+              <a:rPr lang="en-US" sz="1200" dirty="0">
+                <a:solidFill>
+                  <a:srgbClr val="1A1A2E"/>
+                </a:solidFill>
+                <a:latin typeface="Calibri" pitchFamily="34" charset="0"/>
+                <a:ea typeface="Calibri" pitchFamily="34" charset="-122"/>
+                <a:cs typeface="Calibri" pitchFamily="34" charset="-120"/>
+              </a:rPr>
+              <a:t>Ces règles guident TOUT le reste de la conception !</a:t>
+            </a:r>
+            <a:endParaRPr lang="en-US" sz="1200" dirty="0"/>
+          </a:p>
+        </p:txBody>
+      </p:sp>
+    </p:spTree>
+  </p:cSld>
+  <p:clrMapOvr>
+    <a:masterClrMapping/>
+  </p:clrMapOvr>
+</p:sld>
+</file>
+
+<file path=ppt/slides/slide7.xml><?xml version="1.0" encoding="utf-8"?>
+<p:sld xmlns:a="http://schemas.openxmlformats.org/drawingml/2006/main" xmlns:r="http://schemas.openxmlformats.org/officeDocument/2006/relationships" xmlns:p="http://schemas.openxmlformats.org/presentationml/2006/main">
+  <p:cSld name="Slide 7">
+    <p:bg>
+      <p:bgPr>
+        <a:solidFill>
+          <a:srgbClr val="E8F5E9"/>
+        </a:solidFill>
+      </p:bgPr>
+    </p:bg>
+    <p:spTree>
+      <p:nvGrpSpPr>
+        <p:cNvPr id="1" name=""/>
+        <p:cNvGrpSpPr/>
+        <p:nvPr/>
+      </p:nvGrpSpPr>
+      <p:grpSpPr>
+        <a:xfrm>
+          <a:off x="0" y="0"/>
+          <a:ext cx="0" cy="0"/>
+          <a:chOff x="0" y="0"/>
+          <a:chExt cx="0" cy="0"/>
+        </a:xfrm>
+      </p:grpSpPr>
+      <p:sp>
+        <p:nvSpPr>
+          <p:cNvPr id="2" name="Shape 0"/>
+          <p:cNvSpPr/>
+          <p:nvPr/>
+        </p:nvSpPr>
+        <p:spPr>
+          <a:xfrm>
+            <a:off x="0" y="0"/>
+            <a:ext cx="9144000" cy="54864"/>
+          </a:xfrm>
+          <a:prstGeom prst="rect">
+            <a:avLst/>
+          </a:prstGeom>
+          <a:solidFill>
+            <a:srgbClr val="FF6F00"/>
+          </a:solidFill>
+          <a:ln/>
+        </p:spPr>
+      </p:sp>
+      <p:sp>
+        <p:nvSpPr>
+          <p:cNvPr id="3" name="Text 1"/>
+          <p:cNvSpPr/>
+          <p:nvPr/>
+        </p:nvSpPr>
+        <p:spPr>
+          <a:xfrm>
+            <a:off x="457200" y="182880"/>
+            <a:ext cx="8229600" cy="548640"/>
+          </a:xfrm>
+          <a:prstGeom prst="rect">
+            <a:avLst/>
+          </a:prstGeom>
+          <a:noFill/>
+          <a:ln/>
+        </p:spPr>
+        <p:txBody>
+          <a:bodyPr wrap="square" lIns="0" tIns="0" rIns="0" bIns="0" rtlCol="0" anchor="ctr"/>
+          <a:lstStyle/>
+          <a:p>
+            <a:pPr indent="0" marL="0">
+              <a:buNone/>
+            </a:pPr>
+            <a:r>
+              <a:rPr lang="en-US" sz="2400" b="1" dirty="0">
+                <a:solidFill>
+                  <a:srgbClr val="1B5E20"/>
+                </a:solidFill>
+                <a:latin typeface="Trebuchet MS" pitchFamily="34" charset="0"/>
+                <a:ea typeface="Trebuchet MS" pitchFamily="34" charset="-122"/>
+                <a:cs typeface="Trebuchet MS" pitchFamily="34" charset="-120"/>
+              </a:rPr>
+              <a:t>✏️ Exercice Module 3</a:t>
+            </a:r>
+            <a:endParaRPr lang="en-US" sz="2400" dirty="0"/>
+          </a:p>
+        </p:txBody>
+      </p:sp>
+      <p:sp>
+        <p:nvSpPr>
+          <p:cNvPr id="4" name="Shape 2"/>
+          <p:cNvSpPr/>
+          <p:nvPr/>
+        </p:nvSpPr>
+        <p:spPr>
+          <a:xfrm>
+            <a:off x="457200" y="914400"/>
+            <a:ext cx="8229600" cy="566928"/>
+          </a:xfrm>
+          <a:prstGeom prst="rect">
+            <a:avLst/>
+          </a:prstGeom>
+          <a:solidFill>
+            <a:srgbClr val="FFFFFF"/>
+          </a:solidFill>
+          <a:ln/>
+          <a:effectLst>
+            <a:outerShdw sx="100000" sy="100000" kx="0" ky="0" algn="bl" rotWithShape="0" blurRad="50800" dist="25400" dir="8100000">
+              <a:srgbClr val="000000">
+                <a:alpha val="12000"/>
+              </a:srgbClr>
+            </a:outerShdw>
+          </a:effectLst>
+        </p:spPr>
+      </p:sp>
+      <p:sp>
+        <p:nvSpPr>
+          <p:cNvPr id="5" name="Shape 3"/>
+          <p:cNvSpPr/>
+          <p:nvPr/>
+        </p:nvSpPr>
+        <p:spPr>
+          <a:xfrm>
+            <a:off x="457200" y="914400"/>
+            <a:ext cx="457200" cy="566928"/>
+          </a:xfrm>
+          <a:prstGeom prst="rect">
+            <a:avLst/>
+          </a:prstGeom>
+          <a:solidFill>
+            <a:srgbClr val="FF6F00"/>
+          </a:solidFill>
+          <a:ln/>
+        </p:spPr>
+      </p:sp>
+      <p:sp>
+        <p:nvSpPr>
+          <p:cNvPr id="6" name="Text 4"/>
+          <p:cNvSpPr/>
+          <p:nvPr/>
+        </p:nvSpPr>
+        <p:spPr>
+          <a:xfrm>
+            <a:off x="457200" y="914400"/>
+            <a:ext cx="457200" cy="566928"/>
+          </a:xfrm>
+          <a:prstGeom prst="rect">
+            <a:avLst/>
+          </a:prstGeom>
+          <a:noFill/>
+          <a:ln/>
+        </p:spPr>
+        <p:txBody>
+          <a:bodyPr wrap="square" lIns="0" tIns="0" rIns="0" bIns="0" rtlCol="0" anchor="ctr"/>
+          <a:lstStyle/>
+          <a:p>
+            <a:pPr algn="ctr" indent="0" marL="0">
+              <a:buNone/>
+            </a:pPr>
+            <a:r>
+              <a:rPr lang="en-US" sz="1600" b="1" dirty="0">
+                <a:solidFill>
+                  <a:srgbClr val="FFFFFF"/>
+                </a:solidFill>
+                <a:latin typeface="Trebuchet MS" pitchFamily="34" charset="0"/>
+                <a:ea typeface="Trebuchet MS" pitchFamily="34" charset="-122"/>
+                <a:cs typeface="Trebuchet MS" pitchFamily="34" charset="-120"/>
+              </a:rPr>
+              <a:t>1</a:t>
+            </a:r>
+            <a:endParaRPr lang="en-US" sz="1600" dirty="0"/>
+          </a:p>
+        </p:txBody>
+      </p:sp>
+      <p:sp>
+        <p:nvSpPr>
+          <p:cNvPr id="7" name="Text 5"/>
+          <p:cNvSpPr/>
+          <p:nvPr/>
+        </p:nvSpPr>
+        <p:spPr>
+          <a:xfrm>
+            <a:off x="1051560" y="914400"/>
+            <a:ext cx="7498080" cy="566928"/>
+          </a:xfrm>
+          <a:prstGeom prst="rect">
+            <a:avLst/>
+          </a:prstGeom>
+          <a:noFill/>
+          <a:ln/>
+        </p:spPr>
+        <p:txBody>
+          <a:bodyPr wrap="square" lIns="0" tIns="0" rIns="0" bIns="0" rtlCol="0" anchor="ctr"/>
+          <a:lstStyle/>
+          <a:p>
+            <a:pPr indent="0" marL="0">
+              <a:buNone/>
+            </a:pPr>
+            <a:r>
+              <a:rPr lang="en-US" sz="1100" dirty="0">
+                <a:solidFill>
+                  <a:srgbClr val="1A1A2E"/>
+                </a:solidFill>
+                <a:latin typeface="Calibri" pitchFamily="34" charset="0"/>
+                <a:ea typeface="Calibri" pitchFamily="34" charset="-122"/>
+                <a:cs typeface="Calibri" pitchFamily="34" charset="-120"/>
+              </a:rPr>
+              <a:t>Compléter le DD pour les entités : Album, Salle, Ingénieur, Équipement</a:t>
+            </a:r>
+            <a:endParaRPr lang="en-US" sz="1100" dirty="0"/>
+          </a:p>
+        </p:txBody>
+      </p:sp>
+      <p:sp>
+        <p:nvSpPr>
+          <p:cNvPr id="8" name="Shape 6"/>
+          <p:cNvSpPr/>
+          <p:nvPr/>
+        </p:nvSpPr>
+        <p:spPr>
+          <a:xfrm>
+            <a:off x="457200" y="1554480"/>
+            <a:ext cx="8229600" cy="566928"/>
+          </a:xfrm>
+          <a:prstGeom prst="rect">
+            <a:avLst/>
+          </a:prstGeom>
+          <a:solidFill>
+            <a:srgbClr val="FFFFFF"/>
+          </a:solidFill>
+          <a:ln/>
+          <a:effectLst>
+            <a:outerShdw sx="100000" sy="100000" kx="0" ky="0" algn="bl" rotWithShape="0" blurRad="50800" dist="25400" dir="8100000">
+              <a:srgbClr val="000000">
+                <a:alpha val="12000"/>
+              </a:srgbClr>
+            </a:outerShdw>
+          </a:effectLst>
+        </p:spPr>
+      </p:sp>
+      <p:sp>
+        <p:nvSpPr>
+          <p:cNvPr id="9" name="Shape 7"/>
+          <p:cNvSpPr/>
+          <p:nvPr/>
+        </p:nvSpPr>
+        <p:spPr>
+          <a:xfrm>
+            <a:off x="457200" y="1554480"/>
+            <a:ext cx="457200" cy="566928"/>
+          </a:xfrm>
+          <a:prstGeom prst="rect">
+            <a:avLst/>
+          </a:prstGeom>
+          <a:solidFill>
+            <a:srgbClr val="FF6F00"/>
+          </a:solidFill>
+          <a:ln/>
+        </p:spPr>
+      </p:sp>
+      <p:sp>
+        <p:nvSpPr>
+          <p:cNvPr id="10" name="Text 8"/>
+          <p:cNvSpPr/>
+          <p:nvPr/>
+        </p:nvSpPr>
+        <p:spPr>
+          <a:xfrm>
+            <a:off x="457200" y="1554480"/>
+            <a:ext cx="457200" cy="566928"/>
+          </a:xfrm>
+          <a:prstGeom prst="rect">
+            <a:avLst/>
+          </a:prstGeom>
+          <a:noFill/>
+          <a:ln/>
+        </p:spPr>
+        <p:txBody>
+          <a:bodyPr wrap="square" lIns="0" tIns="0" rIns="0" bIns="0" rtlCol="0" anchor="ctr"/>
+          <a:lstStyle/>
+          <a:p>
+            <a:pPr algn="ctr" indent="0" marL="0">
+              <a:buNone/>
+            </a:pPr>
+            <a:r>
+              <a:rPr lang="en-US" sz="1600" b="1" dirty="0">
+                <a:solidFill>
+                  <a:srgbClr val="FFFFFF"/>
+                </a:solidFill>
+                <a:latin typeface="Trebuchet MS" pitchFamily="34" charset="0"/>
+                <a:ea typeface="Trebuchet MS" pitchFamily="34" charset="-122"/>
+                <a:cs typeface="Trebuchet MS" pitchFamily="34" charset="-120"/>
+              </a:rPr>
+              <a:t>2</a:t>
+            </a:r>
+            <a:endParaRPr lang="en-US" sz="1600" dirty="0"/>
+          </a:p>
+        </p:txBody>
+      </p:sp>
+      <p:sp>
+        <p:nvSpPr>
+          <p:cNvPr id="11" name="Text 9"/>
+          <p:cNvSpPr/>
+          <p:nvPr/>
+        </p:nvSpPr>
+        <p:spPr>
+          <a:xfrm>
+            <a:off x="1051560" y="1554480"/>
+            <a:ext cx="7498080" cy="566928"/>
+          </a:xfrm>
+          <a:prstGeom prst="rect">
+            <a:avLst/>
+          </a:prstGeom>
+          <a:noFill/>
+          <a:ln/>
+        </p:spPr>
+        <p:txBody>
+          <a:bodyPr wrap="square" lIns="0" tIns="0" rIns="0" bIns="0" rtlCol="0" anchor="ctr"/>
+          <a:lstStyle/>
+          <a:p>
+            <a:pPr indent="0" marL="0">
+              <a:buNone/>
+            </a:pPr>
+            <a:r>
+              <a:rPr lang="en-US" sz="1100" dirty="0">
+                <a:solidFill>
+                  <a:srgbClr val="1A1A2E"/>
+                </a:solidFill>
+                <a:latin typeface="Calibri" pitchFamily="34" charset="0"/>
+                <a:ea typeface="Calibri" pitchFamily="34" charset="-122"/>
+                <a:cs typeface="Calibri" pitchFamily="34" charset="-120"/>
+              </a:rPr>
+              <a:t>Compléter le DD pour : Session, Facture</a:t>
+            </a:r>
+            <a:endParaRPr lang="en-US" sz="1100" dirty="0"/>
+          </a:p>
+        </p:txBody>
+      </p:sp>
+      <p:sp>
+        <p:nvSpPr>
+          <p:cNvPr id="12" name="Shape 10"/>
+          <p:cNvSpPr/>
+          <p:nvPr/>
+        </p:nvSpPr>
+        <p:spPr>
+          <a:xfrm>
+            <a:off x="457200" y="2194560"/>
+            <a:ext cx="8229600" cy="566928"/>
+          </a:xfrm>
+          <a:prstGeom prst="rect">
+            <a:avLst/>
+          </a:prstGeom>
+          <a:solidFill>
+            <a:srgbClr val="FFFFFF"/>
+          </a:solidFill>
+          <a:ln/>
+          <a:effectLst>
+            <a:outerShdw sx="100000" sy="100000" kx="0" ky="0" algn="bl" rotWithShape="0" blurRad="50800" dist="25400" dir="8100000">
+              <a:srgbClr val="000000">
+                <a:alpha val="12000"/>
+              </a:srgbClr>
+            </a:outerShdw>
+          </a:effectLst>
+        </p:spPr>
+      </p:sp>
+      <p:sp>
+        <p:nvSpPr>
+          <p:cNvPr id="13" name="Shape 11"/>
+          <p:cNvSpPr/>
+          <p:nvPr/>
+        </p:nvSpPr>
+        <p:spPr>
+          <a:xfrm>
+            <a:off x="457200" y="2194560"/>
+            <a:ext cx="457200" cy="566928"/>
+          </a:xfrm>
+          <a:prstGeom prst="rect">
+            <a:avLst/>
+          </a:prstGeom>
+          <a:solidFill>
+            <a:srgbClr val="FF6F00"/>
+          </a:solidFill>
+          <a:ln/>
+        </p:spPr>
+      </p:sp>
+      <p:sp>
+        <p:nvSpPr>
+          <p:cNvPr id="14" name="Text 12"/>
+          <p:cNvSpPr/>
+          <p:nvPr/>
+        </p:nvSpPr>
+        <p:spPr>
+          <a:xfrm>
+            <a:off x="457200" y="2194560"/>
+            <a:ext cx="457200" cy="566928"/>
+          </a:xfrm>
+          <a:prstGeom prst="rect">
+            <a:avLst/>
+          </a:prstGeom>
+          <a:noFill/>
+          <a:ln/>
+        </p:spPr>
+        <p:txBody>
+          <a:bodyPr wrap="square" lIns="0" tIns="0" rIns="0" bIns="0" rtlCol="0" anchor="ctr"/>
+          <a:lstStyle/>
+          <a:p>
+            <a:pPr algn="ctr" indent="0" marL="0">
+              <a:buNone/>
+            </a:pPr>
+            <a:r>
+              <a:rPr lang="en-US" sz="1600" b="1" dirty="0">
+                <a:solidFill>
+                  <a:srgbClr val="FFFFFF"/>
+                </a:solidFill>
+                <a:latin typeface="Trebuchet MS" pitchFamily="34" charset="0"/>
+                <a:ea typeface="Trebuchet MS" pitchFamily="34" charset="-122"/>
+                <a:cs typeface="Trebuchet MS" pitchFamily="34" charset="-120"/>
+              </a:rPr>
+              <a:t>3</a:t>
+            </a:r>
+            <a:endParaRPr lang="en-US" sz="1600" dirty="0"/>
+          </a:p>
+        </p:txBody>
+      </p:sp>
+      <p:sp>
+        <p:nvSpPr>
+          <p:cNvPr id="15" name="Text 13"/>
+          <p:cNvSpPr/>
+          <p:nvPr/>
+        </p:nvSpPr>
+        <p:spPr>
+          <a:xfrm>
+            <a:off x="1051560" y="2194560"/>
+            <a:ext cx="7498080" cy="566928"/>
+          </a:xfrm>
+          <a:prstGeom prst="rect">
+            <a:avLst/>
+          </a:prstGeom>
+          <a:noFill/>
+          <a:ln/>
+        </p:spPr>
+        <p:txBody>
+          <a:bodyPr wrap="square" lIns="0" tIns="0" rIns="0" bIns="0" rtlCol="0" anchor="ctr"/>
+          <a:lstStyle/>
+          <a:p>
+            <a:pPr indent="0" marL="0">
+              <a:buNone/>
+            </a:pPr>
+            <a:r>
+              <a:rPr lang="en-US" sz="1100" dirty="0">
+                <a:solidFill>
+                  <a:srgbClr val="1A1A2E"/>
+                </a:solidFill>
+                <a:latin typeface="Calibri" pitchFamily="34" charset="0"/>
+                <a:ea typeface="Calibri" pitchFamily="34" charset="-122"/>
+                <a:cs typeface="Calibri" pitchFamily="34" charset="-120"/>
+              </a:rPr>
+              <a:t>Identifier et éliminer les synonymes dans la liste fournie</a:t>
+            </a:r>
+            <a:endParaRPr lang="en-US" sz="1100" dirty="0"/>
+          </a:p>
+        </p:txBody>
+      </p:sp>
+      <p:sp>
+        <p:nvSpPr>
+          <p:cNvPr id="16" name="Shape 14"/>
+          <p:cNvSpPr/>
+          <p:nvPr/>
+        </p:nvSpPr>
+        <p:spPr>
+          <a:xfrm>
+            <a:off x="457200" y="2834640"/>
+            <a:ext cx="8229600" cy="566928"/>
+          </a:xfrm>
+          <a:prstGeom prst="rect">
+            <a:avLst/>
+          </a:prstGeom>
+          <a:solidFill>
+            <a:srgbClr val="FFFFFF"/>
+          </a:solidFill>
+          <a:ln/>
+          <a:effectLst>
+            <a:outerShdw sx="100000" sy="100000" kx="0" ky="0" algn="bl" rotWithShape="0" blurRad="50800" dist="25400" dir="8100000">
+              <a:srgbClr val="000000">
+                <a:alpha val="12000"/>
+              </a:srgbClr>
+            </a:outerShdw>
+          </a:effectLst>
+        </p:spPr>
+      </p:sp>
+      <p:sp>
+        <p:nvSpPr>
+          <p:cNvPr id="17" name="Shape 15"/>
+          <p:cNvSpPr/>
+          <p:nvPr/>
+        </p:nvSpPr>
+        <p:spPr>
+          <a:xfrm>
+            <a:off x="457200" y="2834640"/>
+            <a:ext cx="457200" cy="566928"/>
+          </a:xfrm>
+          <a:prstGeom prst="rect">
+            <a:avLst/>
+          </a:prstGeom>
+          <a:solidFill>
+            <a:srgbClr val="FF6F00"/>
+          </a:solidFill>
+          <a:ln/>
+        </p:spPr>
+      </p:sp>
+      <p:sp>
+        <p:nvSpPr>
+          <p:cNvPr id="18" name="Text 16"/>
+          <p:cNvSpPr/>
+          <p:nvPr/>
+        </p:nvSpPr>
+        <p:spPr>
+          <a:xfrm>
+            <a:off x="457200" y="2834640"/>
+            <a:ext cx="457200" cy="566928"/>
+          </a:xfrm>
+          <a:prstGeom prst="rect">
+            <a:avLst/>
+          </a:prstGeom>
+          <a:noFill/>
+          <a:ln/>
+        </p:spPr>
+        <p:txBody>
+          <a:bodyPr wrap="square" lIns="0" tIns="0" rIns="0" bIns="0" rtlCol="0" anchor="ctr"/>
+          <a:lstStyle/>
+          <a:p>
+            <a:pPr algn="ctr" indent="0" marL="0">
+              <a:buNone/>
+            </a:pPr>
+            <a:r>
+              <a:rPr lang="en-US" sz="1600" b="1" dirty="0">
+                <a:solidFill>
+                  <a:srgbClr val="FFFFFF"/>
+                </a:solidFill>
+                <a:latin typeface="Trebuchet MS" pitchFamily="34" charset="0"/>
+                <a:ea typeface="Trebuchet MS" pitchFamily="34" charset="-122"/>
+                <a:cs typeface="Trebuchet MS" pitchFamily="34" charset="-120"/>
+              </a:rPr>
+              <a:t>4</a:t>
+            </a:r>
+            <a:endParaRPr lang="en-US" sz="1600" dirty="0"/>
+          </a:p>
+        </p:txBody>
+      </p:sp>
+      <p:sp>
+        <p:nvSpPr>
+          <p:cNvPr id="19" name="Text 17"/>
+          <p:cNvSpPr/>
+          <p:nvPr/>
+        </p:nvSpPr>
+        <p:spPr>
+          <a:xfrm>
+            <a:off x="1051560" y="2834640"/>
+            <a:ext cx="7498080" cy="566928"/>
+          </a:xfrm>
+          <a:prstGeom prst="rect">
+            <a:avLst/>
+          </a:prstGeom>
+          <a:noFill/>
+          <a:ln/>
+        </p:spPr>
+        <p:txBody>
+          <a:bodyPr wrap="square" lIns="0" tIns="0" rIns="0" bIns="0" rtlCol="0" anchor="ctr"/>
+          <a:lstStyle/>
+          <a:p>
+            <a:pPr indent="0" marL="0">
+              <a:buNone/>
+            </a:pPr>
+            <a:r>
+              <a:rPr lang="en-US" sz="1100" dirty="0">
+                <a:solidFill>
+                  <a:srgbClr val="1A1A2E"/>
+                </a:solidFill>
+                <a:latin typeface="Calibri" pitchFamily="34" charset="0"/>
+                <a:ea typeface="Calibri" pitchFamily="34" charset="-122"/>
+                <a:cs typeface="Calibri" pitchFamily="34" charset="-120"/>
+              </a:rPr>
+              <a:t>Identifier 3 données CALCULÉES et indiquer la formule</a:t>
+            </a:r>
+            <a:endParaRPr lang="en-US" sz="1100" dirty="0"/>
+          </a:p>
+        </p:txBody>
+      </p:sp>
+      <p:sp>
+        <p:nvSpPr>
+          <p:cNvPr id="20" name="Shape 18"/>
+          <p:cNvSpPr/>
+          <p:nvPr/>
+        </p:nvSpPr>
+        <p:spPr>
+          <a:xfrm>
+            <a:off x="457200" y="3474720"/>
+            <a:ext cx="8229600" cy="566928"/>
+          </a:xfrm>
+          <a:prstGeom prst="rect">
+            <a:avLst/>
+          </a:prstGeom>
+          <a:solidFill>
+            <a:srgbClr val="FFFFFF"/>
+          </a:solidFill>
+          <a:ln/>
+          <a:effectLst>
+            <a:outerShdw sx="100000" sy="100000" kx="0" ky="0" algn="bl" rotWithShape="0" blurRad="50800" dist="25400" dir="8100000">
+              <a:srgbClr val="000000">
+                <a:alpha val="12000"/>
+              </a:srgbClr>
+            </a:outerShdw>
+          </a:effectLst>
+        </p:spPr>
+      </p:sp>
+      <p:sp>
+        <p:nvSpPr>
+          <p:cNvPr id="21" name="Shape 19"/>
+          <p:cNvSpPr/>
+          <p:nvPr/>
+        </p:nvSpPr>
+        <p:spPr>
+          <a:xfrm>
+            <a:off x="457200" y="3474720"/>
+            <a:ext cx="457200" cy="566928"/>
+          </a:xfrm>
+          <a:prstGeom prst="rect">
+            <a:avLst/>
+          </a:prstGeom>
+          <a:solidFill>
+            <a:srgbClr val="FF6F00"/>
+          </a:solidFill>
+          <a:ln/>
+        </p:spPr>
+      </p:sp>
+      <p:sp>
+        <p:nvSpPr>
+          <p:cNvPr id="22" name="Text 20"/>
+          <p:cNvSpPr/>
+          <p:nvPr/>
+        </p:nvSpPr>
+        <p:spPr>
+          <a:xfrm>
+            <a:off x="457200" y="3474720"/>
+            <a:ext cx="457200" cy="566928"/>
+          </a:xfrm>
+          <a:prstGeom prst="rect">
+            <a:avLst/>
+          </a:prstGeom>
+          <a:noFill/>
+          <a:ln/>
+        </p:spPr>
+        <p:txBody>
+          <a:bodyPr wrap="square" lIns="0" tIns="0" rIns="0" bIns="0" rtlCol="0" anchor="ctr"/>
+          <a:lstStyle/>
+          <a:p>
+            <a:pPr algn="ctr" indent="0" marL="0">
+              <a:buNone/>
+            </a:pPr>
+            <a:r>
+              <a:rPr lang="en-US" sz="1600" b="1" dirty="0">
+                <a:solidFill>
+                  <a:srgbClr val="FFFFFF"/>
+                </a:solidFill>
+                <a:latin typeface="Trebuchet MS" pitchFamily="34" charset="0"/>
+                <a:ea typeface="Trebuchet MS" pitchFamily="34" charset="-122"/>
+                <a:cs typeface="Trebuchet MS" pitchFamily="34" charset="-120"/>
+              </a:rPr>
+              <a:t>5</a:t>
+            </a:r>
+            <a:endParaRPr lang="en-US" sz="1600" dirty="0"/>
+          </a:p>
+        </p:txBody>
+      </p:sp>
+      <p:sp>
+        <p:nvSpPr>
+          <p:cNvPr id="23" name="Text 21"/>
+          <p:cNvSpPr/>
+          <p:nvPr/>
+        </p:nvSpPr>
+        <p:spPr>
+          <a:xfrm>
+            <a:off x="1051560" y="3474720"/>
+            <a:ext cx="7498080" cy="566928"/>
+          </a:xfrm>
+          <a:prstGeom prst="rect">
+            <a:avLst/>
+          </a:prstGeom>
+          <a:noFill/>
+          <a:ln/>
+        </p:spPr>
+        <p:txBody>
+          <a:bodyPr wrap="square" lIns="0" tIns="0" rIns="0" bIns="0" rtlCol="0" anchor="ctr"/>
+          <a:lstStyle/>
+          <a:p>
+            <a:pPr indent="0" marL="0">
+              <a:buNone/>
+            </a:pPr>
+            <a:r>
+              <a:rPr lang="en-US" sz="1100" dirty="0">
+                <a:solidFill>
+                  <a:srgbClr val="1A1A2E"/>
+                </a:solidFill>
+                <a:latin typeface="Calibri" pitchFamily="34" charset="0"/>
+                <a:ea typeface="Calibri" pitchFamily="34" charset="-122"/>
+                <a:cs typeface="Calibri" pitchFamily="34" charset="-120"/>
+              </a:rPr>
+              <a:t>Lister 5 règles de gestion supplémentaires pour SwissSound</a:t>
+            </a:r>
+            <a:endParaRPr lang="en-US" sz="1100" dirty="0"/>
+          </a:p>
+        </p:txBody>
+      </p:sp>
+      <p:sp>
+        <p:nvSpPr>
+          <p:cNvPr id="24" name="Shape 22"/>
+          <p:cNvSpPr/>
+          <p:nvPr/>
+        </p:nvSpPr>
+        <p:spPr>
+          <a:xfrm>
+            <a:off x="457200" y="4114800"/>
+            <a:ext cx="8229600" cy="566928"/>
+          </a:xfrm>
+          <a:prstGeom prst="rect">
+            <a:avLst/>
+          </a:prstGeom>
+          <a:solidFill>
+            <a:srgbClr val="FFFFFF"/>
+          </a:solidFill>
+          <a:ln/>
+          <a:effectLst>
+            <a:outerShdw sx="100000" sy="100000" kx="0" ky="0" algn="bl" rotWithShape="0" blurRad="50800" dist="25400" dir="8100000">
+              <a:srgbClr val="000000">
+                <a:alpha val="12000"/>
+              </a:srgbClr>
+            </a:outerShdw>
+          </a:effectLst>
+        </p:spPr>
+      </p:sp>
+      <p:sp>
+        <p:nvSpPr>
+          <p:cNvPr id="25" name="Shape 23"/>
+          <p:cNvSpPr/>
+          <p:nvPr/>
+        </p:nvSpPr>
+        <p:spPr>
+          <a:xfrm>
+            <a:off x="457200" y="4114800"/>
+            <a:ext cx="457200" cy="566928"/>
+          </a:xfrm>
+          <a:prstGeom prst="rect">
+            <a:avLst/>
+          </a:prstGeom>
+          <a:solidFill>
+            <a:srgbClr val="FF6F00"/>
+          </a:solidFill>
+          <a:ln/>
+        </p:spPr>
+      </p:sp>
+      <p:sp>
+        <p:nvSpPr>
+          <p:cNvPr id="26" name="Text 24"/>
+          <p:cNvSpPr/>
+          <p:nvPr/>
+        </p:nvSpPr>
+        <p:spPr>
+          <a:xfrm>
+            <a:off x="457200" y="4114800"/>
+            <a:ext cx="457200" cy="566928"/>
+          </a:xfrm>
+          <a:prstGeom prst="rect">
+            <a:avLst/>
+          </a:prstGeom>
+          <a:noFill/>
+          <a:ln/>
+        </p:spPr>
+        <p:txBody>
+          <a:bodyPr wrap="square" lIns="0" tIns="0" rIns="0" bIns="0" rtlCol="0" anchor="ctr"/>
+          <a:lstStyle/>
+          <a:p>
+            <a:pPr algn="ctr" indent="0" marL="0">
+              <a:buNone/>
+            </a:pPr>
+            <a:r>
+              <a:rPr lang="en-US" sz="1600" b="1" dirty="0">
+                <a:solidFill>
+                  <a:srgbClr val="FFFFFF"/>
+                </a:solidFill>
+                <a:latin typeface="Trebuchet MS" pitchFamily="34" charset="0"/>
+                <a:ea typeface="Trebuchet MS" pitchFamily="34" charset="-122"/>
+                <a:cs typeface="Trebuchet MS" pitchFamily="34" charset="-120"/>
+              </a:rPr>
+              <a:t>6</a:t>
+            </a:r>
+            <a:endParaRPr lang="en-US" sz="1600" dirty="0"/>
+          </a:p>
+        </p:txBody>
+      </p:sp>
+      <p:sp>
+        <p:nvSpPr>
+          <p:cNvPr id="27" name="Text 25"/>
+          <p:cNvSpPr/>
+          <p:nvPr/>
+        </p:nvSpPr>
+        <p:spPr>
+          <a:xfrm>
+            <a:off x="1051560" y="4114800"/>
+            <a:ext cx="7498080" cy="566928"/>
+          </a:xfrm>
+          <a:prstGeom prst="rect">
+            <a:avLst/>
+          </a:prstGeom>
+          <a:noFill/>
+          <a:ln/>
+        </p:spPr>
+        <p:txBody>
+          <a:bodyPr wrap="square" lIns="0" tIns="0" rIns="0" bIns="0" rtlCol="0" anchor="ctr"/>
+          <a:lstStyle/>
+          <a:p>
+            <a:pPr indent="0" marL="0">
+              <a:buNone/>
+            </a:pPr>
+            <a:r>
+              <a:rPr lang="en-US" sz="1100" dirty="0">
+                <a:solidFill>
+                  <a:srgbClr val="1A1A2E"/>
+                </a:solidFill>
+                <a:latin typeface="Calibri" pitchFamily="34" charset="0"/>
+                <a:ea typeface="Calibri" pitchFamily="34" charset="-122"/>
+                <a:cs typeface="Calibri" pitchFamily="34" charset="-120"/>
+              </a:rPr>
+              <a:t>DÉFI : trouver 5 règles de gestion 'cachées' non dites par le directeur</a:t>
+            </a:r>
+            <a:endParaRPr lang="en-US" sz="1100" dirty="0"/>
+          </a:p>
+        </p:txBody>
+      </p:sp>
+    </p:spTree>
+  </p:cSld>
+  <p:clrMapOvr>
+    <a:masterClrMapping/>
+  </p:clrMapOvr>
+</p:sld>
+</file>
+
+<file path=ppt/slides/slide8.xml><?xml version="1.0" encoding="utf-8"?>
+<p:sld xmlns:a="http://schemas.openxmlformats.org/drawingml/2006/main" xmlns:r="http://schemas.openxmlformats.org/officeDocument/2006/relationships" xmlns:p="http://schemas.openxmlformats.org/presentationml/2006/main">
+  <p:cSld name="Slide 8">
     <p:bg>
       <p:bgPr>
         <a:solidFill>
@@ -3834,39 +8418,51 @@
           <a:chExt cx="0" cy="0"/>
         </a:xfrm>
       </p:grpSpPr>
-      <p:pic>
-        <p:nvPicPr>
-          <p:cNvPr id="2" name="Image 0" descr="preencoded.png">    </p:cNvPr>
-          <p:cNvPicPr>
-            <a:picLocks noChangeAspect="1"/>
-          </p:cNvPicPr>
-          <p:nvPr/>
-        </p:nvPicPr>
-        <p:blipFill>
-          <a:blip r:embed="rId1"/>
-          <a:stretch>
-            <a:fillRect/>
-          </a:stretch>
-        </p:blipFill>
-        <p:spPr>
-          <a:xfrm>
-            <a:off x="4023360" y="457200"/>
-            <a:ext cx="1097280" cy="1097280"/>
-          </a:xfrm>
-          <a:prstGeom prst="rect">
-            <a:avLst/>
-          </a:prstGeom>
-        </p:spPr>
-      </p:pic>
-      <p:sp>
-        <p:nvSpPr>
-          <p:cNvPr id="3" name="Text 0"/>
-          <p:cNvSpPr/>
-          <p:nvPr/>
-        </p:nvSpPr>
-        <p:spPr>
-          <a:xfrm>
-            <a:off x="457200" y="1737360"/>
+      <p:sp>
+        <p:nvSpPr>
+          <p:cNvPr id="2" name="Text 0"/>
+          <p:cNvSpPr/>
+          <p:nvPr/>
+        </p:nvSpPr>
+        <p:spPr>
+          <a:xfrm>
+            <a:off x="3840480" y="457200"/>
+            <a:ext cx="1463040" cy="1097280"/>
+          </a:xfrm>
+          <a:prstGeom prst="rect">
+            <a:avLst/>
+          </a:prstGeom>
+          <a:noFill/>
+          <a:ln/>
+        </p:spPr>
+        <p:txBody>
+          <a:bodyPr wrap="square" lIns="0" tIns="0" rIns="0" bIns="0" rtlCol="0" anchor="ctr"/>
+          <a:lstStyle/>
+          <a:p>
+            <a:pPr algn="ctr" indent="0" marL="0">
+              <a:buNone/>
+            </a:pPr>
+            <a:r>
+              <a:rPr lang="en-US" sz="6000" dirty="0">
+                <a:solidFill>
+                  <a:srgbClr val="000000"/>
+                </a:solidFill>
+              </a:rPr>
+              <a:t>🎮</a:t>
+            </a:r>
+            <a:endParaRPr lang="en-US" sz="6000" dirty="0"/>
+          </a:p>
+        </p:txBody>
+      </p:sp>
+      <p:sp>
+        <p:nvSpPr>
+          <p:cNvPr id="3" name="Text 1"/>
+          <p:cNvSpPr/>
+          <p:nvPr/>
+        </p:nvSpPr>
+        <p:spPr>
+          <a:xfrm>
+            <a:off x="457200" y="1645920"/>
             <a:ext cx="8229600" cy="548640"/>
           </a:xfrm>
           <a:prstGeom prst="rect">
@@ -3891,7 +8487,7 @@
                 <a:ea typeface="Trebuchet MS" pitchFamily="34" charset="-122"/>
                 <a:cs typeface="Trebuchet MS" pitchFamily="34" charset="-120"/>
               </a:rPr>
-              <a:t>🎮 Mini-jeu : Module 3</a:t>
+              <a:t>Mini-jeu : Le Collectionneur</a:t>
             </a:r>
             <a:endParaRPr lang="en-US" sz="2600" dirty="0"/>
           </a:p>
@@ -3899,14 +8495,14 @@
       </p:sp>
       <p:sp>
         <p:nvSpPr>
-          <p:cNvPr id="4" name="Text 1"/>
-          <p:cNvSpPr/>
-          <p:nvPr/>
-        </p:nvSpPr>
-        <p:spPr>
-          <a:xfrm>
-            <a:off x="914400" y="2377440"/>
-            <a:ext cx="7315200" cy="457200"/>
+          <p:cNvPr id="4" name="Text 2"/>
+          <p:cNvSpPr/>
+          <p:nvPr/>
+        </p:nvSpPr>
+        <p:spPr>
+          <a:xfrm>
+            <a:off x="1371600" y="2286000"/>
+            <a:ext cx="6400800" cy="731520"/>
           </a:xfrm>
           <a:prstGeom prst="rect">
             <a:avLst/>
@@ -3930,7 +8526,7 @@
                 <a:ea typeface="Calibri" pitchFamily="34" charset="-122"/>
                 <a:cs typeface="Calibri" pitchFamily="34" charset="-120"/>
               </a:rPr>
-              <a:t>Quiz interactif + Score + Correction automatique</a:t>
+              <a:t>Classez : donnée élémentaire ou calculée ?</a:t>
             </a:r>
             <a:endParaRPr lang="en-US" sz="1400" dirty="0"/>
           </a:p>
@@ -3938,13 +8534,13 @@
       </p:sp>
       <p:sp>
         <p:nvSpPr>
-          <p:cNvPr id="5" name="Shape 2"/>
-          <p:cNvSpPr/>
-          <p:nvPr/>
-        </p:nvSpPr>
-        <p:spPr>
-          <a:xfrm>
-            <a:off x="2286000" y="3200400"/>
+          <p:cNvPr id="5" name="Shape 3"/>
+          <p:cNvSpPr/>
+          <p:nvPr/>
+        </p:nvSpPr>
+        <p:spPr>
+          <a:xfrm>
+            <a:off x="2286000" y="3291840"/>
             <a:ext cx="4572000" cy="548640"/>
           </a:xfrm>
           <a:prstGeom prst="rect">
@@ -3958,13 +8554,13 @@
       </p:sp>
       <p:sp>
         <p:nvSpPr>
-          <p:cNvPr id="6" name="Text 3"/>
-          <p:cNvSpPr/>
-          <p:nvPr/>
-        </p:nvSpPr>
-        <p:spPr>
-          <a:xfrm>
-            <a:off x="2286000" y="3200400"/>
+          <p:cNvPr id="6" name="Text 4"/>
+          <p:cNvSpPr/>
+          <p:nvPr/>
+        </p:nvSpPr>
+        <p:spPr>
+          <a:xfrm>
+            <a:off x="2286000" y="3291840"/>
             <a:ext cx="4572000" cy="548640"/>
           </a:xfrm>
           <a:prstGeom prst="rect">
@@ -3989,9 +8585,48 @@
                 <a:ea typeface="Trebuchet MS" pitchFamily="34" charset="-122"/>
                 <a:cs typeface="Trebuchet MS" pitchFamily="34" charset="-120"/>
               </a:rPr>
-              <a:t>▶  Lancer le jeu sur Vercel</a:t>
+              <a:t>▶  Lancer le jeu</a:t>
             </a:r>
             <a:endParaRPr lang="en-US" sz="1800" dirty="0"/>
+          </a:p>
+        </p:txBody>
+      </p:sp>
+      <p:sp>
+        <p:nvSpPr>
+          <p:cNvPr id="7" name="Text 5"/>
+          <p:cNvSpPr/>
+          <p:nvPr/>
+        </p:nvSpPr>
+        <p:spPr>
+          <a:xfrm>
+            <a:off x="914400" y="4114800"/>
+            <a:ext cx="7315200" cy="365760"/>
+          </a:xfrm>
+          <a:prstGeom prst="rect">
+            <a:avLst/>
+          </a:prstGeom>
+          <a:noFill/>
+          <a:ln/>
+        </p:spPr>
+        <p:txBody>
+          <a:bodyPr wrap="square" lIns="0" tIns="0" rIns="0" bIns="0" rtlCol="0" anchor="ctr"/>
+          <a:lstStyle/>
+          <a:p>
+            <a:pPr algn="ctr" indent="0" marL="0">
+              <a:buNone/>
+            </a:pPr>
+            <a:r>
+              <a:rPr lang="en-US" sz="1100" dirty="0">
+                <a:solidFill>
+                  <a:srgbClr val="8888AA"/>
+                </a:solidFill>
+                <a:latin typeface="Calibri" pitchFamily="34" charset="0"/>
+                <a:ea typeface="Calibri" pitchFamily="34" charset="-122"/>
+                <a:cs typeface="Calibri" pitchFamily="34" charset="-120"/>
+              </a:rPr>
+              <a:t>Score + Correction automatique + Historique</a:t>
+            </a:r>
+            <a:endParaRPr lang="en-US" sz="1100" dirty="0"/>
           </a:p>
         </p:txBody>
       </p:sp>
@@ -4003,9 +8638,9 @@
 </p:sld>
 </file>
 
-<file path=ppt/slides/slide7.xml><?xml version="1.0" encoding="utf-8"?>
+<file path=ppt/slides/slide9.xml><?xml version="1.0" encoding="utf-8"?>
 <p:sld xmlns:a="http://schemas.openxmlformats.org/drawingml/2006/main" xmlns:r="http://schemas.openxmlformats.org/officeDocument/2006/relationships" xmlns:p="http://schemas.openxmlformats.org/presentationml/2006/main">
-  <p:cSld name="Slide 7">
+  <p:cSld name="Slide 9">
     <p:bg>
       <p:bgPr>
         <a:solidFill>
@@ -4035,8 +8670,8 @@
         </p:nvSpPr>
         <p:spPr>
           <a:xfrm>
-            <a:off x="457200" y="228600"/>
-            <a:ext cx="8229600" cy="457200"/>
+            <a:off x="457200" y="137160"/>
+            <a:ext cx="5486400" cy="411480"/>
           </a:xfrm>
           <a:prstGeom prst="rect">
             <a:avLst/>
@@ -4052,7 +8687,7 @@
               <a:buNone/>
             </a:pPr>
             <a:r>
-              <a:rPr lang="en-US" sz="2000" b="1" dirty="0">
+              <a:rPr lang="en-US" sz="1800" b="1" dirty="0">
                 <a:solidFill>
                   <a:srgbClr val="1B5E20"/>
                 </a:solidFill>
@@ -4060,9 +8695,9 @@
                 <a:ea typeface="Trebuchet MS" pitchFamily="34" charset="-122"/>
                 <a:cs typeface="Trebuchet MS" pitchFamily="34" charset="-120"/>
               </a:rPr>
-              <a:t>📋 Mémo Module 3 — Dictionnaire des données</a:t>
+              <a:t>📋 Mémo Module 3</a:t>
             </a:r>
-            <a:endParaRPr lang="en-US" sz="2000" dirty="0"/>
+            <a:endParaRPr lang="en-US" sz="1800" dirty="0"/>
           </a:p>
         </p:txBody>
       </p:sp>
@@ -4074,8 +8709,8 @@
         </p:nvSpPr>
         <p:spPr>
           <a:xfrm>
-            <a:off x="457200" y="731520"/>
-            <a:ext cx="8229600" cy="320040"/>
+            <a:off x="457200" y="548640"/>
+            <a:ext cx="8229600" cy="274320"/>
           </a:xfrm>
           <a:prstGeom prst="rect">
             <a:avLst/>
@@ -4094,8 +8729,8 @@
         </p:nvSpPr>
         <p:spPr>
           <a:xfrm>
-            <a:off x="640080" y="731520"/>
-            <a:ext cx="7772400" cy="320040"/>
+            <a:off x="640080" y="548640"/>
+            <a:ext cx="7772400" cy="274320"/>
           </a:xfrm>
           <a:prstGeom prst="rect">
             <a:avLst/>
@@ -4111,7 +8746,7 @@
               <a:buNone/>
             </a:pPr>
             <a:r>
-              <a:rPr lang="en-US" sz="1000" b="1" dirty="0">
+              <a:rPr lang="en-US" sz="900" b="1" dirty="0">
                 <a:solidFill>
                   <a:srgbClr val="E65100"/>
                 </a:solidFill>
@@ -4119,9 +8754,9 @@
                 <a:ea typeface="Calibri" pitchFamily="34" charset="-122"/>
                 <a:cs typeface="Calibri" pitchFamily="34" charset="-120"/>
               </a:rPr>
-              <a:t>🔒 Ce mémo se débloque quand toutes les phases du module sont terminées !</a:t>
+              <a:t>🔒 Déblocable après complétion de toutes les phases</a:t>
             </a:r>
-            <a:endParaRPr lang="en-US" sz="1000" dirty="0"/>
+            <a:endParaRPr lang="en-US" sz="900" dirty="0"/>
           </a:p>
         </p:txBody>
       </p:sp>
@@ -4133,8 +8768,8 @@
         </p:nvSpPr>
         <p:spPr>
           <a:xfrm>
-            <a:off x="457200" y="1188720"/>
-            <a:ext cx="8229600" cy="713232"/>
+            <a:off x="457200" y="960120"/>
+            <a:ext cx="2286000" cy="475488"/>
           </a:xfrm>
           <a:prstGeom prst="rect">
             <a:avLst/>
@@ -4153,8 +8788,8 @@
         </p:nvSpPr>
         <p:spPr>
           <a:xfrm>
-            <a:off x="640080" y="1188720"/>
-            <a:ext cx="2560320" cy="713232"/>
+            <a:off x="548640" y="960120"/>
+            <a:ext cx="2103120" cy="475488"/>
           </a:xfrm>
           <a:prstGeom prst="rect">
             <a:avLst/>
@@ -4170,7 +8805,7 @@
               <a:buNone/>
             </a:pPr>
             <a:r>
-              <a:rPr lang="en-US" sz="1000" b="1" dirty="0">
+              <a:rPr lang="en-US" sz="900" b="1" dirty="0">
                 <a:solidFill>
                   <a:srgbClr val="1B5E20"/>
                 </a:solidFill>
@@ -4178,22 +8813,42 @@
                 <a:ea typeface="Trebuchet MS" pitchFamily="34" charset="-122"/>
                 <a:cs typeface="Trebuchet MS" pitchFamily="34" charset="-120"/>
               </a:rPr>
-              <a:t>Qu'est-ce qu'un dictionnaire des données ?</a:t>
+              <a:t>Dictionnaire des données</a:t>
             </a:r>
-            <a:endParaRPr lang="en-US" sz="1000" dirty="0"/>
-          </a:p>
-        </p:txBody>
-      </p:sp>
-      <p:sp>
-        <p:nvSpPr>
-          <p:cNvPr id="7" name="Text 5"/>
-          <p:cNvSpPr/>
-          <p:nvPr/>
-        </p:nvSpPr>
-        <p:spPr>
-          <a:xfrm>
-            <a:off x="3291840" y="1188720"/>
-            <a:ext cx="5212080" cy="713232"/>
+            <a:endParaRPr lang="en-US" sz="900" dirty="0"/>
+          </a:p>
+        </p:txBody>
+      </p:sp>
+      <p:sp>
+        <p:nvSpPr>
+          <p:cNvPr id="7" name="Shape 5"/>
+          <p:cNvSpPr/>
+          <p:nvPr/>
+        </p:nvSpPr>
+        <p:spPr>
+          <a:xfrm>
+            <a:off x="2743200" y="960120"/>
+            <a:ext cx="5943600" cy="475488"/>
+          </a:xfrm>
+          <a:prstGeom prst="rect">
+            <a:avLst/>
+          </a:prstGeom>
+          <a:solidFill>
+            <a:srgbClr val="E8F5E9"/>
+          </a:solidFill>
+          <a:ln/>
+        </p:spPr>
+      </p:sp>
+      <p:sp>
+        <p:nvSpPr>
+          <p:cNvPr id="8" name="Text 6"/>
+          <p:cNvSpPr/>
+          <p:nvPr/>
+        </p:nvSpPr>
+        <p:spPr>
+          <a:xfrm>
+            <a:off x="2834640" y="960120"/>
+            <a:ext cx="5760720" cy="475488"/>
           </a:xfrm>
           <a:prstGeom prst="rect">
             <a:avLst/>
@@ -4217,7 +8872,7 @@
                 <a:ea typeface="Calibri" pitchFamily="34" charset="-122"/>
                 <a:cs typeface="Calibri" pitchFamily="34" charset="-120"/>
               </a:rPr>
-              <a:t>Liste EXHAUSTIVE de toutes les données du système | Pour chaque donnée : nom, description, type, format, longueur | Prem...</a:t>
+              <a:t>Liste exhaustive de toutes les données avec nom, type, format, règle</a:t>
             </a:r>
             <a:endParaRPr lang="en-US" sz="900" dirty="0"/>
           </a:p>
@@ -4225,34 +8880,34 @@
       </p:sp>
       <p:sp>
         <p:nvSpPr>
-          <p:cNvPr id="8" name="Shape 6"/>
-          <p:cNvSpPr/>
-          <p:nvPr/>
-        </p:nvSpPr>
-        <p:spPr>
-          <a:xfrm>
-            <a:off x="457200" y="1965960"/>
-            <a:ext cx="8229600" cy="713232"/>
-          </a:xfrm>
-          <a:prstGeom prst="rect">
-            <a:avLst/>
-          </a:prstGeom>
-          <a:solidFill>
-            <a:srgbClr val="FFFFFF"/>
-          </a:solidFill>
-          <a:ln/>
-        </p:spPr>
-      </p:sp>
-      <p:sp>
-        <p:nvSpPr>
-          <p:cNvPr id="9" name="Text 7"/>
-          <p:cNvSpPr/>
-          <p:nvPr/>
-        </p:nvSpPr>
-        <p:spPr>
-          <a:xfrm>
-            <a:off x="640080" y="1965960"/>
-            <a:ext cx="2560320" cy="713232"/>
+          <p:cNvPr id="9" name="Shape 7"/>
+          <p:cNvSpPr/>
+          <p:nvPr/>
+        </p:nvSpPr>
+        <p:spPr>
+          <a:xfrm>
+            <a:off x="457200" y="1463040"/>
+            <a:ext cx="2286000" cy="475488"/>
+          </a:xfrm>
+          <a:prstGeom prst="rect">
+            <a:avLst/>
+          </a:prstGeom>
+          <a:solidFill>
+            <a:srgbClr val="F0F0F0"/>
+          </a:solidFill>
+          <a:ln/>
+        </p:spPr>
+      </p:sp>
+      <p:sp>
+        <p:nvSpPr>
+          <p:cNvPr id="10" name="Text 8"/>
+          <p:cNvSpPr/>
+          <p:nvPr/>
+        </p:nvSpPr>
+        <p:spPr>
+          <a:xfrm>
+            <a:off x="548640" y="1463040"/>
+            <a:ext cx="2103120" cy="475488"/>
           </a:xfrm>
           <a:prstGeom prst="rect">
             <a:avLst/>
@@ -4268,7 +8923,7 @@
               <a:buNone/>
             </a:pPr>
             <a:r>
-              <a:rPr lang="en-US" sz="1000" b="1" dirty="0">
+              <a:rPr lang="en-US" sz="900" b="1" dirty="0">
                 <a:solidFill>
                   <a:srgbClr val="1B5E20"/>
                 </a:solidFill>
@@ -4276,22 +8931,42 @@
                 <a:ea typeface="Trebuchet MS" pitchFamily="34" charset="-122"/>
                 <a:cs typeface="Trebuchet MS" pitchFamily="34" charset="-120"/>
               </a:rPr>
-              <a:t>Donnée élémentaire vs calculée</a:t>
+              <a:t>Élémentaire</a:t>
             </a:r>
-            <a:endParaRPr lang="en-US" sz="1000" dirty="0"/>
-          </a:p>
-        </p:txBody>
-      </p:sp>
-      <p:sp>
-        <p:nvSpPr>
-          <p:cNvPr id="10" name="Text 8"/>
-          <p:cNvSpPr/>
-          <p:nvPr/>
-        </p:nvSpPr>
-        <p:spPr>
-          <a:xfrm>
-            <a:off x="3291840" y="1965960"/>
-            <a:ext cx="5212080" cy="713232"/>
+            <a:endParaRPr lang="en-US" sz="900" dirty="0"/>
+          </a:p>
+        </p:txBody>
+      </p:sp>
+      <p:sp>
+        <p:nvSpPr>
+          <p:cNvPr id="11" name="Shape 9"/>
+          <p:cNvSpPr/>
+          <p:nvPr/>
+        </p:nvSpPr>
+        <p:spPr>
+          <a:xfrm>
+            <a:off x="2743200" y="1463040"/>
+            <a:ext cx="5943600" cy="475488"/>
+          </a:xfrm>
+          <a:prstGeom prst="rect">
+            <a:avLst/>
+          </a:prstGeom>
+          <a:solidFill>
+            <a:srgbClr val="F0F0F0"/>
+          </a:solidFill>
+          <a:ln/>
+        </p:spPr>
+      </p:sp>
+      <p:sp>
+        <p:nvSpPr>
+          <p:cNvPr id="12" name="Text 10"/>
+          <p:cNvSpPr/>
+          <p:nvPr/>
+        </p:nvSpPr>
+        <p:spPr>
+          <a:xfrm>
+            <a:off x="2834640" y="1463040"/>
+            <a:ext cx="5760720" cy="475488"/>
           </a:xfrm>
           <a:prstGeom prst="rect">
             <a:avLst/>
@@ -4315,7 +8990,7 @@
                 <a:ea typeface="Calibri" pitchFamily="34" charset="-122"/>
                 <a:cs typeface="Calibri" pitchFamily="34" charset="-120"/>
               </a:rPr>
-              <a:t>Élémentaire : stockée directement (nom, date_naissance, tarif) | Calculée : dérivée d'autres données (âge = aujourd'hui ...</a:t>
+              <a:t>Donnée stockée directement (nom, email, date)</a:t>
             </a:r>
             <a:endParaRPr lang="en-US" sz="900" dirty="0"/>
           </a:p>
@@ -4323,14 +8998,14 @@
       </p:sp>
       <p:sp>
         <p:nvSpPr>
-          <p:cNvPr id="11" name="Shape 9"/>
-          <p:cNvSpPr/>
-          <p:nvPr/>
-        </p:nvSpPr>
-        <p:spPr>
-          <a:xfrm>
-            <a:off x="457200" y="2743200"/>
-            <a:ext cx="8229600" cy="713232"/>
+          <p:cNvPr id="13" name="Shape 11"/>
+          <p:cNvSpPr/>
+          <p:nvPr/>
+        </p:nvSpPr>
+        <p:spPr>
+          <a:xfrm>
+            <a:off x="457200" y="1965960"/>
+            <a:ext cx="2286000" cy="475488"/>
           </a:xfrm>
           <a:prstGeom prst="rect">
             <a:avLst/>
@@ -4343,14 +9018,14 @@
       </p:sp>
       <p:sp>
         <p:nvSpPr>
-          <p:cNvPr id="12" name="Text 10"/>
-          <p:cNvSpPr/>
-          <p:nvPr/>
-        </p:nvSpPr>
-        <p:spPr>
-          <a:xfrm>
-            <a:off x="640080" y="2743200"/>
-            <a:ext cx="2560320" cy="713232"/>
+          <p:cNvPr id="14" name="Text 12"/>
+          <p:cNvSpPr/>
+          <p:nvPr/>
+        </p:nvSpPr>
+        <p:spPr>
+          <a:xfrm>
+            <a:off x="548640" y="1965960"/>
+            <a:ext cx="2103120" cy="475488"/>
           </a:xfrm>
           <a:prstGeom prst="rect">
             <a:avLst/>
@@ -4366,7 +9041,7 @@
               <a:buNone/>
             </a:pPr>
             <a:r>
-              <a:rPr lang="en-US" sz="1000" b="1" dirty="0">
+              <a:rPr lang="en-US" sz="900" b="1" dirty="0">
                 <a:solidFill>
                   <a:srgbClr val="1B5E20"/>
                 </a:solidFill>
@@ -4374,22 +9049,42 @@
                 <a:ea typeface="Trebuchet MS" pitchFamily="34" charset="-122"/>
                 <a:cs typeface="Trebuchet MS" pitchFamily="34" charset="-120"/>
               </a:rPr>
-              <a:t>Éliminer synonymes et polysèmes</a:t>
+              <a:t>Calculée</a:t>
             </a:r>
-            <a:endParaRPr lang="en-US" sz="1000" dirty="0"/>
-          </a:p>
-        </p:txBody>
-      </p:sp>
-      <p:sp>
-        <p:nvSpPr>
-          <p:cNvPr id="13" name="Text 11"/>
-          <p:cNvSpPr/>
-          <p:nvPr/>
-        </p:nvSpPr>
-        <p:spPr>
-          <a:xfrm>
-            <a:off x="3291840" y="2743200"/>
-            <a:ext cx="5212080" cy="713232"/>
+            <a:endParaRPr lang="en-US" sz="900" dirty="0"/>
+          </a:p>
+        </p:txBody>
+      </p:sp>
+      <p:sp>
+        <p:nvSpPr>
+          <p:cNvPr id="15" name="Shape 13"/>
+          <p:cNvSpPr/>
+          <p:nvPr/>
+        </p:nvSpPr>
+        <p:spPr>
+          <a:xfrm>
+            <a:off x="2743200" y="1965960"/>
+            <a:ext cx="5943600" cy="475488"/>
+          </a:xfrm>
+          <a:prstGeom prst="rect">
+            <a:avLst/>
+          </a:prstGeom>
+          <a:solidFill>
+            <a:srgbClr val="E8F5E9"/>
+          </a:solidFill>
+          <a:ln/>
+        </p:spPr>
+      </p:sp>
+      <p:sp>
+        <p:nvSpPr>
+          <p:cNvPr id="16" name="Text 14"/>
+          <p:cNvSpPr/>
+          <p:nvPr/>
+        </p:nvSpPr>
+        <p:spPr>
+          <a:xfrm>
+            <a:off x="2834640" y="1965960"/>
+            <a:ext cx="5760720" cy="475488"/>
           </a:xfrm>
           <a:prstGeom prst="rect">
             <a:avLst/>
@@ -4413,7 +9108,7 @@
                 <a:ea typeface="Calibri" pitchFamily="34" charset="-122"/>
                 <a:cs typeface="Calibri" pitchFamily="34" charset="-120"/>
               </a:rPr>
-              <a:t>Synonyme : 2 noms pour la même donnée (téléphone = numéro = portable) | → Choisir UN seul nom standardisé | Polysème : 1...</a:t>
+              <a:t>Dérivée d'autres données — NE PAS stocker (sauf exception)</a:t>
             </a:r>
             <a:endParaRPr lang="en-US" sz="900" dirty="0"/>
           </a:p>
@@ -4421,34 +9116,34 @@
       </p:sp>
       <p:sp>
         <p:nvSpPr>
-          <p:cNvPr id="14" name="Shape 12"/>
-          <p:cNvSpPr/>
-          <p:nvPr/>
-        </p:nvSpPr>
-        <p:spPr>
-          <a:xfrm>
-            <a:off x="457200" y="3520440"/>
-            <a:ext cx="8229600" cy="713232"/>
-          </a:xfrm>
-          <a:prstGeom prst="rect">
-            <a:avLst/>
-          </a:prstGeom>
-          <a:solidFill>
-            <a:srgbClr val="FFFFFF"/>
-          </a:solidFill>
-          <a:ln/>
-        </p:spPr>
-      </p:sp>
-      <p:sp>
-        <p:nvSpPr>
-          <p:cNvPr id="15" name="Text 13"/>
-          <p:cNvSpPr/>
-          <p:nvPr/>
-        </p:nvSpPr>
-        <p:spPr>
-          <a:xfrm>
-            <a:off x="640080" y="3520440"/>
-            <a:ext cx="2560320" cy="713232"/>
+          <p:cNvPr id="17" name="Shape 15"/>
+          <p:cNvSpPr/>
+          <p:nvPr/>
+        </p:nvSpPr>
+        <p:spPr>
+          <a:xfrm>
+            <a:off x="457200" y="2468880"/>
+            <a:ext cx="2286000" cy="475488"/>
+          </a:xfrm>
+          <a:prstGeom prst="rect">
+            <a:avLst/>
+          </a:prstGeom>
+          <a:solidFill>
+            <a:srgbClr val="F0F0F0"/>
+          </a:solidFill>
+          <a:ln/>
+        </p:spPr>
+      </p:sp>
+      <p:sp>
+        <p:nvSpPr>
+          <p:cNvPr id="18" name="Text 16"/>
+          <p:cNvSpPr/>
+          <p:nvPr/>
+        </p:nvSpPr>
+        <p:spPr>
+          <a:xfrm>
+            <a:off x="548640" y="2468880"/>
+            <a:ext cx="2103120" cy="475488"/>
           </a:xfrm>
           <a:prstGeom prst="rect">
             <a:avLst/>
@@ -4464,7 +9159,7 @@
               <a:buNone/>
             </a:pPr>
             <a:r>
-              <a:rPr lang="en-US" sz="1000" b="1" dirty="0">
+              <a:rPr lang="en-US" sz="900" b="1" dirty="0">
                 <a:solidFill>
                   <a:srgbClr val="1B5E20"/>
                 </a:solidFill>
@@ -4472,22 +9167,42 @@
                 <a:ea typeface="Trebuchet MS" pitchFamily="34" charset="-122"/>
                 <a:cs typeface="Trebuchet MS" pitchFamily="34" charset="-120"/>
               </a:rPr>
-              <a:t>Template du DD — SwissSound</a:t>
+              <a:t>Synonyme</a:t>
             </a:r>
-            <a:endParaRPr lang="en-US" sz="1000" dirty="0"/>
-          </a:p>
-        </p:txBody>
-      </p:sp>
-      <p:sp>
-        <p:nvSpPr>
-          <p:cNvPr id="16" name="Text 14"/>
-          <p:cNvSpPr/>
-          <p:nvPr/>
-        </p:nvSpPr>
-        <p:spPr>
-          <a:xfrm>
-            <a:off x="3291840" y="3520440"/>
-            <a:ext cx="5212080" cy="713232"/>
+            <a:endParaRPr lang="en-US" sz="900" dirty="0"/>
+          </a:p>
+        </p:txBody>
+      </p:sp>
+      <p:sp>
+        <p:nvSpPr>
+          <p:cNvPr id="19" name="Shape 17"/>
+          <p:cNvSpPr/>
+          <p:nvPr/>
+        </p:nvSpPr>
+        <p:spPr>
+          <a:xfrm>
+            <a:off x="2743200" y="2468880"/>
+            <a:ext cx="5943600" cy="475488"/>
+          </a:xfrm>
+          <a:prstGeom prst="rect">
+            <a:avLst/>
+          </a:prstGeom>
+          <a:solidFill>
+            <a:srgbClr val="F0F0F0"/>
+          </a:solidFill>
+          <a:ln/>
+        </p:spPr>
+      </p:sp>
+      <p:sp>
+        <p:nvSpPr>
+          <p:cNvPr id="20" name="Text 18"/>
+          <p:cNvSpPr/>
+          <p:nvPr/>
+        </p:nvSpPr>
+        <p:spPr>
+          <a:xfrm>
+            <a:off x="2834640" y="2468880"/>
+            <a:ext cx="5760720" cy="475488"/>
           </a:xfrm>
           <a:prstGeom prst="rect">
             <a:avLst/>
@@ -4511,7 +9226,243 @@
                 <a:ea typeface="Calibri" pitchFamily="34" charset="-122"/>
                 <a:cs typeface="Calibri" pitchFamily="34" charset="-120"/>
               </a:rPr>
-              <a:t>| Nom | Description | Type | Format | Longueur | Règle | | | id_artiste | Identifiant unique | Élémentaire | Entier | - ...</a:t>
+              <a:t>2 noms pour 1 donnée → standardiser</a:t>
+            </a:r>
+            <a:endParaRPr lang="en-US" sz="900" dirty="0"/>
+          </a:p>
+        </p:txBody>
+      </p:sp>
+      <p:sp>
+        <p:nvSpPr>
+          <p:cNvPr id="21" name="Shape 19"/>
+          <p:cNvSpPr/>
+          <p:nvPr/>
+        </p:nvSpPr>
+        <p:spPr>
+          <a:xfrm>
+            <a:off x="457200" y="2971800"/>
+            <a:ext cx="2286000" cy="475488"/>
+          </a:xfrm>
+          <a:prstGeom prst="rect">
+            <a:avLst/>
+          </a:prstGeom>
+          <a:solidFill>
+            <a:srgbClr val="E8F5E9"/>
+          </a:solidFill>
+          <a:ln/>
+        </p:spPr>
+      </p:sp>
+      <p:sp>
+        <p:nvSpPr>
+          <p:cNvPr id="22" name="Text 20"/>
+          <p:cNvSpPr/>
+          <p:nvPr/>
+        </p:nvSpPr>
+        <p:spPr>
+          <a:xfrm>
+            <a:off x="548640" y="2971800"/>
+            <a:ext cx="2103120" cy="475488"/>
+          </a:xfrm>
+          <a:prstGeom prst="rect">
+            <a:avLst/>
+          </a:prstGeom>
+          <a:noFill/>
+          <a:ln/>
+        </p:spPr>
+        <p:txBody>
+          <a:bodyPr wrap="square" lIns="0" tIns="0" rIns="0" bIns="0" rtlCol="0" anchor="ctr"/>
+          <a:lstStyle/>
+          <a:p>
+            <a:pPr indent="0" marL="0">
+              <a:buNone/>
+            </a:pPr>
+            <a:r>
+              <a:rPr lang="en-US" sz="900" b="1" dirty="0">
+                <a:solidFill>
+                  <a:srgbClr val="1B5E20"/>
+                </a:solidFill>
+                <a:latin typeface="Trebuchet MS" pitchFamily="34" charset="0"/>
+                <a:ea typeface="Trebuchet MS" pitchFamily="34" charset="-122"/>
+                <a:cs typeface="Trebuchet MS" pitchFamily="34" charset="-120"/>
+              </a:rPr>
+              <a:t>Polysème</a:t>
+            </a:r>
+            <a:endParaRPr lang="en-US" sz="900" dirty="0"/>
+          </a:p>
+        </p:txBody>
+      </p:sp>
+      <p:sp>
+        <p:nvSpPr>
+          <p:cNvPr id="23" name="Shape 21"/>
+          <p:cNvSpPr/>
+          <p:nvPr/>
+        </p:nvSpPr>
+        <p:spPr>
+          <a:xfrm>
+            <a:off x="2743200" y="2971800"/>
+            <a:ext cx="5943600" cy="475488"/>
+          </a:xfrm>
+          <a:prstGeom prst="rect">
+            <a:avLst/>
+          </a:prstGeom>
+          <a:solidFill>
+            <a:srgbClr val="E8F5E9"/>
+          </a:solidFill>
+          <a:ln/>
+        </p:spPr>
+      </p:sp>
+      <p:sp>
+        <p:nvSpPr>
+          <p:cNvPr id="24" name="Text 22"/>
+          <p:cNvSpPr/>
+          <p:nvPr/>
+        </p:nvSpPr>
+        <p:spPr>
+          <a:xfrm>
+            <a:off x="2834640" y="2971800"/>
+            <a:ext cx="5760720" cy="475488"/>
+          </a:xfrm>
+          <a:prstGeom prst="rect">
+            <a:avLst/>
+          </a:prstGeom>
+          <a:noFill/>
+          <a:ln/>
+        </p:spPr>
+        <p:txBody>
+          <a:bodyPr wrap="square" lIns="0" tIns="0" rIns="0" bIns="0" rtlCol="0" anchor="ctr"/>
+          <a:lstStyle/>
+          <a:p>
+            <a:pPr indent="0" marL="0">
+              <a:buNone/>
+            </a:pPr>
+            <a:r>
+              <a:rPr lang="en-US" sz="900" dirty="0">
+                <a:solidFill>
+                  <a:srgbClr val="333333"/>
+                </a:solidFill>
+                <a:latin typeface="Calibri" pitchFamily="34" charset="0"/>
+                <a:ea typeface="Calibri" pitchFamily="34" charset="-122"/>
+                <a:cs typeface="Calibri" pitchFamily="34" charset="-120"/>
+              </a:rPr>
+              <a:t>1 nom pour 2 données → préfixer pour clarifier</a:t>
+            </a:r>
+            <a:endParaRPr lang="en-US" sz="900" dirty="0"/>
+          </a:p>
+        </p:txBody>
+      </p:sp>
+      <p:sp>
+        <p:nvSpPr>
+          <p:cNvPr id="25" name="Shape 23"/>
+          <p:cNvSpPr/>
+          <p:nvPr/>
+        </p:nvSpPr>
+        <p:spPr>
+          <a:xfrm>
+            <a:off x="457200" y="3474720"/>
+            <a:ext cx="2286000" cy="475488"/>
+          </a:xfrm>
+          <a:prstGeom prst="rect">
+            <a:avLst/>
+          </a:prstGeom>
+          <a:solidFill>
+            <a:srgbClr val="F0F0F0"/>
+          </a:solidFill>
+          <a:ln/>
+        </p:spPr>
+      </p:sp>
+      <p:sp>
+        <p:nvSpPr>
+          <p:cNvPr id="26" name="Text 24"/>
+          <p:cNvSpPr/>
+          <p:nvPr/>
+        </p:nvSpPr>
+        <p:spPr>
+          <a:xfrm>
+            <a:off x="548640" y="3474720"/>
+            <a:ext cx="2103120" cy="475488"/>
+          </a:xfrm>
+          <a:prstGeom prst="rect">
+            <a:avLst/>
+          </a:prstGeom>
+          <a:noFill/>
+          <a:ln/>
+        </p:spPr>
+        <p:txBody>
+          <a:bodyPr wrap="square" lIns="0" tIns="0" rIns="0" bIns="0" rtlCol="0" anchor="ctr"/>
+          <a:lstStyle/>
+          <a:p>
+            <a:pPr indent="0" marL="0">
+              <a:buNone/>
+            </a:pPr>
+            <a:r>
+              <a:rPr lang="en-US" sz="900" b="1" dirty="0">
+                <a:solidFill>
+                  <a:srgbClr val="1B5E20"/>
+                </a:solidFill>
+                <a:latin typeface="Trebuchet MS" pitchFamily="34" charset="0"/>
+                <a:ea typeface="Trebuchet MS" pitchFamily="34" charset="-122"/>
+                <a:cs typeface="Trebuchet MS" pitchFamily="34" charset="-120"/>
+              </a:rPr>
+              <a:t>Règle de gestion</a:t>
+            </a:r>
+            <a:endParaRPr lang="en-US" sz="900" dirty="0"/>
+          </a:p>
+        </p:txBody>
+      </p:sp>
+      <p:sp>
+        <p:nvSpPr>
+          <p:cNvPr id="27" name="Shape 25"/>
+          <p:cNvSpPr/>
+          <p:nvPr/>
+        </p:nvSpPr>
+        <p:spPr>
+          <a:xfrm>
+            <a:off x="2743200" y="3474720"/>
+            <a:ext cx="5943600" cy="475488"/>
+          </a:xfrm>
+          <a:prstGeom prst="rect">
+            <a:avLst/>
+          </a:prstGeom>
+          <a:solidFill>
+            <a:srgbClr val="F0F0F0"/>
+          </a:solidFill>
+          <a:ln/>
+        </p:spPr>
+      </p:sp>
+      <p:sp>
+        <p:nvSpPr>
+          <p:cNvPr id="28" name="Text 26"/>
+          <p:cNvSpPr/>
+          <p:nvPr/>
+        </p:nvSpPr>
+        <p:spPr>
+          <a:xfrm>
+            <a:off x="2834640" y="3474720"/>
+            <a:ext cx="5760720" cy="475488"/>
+          </a:xfrm>
+          <a:prstGeom prst="rect">
+            <a:avLst/>
+          </a:prstGeom>
+          <a:noFill/>
+          <a:ln/>
+        </p:spPr>
+        <p:txBody>
+          <a:bodyPr wrap="square" lIns="0" tIns="0" rIns="0" bIns="0" rtlCol="0" anchor="ctr"/>
+          <a:lstStyle/>
+          <a:p>
+            <a:pPr indent="0" marL="0">
+              <a:buNone/>
+            </a:pPr>
+            <a:r>
+              <a:rPr lang="en-US" sz="900" dirty="0">
+                <a:solidFill>
+                  <a:srgbClr val="333333"/>
+                </a:solidFill>
+                <a:latin typeface="Calibri" pitchFamily="34" charset="0"/>
+                <a:ea typeface="Calibri" pitchFamily="34" charset="-122"/>
+                <a:cs typeface="Calibri" pitchFamily="34" charset="-120"/>
+              </a:rPr>
+              <a:t>Contrainte métier qui guide la conception (N:M, CHECK, UNIQUE...)</a:t>
             </a:r>
             <a:endParaRPr lang="en-US" sz="900" dirty="0"/>
           </a:p>
